--- a/Project 2 - clustering/prezentacja.pptx
+++ b/Project 2 - clustering/prezentacja.pptx
@@ -8294,8 +8294,8 @@
         </p:nvSpPr>
         <p:spPr>
           <a:xfrm>
-            <a:off x="3200400" y="2167705"/>
-            <a:ext cx="8991600" cy="1893334"/>
+            <a:off x="3200400" y="2820838"/>
+            <a:ext cx="8991600" cy="1909068"/>
           </a:xfrm>
         </p:spPr>
         <p:txBody>
@@ -8327,7 +8327,7 @@
         </p:nvSpPr>
         <p:spPr>
           <a:xfrm>
-            <a:off x="3200400" y="4061039"/>
+            <a:off x="5611812" y="4729906"/>
             <a:ext cx="6580188" cy="580921"/>
           </a:xfrm>
         </p:spPr>
@@ -8817,7 +8817,7 @@
           <a:p>
             <a:r>
               <a:rPr lang="pl-PL" b="1" dirty="0"/>
-              <a:t>✔ Lepsze dopasowanie ofert</a:t>
+              <a:t>Lepsze dopasowanie ofert</a:t>
             </a:r>
             <a:br>
               <a:rPr lang="pl-PL" dirty="0"/>
@@ -8837,7 +8837,7 @@
           <a:p>
             <a:r>
               <a:rPr lang="pl-PL" b="1" dirty="0"/>
-              <a:t>✔ Większa skuteczność kampanii</a:t>
+              <a:t>Większa skuteczność kampanii</a:t>
             </a:r>
             <a:br>
               <a:rPr lang="pl-PL" dirty="0"/>
@@ -8858,7 +8858,7 @@
           <a:p>
             <a:r>
               <a:rPr lang="pl-PL" b="1" dirty="0"/>
-              <a:t>✔ Wzrost lojalności klientów</a:t>
+              <a:t>Wzrost lojalności klientów</a:t>
             </a:r>
             <a:br>
               <a:rPr lang="pl-PL" dirty="0"/>
@@ -8870,8 +8870,12 @@
           </a:p>
           <a:p>
             <a:r>
+              <a:rPr lang="pl-PL" b="1"/>
+              <a:t>Efektywniejsze </a:t>
+            </a:r>
+            <a:r>
               <a:rPr lang="pl-PL" b="1" dirty="0"/>
-              <a:t>✔ Efektywniejsze zarządzanie ryzykiem</a:t>
+              <a:t>zarządzanie ryzykiem</a:t>
             </a:r>
             <a:br>
               <a:rPr lang="pl-PL" dirty="0"/>
@@ -10264,7 +10268,7 @@
         </p:nvSpPr>
         <p:spPr>
           <a:xfrm>
-            <a:off x="313267" y="1885815"/>
+            <a:off x="431800" y="1906360"/>
             <a:ext cx="4961466" cy="2194694"/>
           </a:xfrm>
         </p:spPr>
@@ -12638,15 +12642,6 @@
 </file>
 
 <file path=customXml/item1.xml><?xml version="1.0" encoding="utf-8"?>
-<p:properties xmlns:p="http://schemas.microsoft.com/office/2006/metadata/properties" xmlns:xsi="http://www.w3.org/2001/XMLSchema-instance" xmlns:pc="http://schemas.microsoft.com/office/infopath/2007/PartnerControls">
-  <documentManagement>
-    <_ip_UnifiedCompliancePolicyUIAction xmlns="http://schemas.microsoft.com/sharepoint/v3" xsi:nil="true"/>
-    <_ip_UnifiedCompliancePolicyProperties xmlns="http://schemas.microsoft.com/sharepoint/v3" xsi:nil="true"/>
-  </documentManagement>
-</p:properties>
-</file>
-
-<file path=customXml/item2.xml><?xml version="1.0" encoding="utf-8"?>
 <ct:contentTypeSchema xmlns:ct="http://schemas.microsoft.com/office/2006/metadata/contentType" xmlns:ma="http://schemas.microsoft.com/office/2006/metadata/properties/metaAttributes" ct:_="" ma:_="" ma:contentTypeName="Document" ma:contentTypeID="0x010100DEEA25CC0A0AC24199CDC46C25B8B0BC" ma:contentTypeVersion="9" ma:contentTypeDescription="Create a new document." ma:contentTypeScope="" ma:versionID="76e25e1730b4532ab1d5e5b131a96a5a">
   <xsd:schema xmlns:xsd="http://www.w3.org/2001/XMLSchema" xmlns:xs="http://www.w3.org/2001/XMLSchema" xmlns:p="http://schemas.microsoft.com/office/2006/metadata/properties" xmlns:ns1="http://schemas.microsoft.com/sharepoint/v3" xmlns:ns2="6dc4bcd6-49db-4c07-9060-8acfc67cef9f" xmlns:ns3="fb0879af-3eba-417a-a55a-ffe6dcd6ca77" targetNamespace="http://schemas.microsoft.com/office/2006/metadata/properties" ma:root="true" ma:fieldsID="ad1e9281a84c4949647088091c718de3" ns1:_="" ns2:_="" ns3:_="">
     <xsd:import namespace="http://schemas.microsoft.com/sharepoint/v3"/>
@@ -12848,25 +12843,16 @@
 </ct:contentTypeSchema>
 </file>
 
-<file path=customXml/itemProps1.xml><?xml version="1.0" encoding="utf-8"?>
-<ds:datastoreItem xmlns:ds="http://schemas.openxmlformats.org/officeDocument/2006/customXml" ds:itemID="{EB2218FC-8412-44B9-9E82-D51F1F531141}">
-  <ds:schemaRefs>
-    <ds:schemaRef ds:uri="http://purl.org/dc/elements/1.1/"/>
-    <ds:schemaRef ds:uri="http://schemas.microsoft.com/sharepoint/v3"/>
-    <ds:schemaRef ds:uri="http://schemas.microsoft.com/office/2006/documentManagement/types"/>
-    <ds:schemaRef ds:uri="fb0879af-3eba-417a-a55a-ffe6dcd6ca77"/>
-    <ds:schemaRef ds:uri="http://schemas.microsoft.com/office/2006/metadata/properties"/>
-    <ds:schemaRef ds:uri="http://schemas.microsoft.com/office/infopath/2007/PartnerControls"/>
-    <ds:schemaRef ds:uri="6dc4bcd6-49db-4c07-9060-8acfc67cef9f"/>
-    <ds:schemaRef ds:uri="http://www.w3.org/XML/1998/namespace"/>
-    <ds:schemaRef ds:uri="http://schemas.openxmlformats.org/package/2006/metadata/core-properties"/>
-    <ds:schemaRef ds:uri="http://purl.org/dc/dcmitype/"/>
-    <ds:schemaRef ds:uri="http://purl.org/dc/terms/"/>
-  </ds:schemaRefs>
-</ds:datastoreItem>
+<file path=customXml/item2.xml><?xml version="1.0" encoding="utf-8"?>
+<p:properties xmlns:p="http://schemas.microsoft.com/office/2006/metadata/properties" xmlns:xsi="http://www.w3.org/2001/XMLSchema-instance" xmlns:pc="http://schemas.microsoft.com/office/infopath/2007/PartnerControls">
+  <documentManagement>
+    <_ip_UnifiedCompliancePolicyUIAction xmlns="http://schemas.microsoft.com/sharepoint/v3" xsi:nil="true"/>
+    <_ip_UnifiedCompliancePolicyProperties xmlns="http://schemas.microsoft.com/sharepoint/v3" xsi:nil="true"/>
+  </documentManagement>
+</p:properties>
 </file>
 
-<file path=customXml/itemProps2.xml><?xml version="1.0" encoding="utf-8"?>
+<file path=customXml/itemProps1.xml><?xml version="1.0" encoding="utf-8"?>
 <ds:datastoreItem xmlns:ds="http://schemas.openxmlformats.org/officeDocument/2006/customXml" ds:itemID="{B64A4C9D-F801-4923-BC6D-E0006F512331}">
   <ds:schemaRefs>
     <ds:schemaRef ds:uri="http://schemas.microsoft.com/office/2006/metadata/contentType"/>
@@ -12884,4 +12870,22 @@
     <ds:schemaRef ds:uri="http://schemas.microsoft.com/internal/obd"/>
   </ds:schemaRefs>
 </ds:datastoreItem>
+</file>
+
+<file path=customXml/itemProps2.xml><?xml version="1.0" encoding="utf-8"?>
+<ds:datastoreItem xmlns:ds="http://schemas.openxmlformats.org/officeDocument/2006/customXml" ds:itemID="{EB2218FC-8412-44B9-9E82-D51F1F531141}">
+  <ds:schemaRefs>
+    <ds:schemaRef ds:uri="http://purl.org/dc/elements/1.1/"/>
+    <ds:schemaRef ds:uri="http://schemas.microsoft.com/sharepoint/v3"/>
+    <ds:schemaRef ds:uri="http://schemas.microsoft.com/office/2006/documentManagement/types"/>
+    <ds:schemaRef ds:uri="fb0879af-3eba-417a-a55a-ffe6dcd6ca77"/>
+    <ds:schemaRef ds:uri="http://schemas.microsoft.com/office/2006/metadata/properties"/>
+    <ds:schemaRef ds:uri="http://schemas.microsoft.com/office/infopath/2007/PartnerControls"/>
+    <ds:schemaRef ds:uri="6dc4bcd6-49db-4c07-9060-8acfc67cef9f"/>
+    <ds:schemaRef ds:uri="http://www.w3.org/XML/1998/namespace"/>
+    <ds:schemaRef ds:uri="http://schemas.openxmlformats.org/package/2006/metadata/core-properties"/>
+    <ds:schemaRef ds:uri="http://purl.org/dc/dcmitype/"/>
+    <ds:schemaRef ds:uri="http://purl.org/dc/terms/"/>
+  </ds:schemaRefs>
+</ds:datastoreItem>
 </file>
--- a/Project 2 - clustering/prezentacja.pptx
+++ b/Project 2 - clustering/prezentacja.pptx
@@ -228,7 +228,7 @@
             <a:pPr rtl="0"/>
             <a:fld id="{A605F6F8-5FA6-46DF-BB02-F43ECCC7D95B}" type="datetime1">
               <a:rPr lang="pl-PL" smtClean="0"/>
-              <a:t>2025-06-09</a:t>
+              <a:t>10.06.2025</a:t>
             </a:fld>
             <a:endParaRPr lang="pl-PL" dirty="0"/>
           </a:p>
@@ -409,7 +409,7 @@
             <a:fld id="{EF965CE9-30C1-43D6-8A95-9B0D502EF4C4}" type="datetime1">
               <a:rPr lang="pl-PL" smtClean="0"/>
               <a:pPr/>
-              <a:t>2025-06-09</a:t>
+              <a:t>10.06.2025</a:t>
             </a:fld>
             <a:endParaRPr lang="pl-PL" dirty="0"/>
           </a:p>
@@ -8342,6 +8342,48 @@
           </a:p>
           <a:p>
             <a:endParaRPr lang="pl-PL" dirty="0"/>
+          </a:p>
+        </p:txBody>
+      </p:sp>
+      <p:sp>
+        <p:nvSpPr>
+          <p:cNvPr id="2" name="pole tekstowe 1">
+            <a:extLst>
+              <a:ext uri="{FF2B5EF4-FFF2-40B4-BE49-F238E27FC236}">
+                <a16:creationId xmlns:a16="http://schemas.microsoft.com/office/drawing/2014/main" id="{A6CA0FC1-32B3-417C-7E5A-27F82A13BFFC}"/>
+              </a:ext>
+            </a:extLst>
+          </p:cNvPr>
+          <p:cNvSpPr txBox="1"/>
+          <p:nvPr/>
+        </p:nvSpPr>
+        <p:spPr>
+          <a:xfrm>
+            <a:off x="10021213" y="6157694"/>
+            <a:ext cx="2170787" cy="646331"/>
+          </a:xfrm>
+          <a:prstGeom prst="rect">
+            <a:avLst/>
+          </a:prstGeom>
+          <a:noFill/>
+        </p:spPr>
+        <p:txBody>
+          <a:bodyPr wrap="none" rtlCol="0">
+            <a:spAutoFit/>
+          </a:bodyPr>
+          <a:lstStyle/>
+          <a:p>
+            <a:r>
+              <a:rPr lang="pl-PL" dirty="0"/>
+              <a:t>Maciej Andrzejewski</a:t>
+            </a:r>
+          </a:p>
+          <a:p>
+            <a:pPr algn="r"/>
+            <a:r>
+              <a:rPr lang="pl-PL" dirty="0"/>
+              <a:t>Piotr Kotłowski</a:t>
+            </a:r>
           </a:p>
         </p:txBody>
       </p:sp>
@@ -12642,6 +12684,15 @@
 </file>
 
 <file path=customXml/item1.xml><?xml version="1.0" encoding="utf-8"?>
+<p:properties xmlns:p="http://schemas.microsoft.com/office/2006/metadata/properties" xmlns:xsi="http://www.w3.org/2001/XMLSchema-instance" xmlns:pc="http://schemas.microsoft.com/office/infopath/2007/PartnerControls">
+  <documentManagement>
+    <_ip_UnifiedCompliancePolicyUIAction xmlns="http://schemas.microsoft.com/sharepoint/v3" xsi:nil="true"/>
+    <_ip_UnifiedCompliancePolicyProperties xmlns="http://schemas.microsoft.com/sharepoint/v3" xsi:nil="true"/>
+  </documentManagement>
+</p:properties>
+</file>
+
+<file path=customXml/item2.xml><?xml version="1.0" encoding="utf-8"?>
 <ct:contentTypeSchema xmlns:ct="http://schemas.microsoft.com/office/2006/metadata/contentType" xmlns:ma="http://schemas.microsoft.com/office/2006/metadata/properties/metaAttributes" ct:_="" ma:_="" ma:contentTypeName="Document" ma:contentTypeID="0x010100DEEA25CC0A0AC24199CDC46C25B8B0BC" ma:contentTypeVersion="9" ma:contentTypeDescription="Create a new document." ma:contentTypeScope="" ma:versionID="76e25e1730b4532ab1d5e5b131a96a5a">
   <xsd:schema xmlns:xsd="http://www.w3.org/2001/XMLSchema" xmlns:xs="http://www.w3.org/2001/XMLSchema" xmlns:p="http://schemas.microsoft.com/office/2006/metadata/properties" xmlns:ns1="http://schemas.microsoft.com/sharepoint/v3" xmlns:ns2="6dc4bcd6-49db-4c07-9060-8acfc67cef9f" xmlns:ns3="fb0879af-3eba-417a-a55a-ffe6dcd6ca77" targetNamespace="http://schemas.microsoft.com/office/2006/metadata/properties" ma:root="true" ma:fieldsID="ad1e9281a84c4949647088091c718de3" ns1:_="" ns2:_="" ns3:_="">
     <xsd:import namespace="http://schemas.microsoft.com/sharepoint/v3"/>
@@ -12843,16 +12894,25 @@
 </ct:contentTypeSchema>
 </file>
 
-<file path=customXml/item2.xml><?xml version="1.0" encoding="utf-8"?>
-<p:properties xmlns:p="http://schemas.microsoft.com/office/2006/metadata/properties" xmlns:xsi="http://www.w3.org/2001/XMLSchema-instance" xmlns:pc="http://schemas.microsoft.com/office/infopath/2007/PartnerControls">
-  <documentManagement>
-    <_ip_UnifiedCompliancePolicyUIAction xmlns="http://schemas.microsoft.com/sharepoint/v3" xsi:nil="true"/>
-    <_ip_UnifiedCompliancePolicyProperties xmlns="http://schemas.microsoft.com/sharepoint/v3" xsi:nil="true"/>
-  </documentManagement>
-</p:properties>
+<file path=customXml/itemProps1.xml><?xml version="1.0" encoding="utf-8"?>
+<ds:datastoreItem xmlns:ds="http://schemas.openxmlformats.org/officeDocument/2006/customXml" ds:itemID="{EB2218FC-8412-44B9-9E82-D51F1F531141}">
+  <ds:schemaRefs>
+    <ds:schemaRef ds:uri="http://purl.org/dc/elements/1.1/"/>
+    <ds:schemaRef ds:uri="http://schemas.microsoft.com/sharepoint/v3"/>
+    <ds:schemaRef ds:uri="http://schemas.microsoft.com/office/2006/documentManagement/types"/>
+    <ds:schemaRef ds:uri="fb0879af-3eba-417a-a55a-ffe6dcd6ca77"/>
+    <ds:schemaRef ds:uri="http://schemas.microsoft.com/office/2006/metadata/properties"/>
+    <ds:schemaRef ds:uri="http://schemas.microsoft.com/office/infopath/2007/PartnerControls"/>
+    <ds:schemaRef ds:uri="6dc4bcd6-49db-4c07-9060-8acfc67cef9f"/>
+    <ds:schemaRef ds:uri="http://www.w3.org/XML/1998/namespace"/>
+    <ds:schemaRef ds:uri="http://schemas.openxmlformats.org/package/2006/metadata/core-properties"/>
+    <ds:schemaRef ds:uri="http://purl.org/dc/dcmitype/"/>
+    <ds:schemaRef ds:uri="http://purl.org/dc/terms/"/>
+  </ds:schemaRefs>
+</ds:datastoreItem>
 </file>
 
-<file path=customXml/itemProps1.xml><?xml version="1.0" encoding="utf-8"?>
+<file path=customXml/itemProps2.xml><?xml version="1.0" encoding="utf-8"?>
 <ds:datastoreItem xmlns:ds="http://schemas.openxmlformats.org/officeDocument/2006/customXml" ds:itemID="{B64A4C9D-F801-4923-BC6D-E0006F512331}">
   <ds:schemaRefs>
     <ds:schemaRef ds:uri="http://schemas.microsoft.com/office/2006/metadata/contentType"/>
@@ -12870,22 +12930,4 @@
     <ds:schemaRef ds:uri="http://schemas.microsoft.com/internal/obd"/>
   </ds:schemaRefs>
 </ds:datastoreItem>
-</file>
-
-<file path=customXml/itemProps2.xml><?xml version="1.0" encoding="utf-8"?>
-<ds:datastoreItem xmlns:ds="http://schemas.openxmlformats.org/officeDocument/2006/customXml" ds:itemID="{EB2218FC-8412-44B9-9E82-D51F1F531141}">
-  <ds:schemaRefs>
-    <ds:schemaRef ds:uri="http://purl.org/dc/elements/1.1/"/>
-    <ds:schemaRef ds:uri="http://schemas.microsoft.com/sharepoint/v3"/>
-    <ds:schemaRef ds:uri="http://schemas.microsoft.com/office/2006/documentManagement/types"/>
-    <ds:schemaRef ds:uri="fb0879af-3eba-417a-a55a-ffe6dcd6ca77"/>
-    <ds:schemaRef ds:uri="http://schemas.microsoft.com/office/2006/metadata/properties"/>
-    <ds:schemaRef ds:uri="http://schemas.microsoft.com/office/infopath/2007/PartnerControls"/>
-    <ds:schemaRef ds:uri="6dc4bcd6-49db-4c07-9060-8acfc67cef9f"/>
-    <ds:schemaRef ds:uri="http://www.w3.org/XML/1998/namespace"/>
-    <ds:schemaRef ds:uri="http://schemas.openxmlformats.org/package/2006/metadata/core-properties"/>
-    <ds:schemaRef ds:uri="http://purl.org/dc/dcmitype/"/>
-    <ds:schemaRef ds:uri="http://purl.org/dc/terms/"/>
-  </ds:schemaRefs>
-</ds:datastoreItem>
 </file>
--- a/Project 2 - clustering/prezentacja.pptx
+++ b/Project 2 - clustering/prezentacja.pptx
@@ -5,10 +5,10 @@
     <p:sldMasterId id="2147483648" r:id="rId3"/>
   </p:sldMasterIdLst>
   <p:notesMasterIdLst>
-    <p:notesMasterId r:id="rId16"/>
+    <p:notesMasterId r:id="rId17"/>
   </p:notesMasterIdLst>
   <p:handoutMasterIdLst>
-    <p:handoutMasterId r:id="rId17"/>
+    <p:handoutMasterId r:id="rId18"/>
   </p:handoutMasterIdLst>
   <p:sldIdLst>
     <p:sldId id="298" r:id="rId4"/>
@@ -17,12 +17,13 @@
     <p:sldId id="300" r:id="rId7"/>
     <p:sldId id="292" r:id="rId8"/>
     <p:sldId id="284" r:id="rId9"/>
-    <p:sldId id="301" r:id="rId10"/>
-    <p:sldId id="303" r:id="rId11"/>
-    <p:sldId id="302" r:id="rId12"/>
-    <p:sldId id="293" r:id="rId13"/>
-    <p:sldId id="294" r:id="rId14"/>
-    <p:sldId id="296" r:id="rId15"/>
+    <p:sldId id="304" r:id="rId10"/>
+    <p:sldId id="301" r:id="rId11"/>
+    <p:sldId id="303" r:id="rId12"/>
+    <p:sldId id="302" r:id="rId13"/>
+    <p:sldId id="293" r:id="rId14"/>
+    <p:sldId id="294" r:id="rId15"/>
+    <p:sldId id="296" r:id="rId16"/>
   </p:sldIdLst>
   <p:sldSz cx="12192000" cy="6858000"/>
   <p:notesSz cx="6858000" cy="9144000"/>
@@ -228,7 +229,7 @@
             <a:pPr rtl="0"/>
             <a:fld id="{A605F6F8-5FA6-46DF-BB02-F43ECCC7D95B}" type="datetime1">
               <a:rPr lang="pl-PL" smtClean="0"/>
-              <a:t>10.06.2025</a:t>
+              <a:t>2025-06-10</a:t>
             </a:fld>
             <a:endParaRPr lang="pl-PL" dirty="0"/>
           </a:p>
@@ -409,7 +410,7 @@
             <a:fld id="{EF965CE9-30C1-43D6-8A95-9B0D502EF4C4}" type="datetime1">
               <a:rPr lang="pl-PL" smtClean="0"/>
               <a:pPr/>
-              <a:t>10.06.2025</a:t>
+              <a:t>2025-06-10</a:t>
             </a:fld>
             <a:endParaRPr lang="pl-PL" dirty="0"/>
           </a:p>
@@ -769,7 +770,13 @@
   <p:cSld>
     <p:spTree>
       <p:nvGrpSpPr>
-        <p:cNvPr id="1" name=""/>
+        <p:cNvPr id="1" name="">
+          <a:extLst>
+            <a:ext uri="{FF2B5EF4-FFF2-40B4-BE49-F238E27FC236}">
+              <a16:creationId xmlns:a16="http://schemas.microsoft.com/office/drawing/2014/main" id="{E8D423CC-EA3B-FE92-4D35-130805A22C19}"/>
+            </a:ext>
+          </a:extLst>
+        </p:cNvPr>
         <p:cNvGrpSpPr/>
         <p:nvPr/>
       </p:nvGrpSpPr>
@@ -783,7 +790,13 @@
       </p:grpSpPr>
       <p:sp>
         <p:nvSpPr>
-          <p:cNvPr id="2" name="Symbol zastępczy obrazu slajdu 1"/>
+          <p:cNvPr id="2" name="Symbol zastępczy obrazu slajdu 1">
+            <a:extLst>
+              <a:ext uri="{FF2B5EF4-FFF2-40B4-BE49-F238E27FC236}">
+                <a16:creationId xmlns:a16="http://schemas.microsoft.com/office/drawing/2014/main" id="{FF54AB5E-2A8C-7622-34ED-815B5B8022D5}"/>
+              </a:ext>
+            </a:extLst>
+          </p:cNvPr>
           <p:cNvSpPr>
             <a:spLocks noGrp="1" noRot="1" noChangeAspect="1"/>
           </p:cNvSpPr>
@@ -795,7 +808,13 @@
       </p:sp>
       <p:sp>
         <p:nvSpPr>
-          <p:cNvPr id="3" name="Symbol zastępczy notatek 2"/>
+          <p:cNvPr id="3" name="Symbol zastępczy notatek 2">
+            <a:extLst>
+              <a:ext uri="{FF2B5EF4-FFF2-40B4-BE49-F238E27FC236}">
+                <a16:creationId xmlns:a16="http://schemas.microsoft.com/office/drawing/2014/main" id="{DA8A36FA-DC73-8DAE-BED0-846D8A83E31D}"/>
+              </a:ext>
+            </a:extLst>
+          </p:cNvPr>
           <p:cNvSpPr>
             <a:spLocks noGrp="1"/>
           </p:cNvSpPr>
@@ -814,7 +833,13 @@
       </p:sp>
       <p:sp>
         <p:nvSpPr>
-          <p:cNvPr id="4" name="Symbol zastępczy numeru slajdu 3"/>
+          <p:cNvPr id="4" name="Symbol zastępczy numeru slajdu 3">
+            <a:extLst>
+              <a:ext uri="{FF2B5EF4-FFF2-40B4-BE49-F238E27FC236}">
+                <a16:creationId xmlns:a16="http://schemas.microsoft.com/office/drawing/2014/main" id="{73FE4539-D0BB-A0B4-12FC-190568148856}"/>
+              </a:ext>
+            </a:extLst>
+          </p:cNvPr>
           <p:cNvSpPr>
             <a:spLocks noGrp="1"/>
           </p:cNvSpPr>
@@ -839,7 +864,7 @@
     </p:spTree>
     <p:extLst>
       <p:ext uri="{BB962C8B-B14F-4D97-AF65-F5344CB8AC3E}">
-        <p14:creationId xmlns:p14="http://schemas.microsoft.com/office/powerpoint/2010/main" val="218051224"/>
+        <p14:creationId xmlns:p14="http://schemas.microsoft.com/office/powerpoint/2010/main" val="880461259"/>
       </p:ext>
     </p:extLst>
   </p:cSld>
@@ -924,7 +949,7 @@
     </p:spTree>
     <p:extLst>
       <p:ext uri="{BB962C8B-B14F-4D97-AF65-F5344CB8AC3E}">
-        <p14:creationId xmlns:p14="http://schemas.microsoft.com/office/powerpoint/2010/main" val="3983023396"/>
+        <p14:creationId xmlns:p14="http://schemas.microsoft.com/office/powerpoint/2010/main" val="218051224"/>
       </p:ext>
     </p:extLst>
   </p:cSld>
@@ -1001,6 +1026,91 @@
             <a:fld id="{8530193B-564F-4854-8A52-728F3FB19C85}" type="slidenum">
               <a:rPr lang="pl-PL" smtClean="0"/>
               <a:t>12</a:t>
+            </a:fld>
+            <a:endParaRPr lang="pl-PL" dirty="0"/>
+          </a:p>
+        </p:txBody>
+      </p:sp>
+    </p:spTree>
+    <p:extLst>
+      <p:ext uri="{BB962C8B-B14F-4D97-AF65-F5344CB8AC3E}">
+        <p14:creationId xmlns:p14="http://schemas.microsoft.com/office/powerpoint/2010/main" val="3983023396"/>
+      </p:ext>
+    </p:extLst>
+  </p:cSld>
+  <p:clrMapOvr>
+    <a:masterClrMapping/>
+  </p:clrMapOvr>
+</p:notes>
+</file>
+
+<file path=ppt/notesSlides/notesSlide13.xml><?xml version="1.0" encoding="utf-8"?>
+<p:notes xmlns:a="http://schemas.openxmlformats.org/drawingml/2006/main" xmlns:r="http://schemas.openxmlformats.org/officeDocument/2006/relationships" xmlns:p="http://schemas.openxmlformats.org/presentationml/2006/main">
+  <p:cSld>
+    <p:spTree>
+      <p:nvGrpSpPr>
+        <p:cNvPr id="1" name=""/>
+        <p:cNvGrpSpPr/>
+        <p:nvPr/>
+      </p:nvGrpSpPr>
+      <p:grpSpPr>
+        <a:xfrm>
+          <a:off x="0" y="0"/>
+          <a:ext cx="0" cy="0"/>
+          <a:chOff x="0" y="0"/>
+          <a:chExt cx="0" cy="0"/>
+        </a:xfrm>
+      </p:grpSpPr>
+      <p:sp>
+        <p:nvSpPr>
+          <p:cNvPr id="2" name="Symbol zastępczy obrazu slajdu 1"/>
+          <p:cNvSpPr>
+            <a:spLocks noGrp="1" noRot="1" noChangeAspect="1"/>
+          </p:cNvSpPr>
+          <p:nvPr>
+            <p:ph type="sldImg"/>
+          </p:nvPr>
+        </p:nvSpPr>
+        <p:spPr/>
+      </p:sp>
+      <p:sp>
+        <p:nvSpPr>
+          <p:cNvPr id="3" name="Symbol zastępczy notatek 2"/>
+          <p:cNvSpPr>
+            <a:spLocks noGrp="1"/>
+          </p:cNvSpPr>
+          <p:nvPr>
+            <p:ph type="body" idx="1"/>
+          </p:nvPr>
+        </p:nvSpPr>
+        <p:spPr/>
+        <p:txBody>
+          <a:bodyPr/>
+          <a:lstStyle/>
+          <a:p>
+            <a:endParaRPr lang="pl-PL"/>
+          </a:p>
+        </p:txBody>
+      </p:sp>
+      <p:sp>
+        <p:nvSpPr>
+          <p:cNvPr id="4" name="Symbol zastępczy numeru slajdu 3"/>
+          <p:cNvSpPr>
+            <a:spLocks noGrp="1"/>
+          </p:cNvSpPr>
+          <p:nvPr>
+            <p:ph type="sldNum" sz="quarter" idx="10"/>
+          </p:nvPr>
+        </p:nvSpPr>
+        <p:spPr/>
+        <p:txBody>
+          <a:bodyPr/>
+          <a:lstStyle/>
+          <a:p>
+            <a:pPr rtl="0"/>
+            <a:fld id="{8530193B-564F-4854-8A52-728F3FB19C85}" type="slidenum">
+              <a:rPr lang="pl-PL" smtClean="0"/>
+              <a:t>13</a:t>
             </a:fld>
             <a:endParaRPr lang="pl-PL" dirty="0"/>
           </a:p>
@@ -1476,6 +1586,115 @@
         <p:cNvPr id="1" name="">
           <a:extLst>
             <a:ext uri="{FF2B5EF4-FFF2-40B4-BE49-F238E27FC236}">
+              <a16:creationId xmlns:a16="http://schemas.microsoft.com/office/drawing/2014/main" id="{6F02702B-D2ED-62F5-9D66-1F7F170ED429}"/>
+            </a:ext>
+          </a:extLst>
+        </p:cNvPr>
+        <p:cNvGrpSpPr/>
+        <p:nvPr/>
+      </p:nvGrpSpPr>
+      <p:grpSpPr>
+        <a:xfrm>
+          <a:off x="0" y="0"/>
+          <a:ext cx="0" cy="0"/>
+          <a:chOff x="0" y="0"/>
+          <a:chExt cx="0" cy="0"/>
+        </a:xfrm>
+      </p:grpSpPr>
+      <p:sp>
+        <p:nvSpPr>
+          <p:cNvPr id="2" name="Symbol zastępczy obrazu slajdu 1">
+            <a:extLst>
+              <a:ext uri="{FF2B5EF4-FFF2-40B4-BE49-F238E27FC236}">
+                <a16:creationId xmlns:a16="http://schemas.microsoft.com/office/drawing/2014/main" id="{ACD09248-10B4-A885-6AA5-0D6652C269BE}"/>
+              </a:ext>
+            </a:extLst>
+          </p:cNvPr>
+          <p:cNvSpPr>
+            <a:spLocks noGrp="1" noRot="1" noChangeAspect="1"/>
+          </p:cNvSpPr>
+          <p:nvPr>
+            <p:ph type="sldImg"/>
+          </p:nvPr>
+        </p:nvSpPr>
+        <p:spPr/>
+      </p:sp>
+      <p:sp>
+        <p:nvSpPr>
+          <p:cNvPr id="3" name="Symbol zastępczy notatek 2">
+            <a:extLst>
+              <a:ext uri="{FF2B5EF4-FFF2-40B4-BE49-F238E27FC236}">
+                <a16:creationId xmlns:a16="http://schemas.microsoft.com/office/drawing/2014/main" id="{0CAD88FD-DECD-D4C9-B0BD-7DA075CD84E0}"/>
+              </a:ext>
+            </a:extLst>
+          </p:cNvPr>
+          <p:cNvSpPr>
+            <a:spLocks noGrp="1"/>
+          </p:cNvSpPr>
+          <p:nvPr>
+            <p:ph type="body" idx="1"/>
+          </p:nvPr>
+        </p:nvSpPr>
+        <p:spPr/>
+        <p:txBody>
+          <a:bodyPr/>
+          <a:lstStyle/>
+          <a:p>
+            <a:endParaRPr lang="pl-PL"/>
+          </a:p>
+        </p:txBody>
+      </p:sp>
+      <p:sp>
+        <p:nvSpPr>
+          <p:cNvPr id="4" name="Symbol zastępczy numeru slajdu 3">
+            <a:extLst>
+              <a:ext uri="{FF2B5EF4-FFF2-40B4-BE49-F238E27FC236}">
+                <a16:creationId xmlns:a16="http://schemas.microsoft.com/office/drawing/2014/main" id="{FB11A611-BD5D-1CC5-E883-F444034F61DF}"/>
+              </a:ext>
+            </a:extLst>
+          </p:cNvPr>
+          <p:cNvSpPr>
+            <a:spLocks noGrp="1"/>
+          </p:cNvSpPr>
+          <p:nvPr>
+            <p:ph type="sldNum" sz="quarter" idx="10"/>
+          </p:nvPr>
+        </p:nvSpPr>
+        <p:spPr/>
+        <p:txBody>
+          <a:bodyPr/>
+          <a:lstStyle/>
+          <a:p>
+            <a:pPr rtl="0"/>
+            <a:fld id="{8530193B-564F-4854-8A52-728F3FB19C85}" type="slidenum">
+              <a:rPr lang="pl-PL" smtClean="0"/>
+              <a:t>7</a:t>
+            </a:fld>
+            <a:endParaRPr lang="pl-PL" dirty="0"/>
+          </a:p>
+        </p:txBody>
+      </p:sp>
+    </p:spTree>
+    <p:extLst>
+      <p:ext uri="{BB962C8B-B14F-4D97-AF65-F5344CB8AC3E}">
+        <p14:creationId xmlns:p14="http://schemas.microsoft.com/office/powerpoint/2010/main" val="2659114872"/>
+      </p:ext>
+    </p:extLst>
+  </p:cSld>
+  <p:clrMapOvr>
+    <a:masterClrMapping/>
+  </p:clrMapOvr>
+</p:notes>
+</file>
+
+<file path=ppt/notesSlides/notesSlide8.xml><?xml version="1.0" encoding="utf-8"?>
+<p:notes xmlns:a="http://schemas.openxmlformats.org/drawingml/2006/main" xmlns:r="http://schemas.openxmlformats.org/officeDocument/2006/relationships" xmlns:p="http://schemas.openxmlformats.org/presentationml/2006/main">
+  <p:cSld>
+    <p:spTree>
+      <p:nvGrpSpPr>
+        <p:cNvPr id="1" name="">
+          <a:extLst>
+            <a:ext uri="{FF2B5EF4-FFF2-40B4-BE49-F238E27FC236}">
               <a16:creationId xmlns:a16="http://schemas.microsoft.com/office/drawing/2014/main" id="{D83AA43F-E09D-6439-DBF0-80E2F883F7E6}"/>
             </a:ext>
           </a:extLst>
@@ -1558,7 +1777,7 @@
             <a:pPr rtl="0"/>
             <a:fld id="{8530193B-564F-4854-8A52-728F3FB19C85}" type="slidenum">
               <a:rPr lang="pl-PL" smtClean="0"/>
-              <a:t>7</a:t>
+              <a:t>8</a:t>
             </a:fld>
             <a:endParaRPr lang="pl-PL" dirty="0"/>
           </a:p>
@@ -1577,7 +1796,7 @@
 </p:notes>
 </file>
 
-<file path=ppt/notesSlides/notesSlide8.xml><?xml version="1.0" encoding="utf-8"?>
+<file path=ppt/notesSlides/notesSlide9.xml><?xml version="1.0" encoding="utf-8"?>
 <p:notes xmlns:a="http://schemas.openxmlformats.org/drawingml/2006/main" xmlns:r="http://schemas.openxmlformats.org/officeDocument/2006/relationships" xmlns:p="http://schemas.openxmlformats.org/presentationml/2006/main">
   <p:cSld>
     <p:spTree>
@@ -1667,7 +1886,7 @@
             <a:pPr rtl="0"/>
             <a:fld id="{8530193B-564F-4854-8A52-728F3FB19C85}" type="slidenum">
               <a:rPr lang="pl-PL" smtClean="0"/>
-              <a:t>8</a:t>
+              <a:t>9</a:t>
             </a:fld>
             <a:endParaRPr lang="pl-PL" dirty="0"/>
           </a:p>
@@ -1677,115 +1896,6 @@
     <p:extLst>
       <p:ext uri="{BB962C8B-B14F-4D97-AF65-F5344CB8AC3E}">
         <p14:creationId xmlns:p14="http://schemas.microsoft.com/office/powerpoint/2010/main" val="1572781443"/>
-      </p:ext>
-    </p:extLst>
-  </p:cSld>
-  <p:clrMapOvr>
-    <a:masterClrMapping/>
-  </p:clrMapOvr>
-</p:notes>
-</file>
-
-<file path=ppt/notesSlides/notesSlide9.xml><?xml version="1.0" encoding="utf-8"?>
-<p:notes xmlns:a="http://schemas.openxmlformats.org/drawingml/2006/main" xmlns:r="http://schemas.openxmlformats.org/officeDocument/2006/relationships" xmlns:p="http://schemas.openxmlformats.org/presentationml/2006/main">
-  <p:cSld>
-    <p:spTree>
-      <p:nvGrpSpPr>
-        <p:cNvPr id="1" name="">
-          <a:extLst>
-            <a:ext uri="{FF2B5EF4-FFF2-40B4-BE49-F238E27FC236}">
-              <a16:creationId xmlns:a16="http://schemas.microsoft.com/office/drawing/2014/main" id="{E8D423CC-EA3B-FE92-4D35-130805A22C19}"/>
-            </a:ext>
-          </a:extLst>
-        </p:cNvPr>
-        <p:cNvGrpSpPr/>
-        <p:nvPr/>
-      </p:nvGrpSpPr>
-      <p:grpSpPr>
-        <a:xfrm>
-          <a:off x="0" y="0"/>
-          <a:ext cx="0" cy="0"/>
-          <a:chOff x="0" y="0"/>
-          <a:chExt cx="0" cy="0"/>
-        </a:xfrm>
-      </p:grpSpPr>
-      <p:sp>
-        <p:nvSpPr>
-          <p:cNvPr id="2" name="Symbol zastępczy obrazu slajdu 1">
-            <a:extLst>
-              <a:ext uri="{FF2B5EF4-FFF2-40B4-BE49-F238E27FC236}">
-                <a16:creationId xmlns:a16="http://schemas.microsoft.com/office/drawing/2014/main" id="{FF54AB5E-2A8C-7622-34ED-815B5B8022D5}"/>
-              </a:ext>
-            </a:extLst>
-          </p:cNvPr>
-          <p:cNvSpPr>
-            <a:spLocks noGrp="1" noRot="1" noChangeAspect="1"/>
-          </p:cNvSpPr>
-          <p:nvPr>
-            <p:ph type="sldImg"/>
-          </p:nvPr>
-        </p:nvSpPr>
-        <p:spPr/>
-      </p:sp>
-      <p:sp>
-        <p:nvSpPr>
-          <p:cNvPr id="3" name="Symbol zastępczy notatek 2">
-            <a:extLst>
-              <a:ext uri="{FF2B5EF4-FFF2-40B4-BE49-F238E27FC236}">
-                <a16:creationId xmlns:a16="http://schemas.microsoft.com/office/drawing/2014/main" id="{DA8A36FA-DC73-8DAE-BED0-846D8A83E31D}"/>
-              </a:ext>
-            </a:extLst>
-          </p:cNvPr>
-          <p:cNvSpPr>
-            <a:spLocks noGrp="1"/>
-          </p:cNvSpPr>
-          <p:nvPr>
-            <p:ph type="body" idx="1"/>
-          </p:nvPr>
-        </p:nvSpPr>
-        <p:spPr/>
-        <p:txBody>
-          <a:bodyPr/>
-          <a:lstStyle/>
-          <a:p>
-            <a:endParaRPr lang="pl-PL"/>
-          </a:p>
-        </p:txBody>
-      </p:sp>
-      <p:sp>
-        <p:nvSpPr>
-          <p:cNvPr id="4" name="Symbol zastępczy numeru slajdu 3">
-            <a:extLst>
-              <a:ext uri="{FF2B5EF4-FFF2-40B4-BE49-F238E27FC236}">
-                <a16:creationId xmlns:a16="http://schemas.microsoft.com/office/drawing/2014/main" id="{73FE4539-D0BB-A0B4-12FC-190568148856}"/>
-              </a:ext>
-            </a:extLst>
-          </p:cNvPr>
-          <p:cNvSpPr>
-            <a:spLocks noGrp="1"/>
-          </p:cNvSpPr>
-          <p:nvPr>
-            <p:ph type="sldNum" sz="quarter" idx="10"/>
-          </p:nvPr>
-        </p:nvSpPr>
-        <p:spPr/>
-        <p:txBody>
-          <a:bodyPr/>
-          <a:lstStyle/>
-          <a:p>
-            <a:pPr rtl="0"/>
-            <a:fld id="{8530193B-564F-4854-8A52-728F3FB19C85}" type="slidenum">
-              <a:rPr lang="pl-PL" smtClean="0"/>
-              <a:t>9</a:t>
-            </a:fld>
-            <a:endParaRPr lang="pl-PL" dirty="0"/>
-          </a:p>
-        </p:txBody>
-      </p:sp>
-    </p:spTree>
-    <p:extLst>
-      <p:ext uri="{BB962C8B-B14F-4D97-AF65-F5344CB8AC3E}">
-        <p14:creationId xmlns:p14="http://schemas.microsoft.com/office/powerpoint/2010/main" val="880461259"/>
       </p:ext>
     </p:extLst>
   </p:cSld>
@@ -8403,2482 +8513,6 @@
 <file path=ppt/slides/slide10.xml><?xml version="1.0" encoding="utf-8"?>
 <p:sld xmlns:a="http://schemas.openxmlformats.org/drawingml/2006/main" xmlns:r="http://schemas.openxmlformats.org/officeDocument/2006/relationships" xmlns:p="http://schemas.openxmlformats.org/presentationml/2006/main">
   <p:cSld>
-    <p:bg>
-      <p:bgPr>
-        <a:solidFill>
-          <a:schemeClr val="tx1">
-            <a:lumMod val="75000"/>
-            <a:lumOff val="25000"/>
-          </a:schemeClr>
-        </a:solidFill>
-        <a:effectLst/>
-      </p:bgPr>
-    </p:bg>
-    <p:spTree>
-      <p:nvGrpSpPr>
-        <p:cNvPr id="1" name=""/>
-        <p:cNvGrpSpPr/>
-        <p:nvPr/>
-      </p:nvGrpSpPr>
-      <p:grpSpPr>
-        <a:xfrm>
-          <a:off x="0" y="0"/>
-          <a:ext cx="0" cy="0"/>
-          <a:chOff x="0" y="0"/>
-          <a:chExt cx="0" cy="0"/>
-        </a:xfrm>
-      </p:grpSpPr>
-      <p:pic>
-        <p:nvPicPr>
-          <p:cNvPr id="23" name="Obraz — symbol zastępczy 22" descr="Kobieta przy laptopie uśmiechająca się">
-            <a:extLst>
-              <a:ext uri="{FF2B5EF4-FFF2-40B4-BE49-F238E27FC236}">
-                <a16:creationId xmlns:a16="http://schemas.microsoft.com/office/drawing/2014/main" id="{35E3CE9E-B03C-CB4B-A83A-D3265C7A0545}"/>
-              </a:ext>
-            </a:extLst>
-          </p:cNvPr>
-          <p:cNvPicPr>
-            <a:picLocks noGrp="1" noChangeAspect="1"/>
-          </p:cNvPicPr>
-          <p:nvPr>
-            <p:ph type="pic" sz="quarter" idx="10"/>
-          </p:nvPr>
-        </p:nvPicPr>
-        <p:blipFill>
-          <a:blip r:embed="rId3" cstate="screen">
-            <a:extLst>
-              <a:ext uri="{28A0092B-C50C-407E-A947-70E740481C1C}">
-                <a14:useLocalDpi xmlns:a14="http://schemas.microsoft.com/office/drawing/2010/main"/>
-              </a:ext>
-            </a:extLst>
-          </a:blip>
-          <a:srcRect/>
-          <a:stretch>
-            <a:fillRect/>
-          </a:stretch>
-        </p:blipFill>
-        <p:spPr/>
-      </p:pic>
-      <p:sp>
-        <p:nvSpPr>
-          <p:cNvPr id="3" name="Tytuł 2">
-            <a:extLst>
-              <a:ext uri="{FF2B5EF4-FFF2-40B4-BE49-F238E27FC236}">
-                <a16:creationId xmlns:a16="http://schemas.microsoft.com/office/drawing/2014/main" id="{200B3D2B-613A-41BE-987D-E6A1324B456D}"/>
-              </a:ext>
-            </a:extLst>
-          </p:cNvPr>
-          <p:cNvSpPr>
-            <a:spLocks noGrp="1"/>
-          </p:cNvSpPr>
-          <p:nvPr>
-            <p:ph type="title"/>
-          </p:nvPr>
-        </p:nvSpPr>
-        <p:spPr>
-          <a:xfrm>
-            <a:off x="-1700" y="2624574"/>
-            <a:ext cx="4903599" cy="1160026"/>
-          </a:xfrm>
-        </p:spPr>
-        <p:txBody>
-          <a:bodyPr rtlCol="0"/>
-          <a:lstStyle/>
-          <a:p>
-            <a:pPr rtl="0"/>
-            <a:r>
-              <a:rPr lang="pl-PL" sz="4400" spc="-350" dirty="0"/>
-              <a:t>Niezależna walidacja</a:t>
-            </a:r>
-          </a:p>
-        </p:txBody>
-      </p:sp>
-      <p:sp>
-        <p:nvSpPr>
-          <p:cNvPr id="10" name="Tekst — symbol zastępczy 9">
-            <a:extLst>
-              <a:ext uri="{FF2B5EF4-FFF2-40B4-BE49-F238E27FC236}">
-                <a16:creationId xmlns:a16="http://schemas.microsoft.com/office/drawing/2014/main" id="{2972F17A-D965-40B9-8ABB-C634072DBCC0}"/>
-              </a:ext>
-            </a:extLst>
-          </p:cNvPr>
-          <p:cNvSpPr>
-            <a:spLocks noGrp="1"/>
-          </p:cNvSpPr>
-          <p:nvPr>
-            <p:ph type="body" sz="quarter" idx="13"/>
-          </p:nvPr>
-        </p:nvSpPr>
-        <p:spPr>
-          <a:xfrm>
-            <a:off x="0" y="3784600"/>
-            <a:ext cx="4902200" cy="1426725"/>
-          </a:xfrm>
-        </p:spPr>
-        <p:txBody>
-          <a:bodyPr rtlCol="0"/>
-          <a:lstStyle/>
-          <a:p>
-            <a:r>
-              <a:rPr lang="pl-PL" sz="1600" dirty="0"/>
-              <a:t>Nad budową modelu czuwał niezależny zespół ekspertów, który oceniał jakość stosowanych rozwiązań oraz sugerował zmiany, które doprowadziły do powstania modelu o jak największej wydajności. </a:t>
-            </a:r>
-          </a:p>
-        </p:txBody>
-      </p:sp>
-      <p:sp>
-        <p:nvSpPr>
-          <p:cNvPr id="5" name="Numer slajdu — symbol zastępczy 4">
-            <a:extLst>
-              <a:ext uri="{FF2B5EF4-FFF2-40B4-BE49-F238E27FC236}">
-                <a16:creationId xmlns:a16="http://schemas.microsoft.com/office/drawing/2014/main" id="{F6964141-6F81-4947-A236-746D94ED3F6F}"/>
-              </a:ext>
-            </a:extLst>
-          </p:cNvPr>
-          <p:cNvSpPr>
-            <a:spLocks noGrp="1"/>
-          </p:cNvSpPr>
-          <p:nvPr>
-            <p:ph type="sldNum" sz="quarter" idx="12"/>
-          </p:nvPr>
-        </p:nvSpPr>
-        <p:spPr/>
-        <p:txBody>
-          <a:bodyPr rtlCol="0"/>
-          <a:lstStyle/>
-          <a:p>
-            <a:pPr rtl="0"/>
-            <a:fld id="{19B51A1E-902D-48AF-9020-955120F399B6}" type="slidenum">
-              <a:rPr lang="pl-PL" smtClean="0"/>
-              <a:pPr rtl="0"/>
-              <a:t>10</a:t>
-            </a:fld>
-            <a:endParaRPr lang="pl-PL" dirty="0"/>
-          </a:p>
-        </p:txBody>
-      </p:sp>
-    </p:spTree>
-    <p:extLst>
-      <p:ext uri="{BB962C8B-B14F-4D97-AF65-F5344CB8AC3E}">
-        <p14:creationId xmlns:p14="http://schemas.microsoft.com/office/powerpoint/2010/main" val="2117695413"/>
-      </p:ext>
-    </p:extLst>
-  </p:cSld>
-  <p:clrMapOvr>
-    <a:masterClrMapping/>
-  </p:clrMapOvr>
-</p:sld>
-</file>
-
-<file path=ppt/slides/slide11.xml><?xml version="1.0" encoding="utf-8"?>
-<p:sld xmlns:a="http://schemas.openxmlformats.org/drawingml/2006/main" xmlns:r="http://schemas.openxmlformats.org/officeDocument/2006/relationships" xmlns:p="http://schemas.openxmlformats.org/presentationml/2006/main">
-  <p:cSld>
-    <p:spTree>
-      <p:nvGrpSpPr>
-        <p:cNvPr id="1" name=""/>
-        <p:cNvGrpSpPr/>
-        <p:nvPr/>
-      </p:nvGrpSpPr>
-      <p:grpSpPr>
-        <a:xfrm>
-          <a:off x="0" y="0"/>
-          <a:ext cx="0" cy="0"/>
-          <a:chOff x="0" y="0"/>
-          <a:chExt cx="0" cy="0"/>
-        </a:xfrm>
-      </p:grpSpPr>
-      <p:sp>
-        <p:nvSpPr>
-          <p:cNvPr id="2" name="Tytuł 1">
-            <a:extLst>
-              <a:ext uri="{FF2B5EF4-FFF2-40B4-BE49-F238E27FC236}">
-                <a16:creationId xmlns:a16="http://schemas.microsoft.com/office/drawing/2014/main" id="{623FB4D5-DA14-4F29-9320-2DE0A6B571B9}"/>
-              </a:ext>
-            </a:extLst>
-          </p:cNvPr>
-          <p:cNvSpPr>
-            <a:spLocks noGrp="1"/>
-          </p:cNvSpPr>
-          <p:nvPr>
-            <p:ph type="title"/>
-          </p:nvPr>
-        </p:nvSpPr>
-        <p:spPr/>
-        <p:txBody>
-          <a:bodyPr rtlCol="0"/>
-          <a:lstStyle/>
-          <a:p>
-            <a:pPr rtl="0"/>
-            <a:r>
-              <a:rPr lang="pl-PL" dirty="0"/>
-              <a:t>Potencjalne korzyści</a:t>
-            </a:r>
-          </a:p>
-        </p:txBody>
-      </p:sp>
-      <p:sp>
-        <p:nvSpPr>
-          <p:cNvPr id="9" name="Numer slajdu — symbol zastępczy 8">
-            <a:extLst>
-              <a:ext uri="{FF2B5EF4-FFF2-40B4-BE49-F238E27FC236}">
-                <a16:creationId xmlns:a16="http://schemas.microsoft.com/office/drawing/2014/main" id="{00A34EBD-7DEA-4599-A81B-0A363A0E17FC}"/>
-              </a:ext>
-            </a:extLst>
-          </p:cNvPr>
-          <p:cNvSpPr>
-            <a:spLocks noGrp="1"/>
-          </p:cNvSpPr>
-          <p:nvPr>
-            <p:ph type="sldNum" sz="quarter" idx="33"/>
-          </p:nvPr>
-        </p:nvSpPr>
-        <p:spPr>
-          <a:xfrm>
-            <a:off x="11760000" y="6371351"/>
-            <a:ext cx="432000" cy="432000"/>
-          </a:xfrm>
-        </p:spPr>
-        <p:txBody>
-          <a:bodyPr rtlCol="0"/>
-          <a:lstStyle/>
-          <a:p>
-            <a:pPr rtl="0"/>
-            <a:fld id="{19B51A1E-902D-48AF-9020-955120F399B6}" type="slidenum">
-              <a:rPr lang="pl-PL" smtClean="0"/>
-              <a:pPr rtl="0"/>
-              <a:t>11</a:t>
-            </a:fld>
-            <a:endParaRPr lang="pl-PL" dirty="0"/>
-          </a:p>
-        </p:txBody>
-      </p:sp>
-      <p:sp>
-        <p:nvSpPr>
-          <p:cNvPr id="12" name="Zawartość — symbol zastępczy 4">
-            <a:extLst>
-              <a:ext uri="{FF2B5EF4-FFF2-40B4-BE49-F238E27FC236}">
-                <a16:creationId xmlns:a16="http://schemas.microsoft.com/office/drawing/2014/main" id="{6CC2C337-59AD-4DA9-2A4E-2FC73C7993A9}"/>
-              </a:ext>
-            </a:extLst>
-          </p:cNvPr>
-          <p:cNvSpPr txBox="1">
-            <a:spLocks/>
-          </p:cNvSpPr>
-          <p:nvPr/>
-        </p:nvSpPr>
-        <p:spPr>
-          <a:xfrm>
-            <a:off x="279599" y="1170584"/>
-            <a:ext cx="5494667" cy="4516832"/>
-          </a:xfrm>
-          <a:prstGeom prst="rect">
-            <a:avLst/>
-          </a:prstGeom>
-        </p:spPr>
-        <p:txBody>
-          <a:bodyPr rtlCol="0"/>
-          <a:lstStyle>
-            <a:lvl1pPr marL="266700" indent="-266700" algn="l" defTabSz="914400" rtl="0" eaLnBrk="1" latinLnBrk="0" hangingPunct="1">
-              <a:lnSpc>
-                <a:spcPct val="90000"/>
-              </a:lnSpc>
-              <a:spcBef>
-                <a:spcPts val="1000"/>
-              </a:spcBef>
-              <a:buFont typeface="Arial" panose="020B0604020202020204" pitchFamily="34" charset="0"/>
-              <a:buChar char="•"/>
-              <a:defRPr sz="1800" kern="1200">
-                <a:solidFill>
-                  <a:schemeClr val="tx1">
-                    <a:lumMod val="75000"/>
-                    <a:lumOff val="25000"/>
-                  </a:schemeClr>
-                </a:solidFill>
-                <a:latin typeface="+mn-lt"/>
-                <a:ea typeface="+mn-ea"/>
-                <a:cs typeface="+mn-cs"/>
-              </a:defRPr>
-            </a:lvl1pPr>
-            <a:lvl2pPr marL="542925" indent="-276225" algn="l" defTabSz="914400" rtl="0" eaLnBrk="1" latinLnBrk="0" hangingPunct="1">
-              <a:lnSpc>
-                <a:spcPct val="90000"/>
-              </a:lnSpc>
-              <a:spcBef>
-                <a:spcPts val="500"/>
-              </a:spcBef>
-              <a:buFont typeface="Arial" panose="020B0604020202020204" pitchFamily="34" charset="0"/>
-              <a:buChar char="•"/>
-              <a:defRPr sz="1600" kern="1200">
-                <a:solidFill>
-                  <a:schemeClr val="tx1">
-                    <a:lumMod val="75000"/>
-                    <a:lumOff val="25000"/>
-                  </a:schemeClr>
-                </a:solidFill>
-                <a:latin typeface="+mn-lt"/>
-                <a:ea typeface="+mn-ea"/>
-                <a:cs typeface="+mn-cs"/>
-              </a:defRPr>
-            </a:lvl2pPr>
-            <a:lvl3pPr marL="809625" indent="-266700" algn="l" defTabSz="914400" rtl="0" eaLnBrk="1" latinLnBrk="0" hangingPunct="1">
-              <a:lnSpc>
-                <a:spcPct val="90000"/>
-              </a:lnSpc>
-              <a:spcBef>
-                <a:spcPts val="500"/>
-              </a:spcBef>
-              <a:buFont typeface="Arial" panose="020B0604020202020204" pitchFamily="34" charset="0"/>
-              <a:buChar char="•"/>
-              <a:defRPr sz="1400" kern="1200">
-                <a:solidFill>
-                  <a:schemeClr val="tx1">
-                    <a:lumMod val="75000"/>
-                    <a:lumOff val="25000"/>
-                  </a:schemeClr>
-                </a:solidFill>
-                <a:latin typeface="+mn-lt"/>
-                <a:ea typeface="+mn-ea"/>
-                <a:cs typeface="+mn-cs"/>
-              </a:defRPr>
-            </a:lvl3pPr>
-            <a:lvl4pPr marL="1076325" indent="-266700" algn="l" defTabSz="914400" rtl="0" eaLnBrk="1" latinLnBrk="0" hangingPunct="1">
-              <a:lnSpc>
-                <a:spcPct val="90000"/>
-              </a:lnSpc>
-              <a:spcBef>
-                <a:spcPts val="500"/>
-              </a:spcBef>
-              <a:buFont typeface="Arial" panose="020B0604020202020204" pitchFamily="34" charset="0"/>
-              <a:buChar char="•"/>
-              <a:defRPr sz="1400" kern="1200">
-                <a:solidFill>
-                  <a:schemeClr val="tx1">
-                    <a:lumMod val="75000"/>
-                    <a:lumOff val="25000"/>
-                  </a:schemeClr>
-                </a:solidFill>
-                <a:latin typeface="+mn-lt"/>
-                <a:ea typeface="+mn-ea"/>
-                <a:cs typeface="+mn-cs"/>
-              </a:defRPr>
-            </a:lvl4pPr>
-            <a:lvl5pPr marL="1343025" indent="-266700" algn="l" defTabSz="914400" rtl="0" eaLnBrk="1" latinLnBrk="0" hangingPunct="1">
-              <a:lnSpc>
-                <a:spcPct val="90000"/>
-              </a:lnSpc>
-              <a:spcBef>
-                <a:spcPts val="500"/>
-              </a:spcBef>
-              <a:buFont typeface="Arial" panose="020B0604020202020204" pitchFamily="34" charset="0"/>
-              <a:buChar char="•"/>
-              <a:defRPr sz="1400" kern="1200">
-                <a:solidFill>
-                  <a:schemeClr val="tx1">
-                    <a:lumMod val="75000"/>
-                    <a:lumOff val="25000"/>
-                  </a:schemeClr>
-                </a:solidFill>
-                <a:latin typeface="+mn-lt"/>
-                <a:ea typeface="+mn-ea"/>
-                <a:cs typeface="+mn-cs"/>
-              </a:defRPr>
-            </a:lvl5pPr>
-            <a:lvl6pPr marL="2514600" indent="-228600" algn="l" defTabSz="914400" rtl="0" eaLnBrk="1" latinLnBrk="0" hangingPunct="1">
-              <a:lnSpc>
-                <a:spcPct val="90000"/>
-              </a:lnSpc>
-              <a:spcBef>
-                <a:spcPts val="500"/>
-              </a:spcBef>
-              <a:buFont typeface="Arial" panose="020B0604020202020204" pitchFamily="34" charset="0"/>
-              <a:buChar char="•"/>
-              <a:defRPr sz="1800" kern="1200">
-                <a:solidFill>
-                  <a:schemeClr val="tx1"/>
-                </a:solidFill>
-                <a:latin typeface="+mn-lt"/>
-                <a:ea typeface="+mn-ea"/>
-                <a:cs typeface="+mn-cs"/>
-              </a:defRPr>
-            </a:lvl6pPr>
-            <a:lvl7pPr marL="2971800" indent="-228600" algn="l" defTabSz="914400" rtl="0" eaLnBrk="1" latinLnBrk="0" hangingPunct="1">
-              <a:lnSpc>
-                <a:spcPct val="90000"/>
-              </a:lnSpc>
-              <a:spcBef>
-                <a:spcPts val="500"/>
-              </a:spcBef>
-              <a:buFont typeface="Arial" panose="020B0604020202020204" pitchFamily="34" charset="0"/>
-              <a:buChar char="•"/>
-              <a:defRPr sz="1800" kern="1200">
-                <a:solidFill>
-                  <a:schemeClr val="tx1"/>
-                </a:solidFill>
-                <a:latin typeface="+mn-lt"/>
-                <a:ea typeface="+mn-ea"/>
-                <a:cs typeface="+mn-cs"/>
-              </a:defRPr>
-            </a:lvl7pPr>
-            <a:lvl8pPr marL="3429000" indent="-228600" algn="l" defTabSz="914400" rtl="0" eaLnBrk="1" latinLnBrk="0" hangingPunct="1">
-              <a:lnSpc>
-                <a:spcPct val="90000"/>
-              </a:lnSpc>
-              <a:spcBef>
-                <a:spcPts val="500"/>
-              </a:spcBef>
-              <a:buFont typeface="Arial" panose="020B0604020202020204" pitchFamily="34" charset="0"/>
-              <a:buChar char="•"/>
-              <a:defRPr sz="1800" kern="1200">
-                <a:solidFill>
-                  <a:schemeClr val="tx1"/>
-                </a:solidFill>
-                <a:latin typeface="+mn-lt"/>
-                <a:ea typeface="+mn-ea"/>
-                <a:cs typeface="+mn-cs"/>
-              </a:defRPr>
-            </a:lvl8pPr>
-            <a:lvl9pPr marL="3886200" indent="-228600" algn="l" defTabSz="914400" rtl="0" eaLnBrk="1" latinLnBrk="0" hangingPunct="1">
-              <a:lnSpc>
-                <a:spcPct val="90000"/>
-              </a:lnSpc>
-              <a:spcBef>
-                <a:spcPts val="500"/>
-              </a:spcBef>
-              <a:buFont typeface="Arial" panose="020B0604020202020204" pitchFamily="34" charset="0"/>
-              <a:buChar char="•"/>
-              <a:defRPr sz="1800" kern="1200">
-                <a:solidFill>
-                  <a:schemeClr val="tx1"/>
-                </a:solidFill>
-                <a:latin typeface="+mn-lt"/>
-                <a:ea typeface="+mn-ea"/>
-                <a:cs typeface="+mn-cs"/>
-              </a:defRPr>
-            </a:lvl9pPr>
-          </a:lstStyle>
-          <a:p>
-            <a:r>
-              <a:rPr lang="pl-PL" b="1" dirty="0"/>
-              <a:t>Lepsze dopasowanie ofert</a:t>
-            </a:r>
-            <a:br>
-              <a:rPr lang="pl-PL" dirty="0"/>
-            </a:br>
-            <a:r>
-              <a:rPr lang="pl-PL" dirty="0"/>
-              <a:t>– Możliwość tworzenia dedykowanych kampanii marketingowych dla każdego klastra.</a:t>
-            </a:r>
-            <a:br>
-              <a:rPr lang="pl-PL" dirty="0"/>
-            </a:br>
-            <a:r>
-              <a:rPr lang="pl-PL" dirty="0"/>
-              <a:t>– Wyższe zainteresowanie produktami finansowymi dzięki personalizacji.</a:t>
-            </a:r>
-          </a:p>
-          <a:p>
-            <a:r>
-              <a:rPr lang="pl-PL" b="1" dirty="0"/>
-              <a:t>Większa skuteczność kampanii</a:t>
-            </a:r>
-            <a:br>
-              <a:rPr lang="pl-PL" dirty="0"/>
-            </a:br>
-            <a:r>
-              <a:rPr lang="pl-PL" dirty="0"/>
-              <a:t>– Lepsze </a:t>
-            </a:r>
-            <a:r>
-              <a:rPr lang="pl-PL" dirty="0" err="1"/>
-              <a:t>targetowanie</a:t>
-            </a:r>
-            <a:r>
-              <a:rPr lang="pl-PL" dirty="0"/>
-              <a:t> → niższe koszty reklamy i wyższy współczynnik konwersji.</a:t>
-            </a:r>
-          </a:p>
-          <a:p>
-            <a:r>
-              <a:rPr lang="pl-PL" b="1" dirty="0"/>
-              <a:t>Wzrost lojalności klientów</a:t>
-            </a:r>
-            <a:br>
-              <a:rPr lang="pl-PL" dirty="0"/>
-            </a:br>
-            <a:r>
-              <a:rPr lang="pl-PL" dirty="0"/>
-              <a:t>– Klienci czują się lepiej zrozumiani i bardziej związani z marką.</a:t>
-            </a:r>
-          </a:p>
-          <a:p>
-            <a:r>
-              <a:rPr lang="pl-PL" b="1"/>
-              <a:t>Efektywniejsze </a:t>
-            </a:r>
-            <a:r>
-              <a:rPr lang="pl-PL" b="1" dirty="0"/>
-              <a:t>zarządzanie ryzykiem</a:t>
-            </a:r>
-            <a:br>
-              <a:rPr lang="pl-PL" dirty="0"/>
-            </a:br>
-            <a:r>
-              <a:rPr lang="pl-PL" dirty="0"/>
-              <a:t>– Możliwość oceny profilu ryzyka dla każdej grupy – np. klaster 2 może wymagać ostrożniejszych ofert.</a:t>
-            </a:r>
-          </a:p>
-        </p:txBody>
-      </p:sp>
-      <p:pic>
-        <p:nvPicPr>
-          <p:cNvPr id="7" name="Obraz 6">
-            <a:extLst>
-              <a:ext uri="{FF2B5EF4-FFF2-40B4-BE49-F238E27FC236}">
-                <a16:creationId xmlns:a16="http://schemas.microsoft.com/office/drawing/2014/main" id="{0D4FF252-57FF-8CCD-420B-601DEABDDED2}"/>
-              </a:ext>
-            </a:extLst>
-          </p:cNvPr>
-          <p:cNvPicPr>
-            <a:picLocks noChangeAspect="1"/>
-          </p:cNvPicPr>
-          <p:nvPr/>
-        </p:nvPicPr>
-        <p:blipFill>
-          <a:blip r:embed="rId3"/>
-          <a:stretch>
-            <a:fillRect/>
-          </a:stretch>
-        </p:blipFill>
-        <p:spPr>
-          <a:xfrm>
-            <a:off x="5918200" y="2180362"/>
-            <a:ext cx="5994201" cy="3575913"/>
-          </a:xfrm>
-          <a:prstGeom prst="rect">
-            <a:avLst/>
-          </a:prstGeom>
-        </p:spPr>
-      </p:pic>
-    </p:spTree>
-    <p:extLst>
-      <p:ext uri="{BB962C8B-B14F-4D97-AF65-F5344CB8AC3E}">
-        <p14:creationId xmlns:p14="http://schemas.microsoft.com/office/powerpoint/2010/main" val="25800700"/>
-      </p:ext>
-    </p:extLst>
-  </p:cSld>
-  <p:clrMapOvr>
-    <a:masterClrMapping/>
-  </p:clrMapOvr>
-</p:sld>
-</file>
-
-<file path=ppt/slides/slide12.xml><?xml version="1.0" encoding="utf-8"?>
-<p:sld xmlns:a="http://schemas.openxmlformats.org/drawingml/2006/main" xmlns:r="http://schemas.openxmlformats.org/officeDocument/2006/relationships" xmlns:p="http://schemas.openxmlformats.org/presentationml/2006/main">
-  <p:cSld>
-    <p:spTree>
-      <p:nvGrpSpPr>
-        <p:cNvPr id="1" name=""/>
-        <p:cNvGrpSpPr/>
-        <p:nvPr/>
-      </p:nvGrpSpPr>
-      <p:grpSpPr>
-        <a:xfrm>
-          <a:off x="0" y="0"/>
-          <a:ext cx="0" cy="0"/>
-          <a:chOff x="0" y="0"/>
-          <a:chExt cx="0" cy="0"/>
-        </a:xfrm>
-      </p:grpSpPr>
-      <p:pic>
-        <p:nvPicPr>
-          <p:cNvPr id="32" name="Obraz — symbol zastępczy 31" descr="klaszczące ręce">
-            <a:extLst>
-              <a:ext uri="{FF2B5EF4-FFF2-40B4-BE49-F238E27FC236}">
-                <a16:creationId xmlns:a16="http://schemas.microsoft.com/office/drawing/2014/main" id="{AAB6EE12-FEF8-FB41-A909-0DA61D7725C7}"/>
-              </a:ext>
-            </a:extLst>
-          </p:cNvPr>
-          <p:cNvPicPr>
-            <a:picLocks noGrp="1" noChangeAspect="1"/>
-          </p:cNvPicPr>
-          <p:nvPr>
-            <p:ph type="pic" sz="quarter" idx="10"/>
-          </p:nvPr>
-        </p:nvPicPr>
-        <p:blipFill>
-          <a:blip r:embed="rId3" cstate="screen">
-            <a:extLst>
-              <a:ext uri="{28A0092B-C50C-407E-A947-70E740481C1C}">
-                <a14:useLocalDpi xmlns:a14="http://schemas.microsoft.com/office/drawing/2010/main"/>
-              </a:ext>
-            </a:extLst>
-          </a:blip>
-          <a:srcRect/>
-          <a:stretch>
-            <a:fillRect/>
-          </a:stretch>
-        </p:blipFill>
-        <p:spPr/>
-      </p:pic>
-      <p:sp>
-        <p:nvSpPr>
-          <p:cNvPr id="14" name="Tytuł 13">
-            <a:extLst>
-              <a:ext uri="{FF2B5EF4-FFF2-40B4-BE49-F238E27FC236}">
-                <a16:creationId xmlns:a16="http://schemas.microsoft.com/office/drawing/2014/main" id="{6C38D7A9-9299-4108-BB08-026F4B9CAE7B}"/>
-              </a:ext>
-            </a:extLst>
-          </p:cNvPr>
-          <p:cNvSpPr>
-            <a:spLocks noGrp="1"/>
-          </p:cNvSpPr>
-          <p:nvPr>
-            <p:ph type="ctrTitle"/>
-          </p:nvPr>
-        </p:nvSpPr>
-        <p:spPr/>
-        <p:txBody>
-          <a:bodyPr rtlCol="0"/>
-          <a:lstStyle/>
-          <a:p>
-            <a:pPr rtl="0"/>
-            <a:r>
-              <a:rPr lang="pl-PL" dirty="0"/>
-              <a:t>Dziękujemy!</a:t>
-            </a:r>
-          </a:p>
-        </p:txBody>
-      </p:sp>
-      <p:sp>
-        <p:nvSpPr>
-          <p:cNvPr id="12" name="Numer slajdu — symbol zastępczy 11">
-            <a:extLst>
-              <a:ext uri="{FF2B5EF4-FFF2-40B4-BE49-F238E27FC236}">
-                <a16:creationId xmlns:a16="http://schemas.microsoft.com/office/drawing/2014/main" id="{91814EC9-246A-4C6E-941E-5774FE72F08E}"/>
-              </a:ext>
-            </a:extLst>
-          </p:cNvPr>
-          <p:cNvSpPr>
-            <a:spLocks noGrp="1"/>
-          </p:cNvSpPr>
-          <p:nvPr>
-            <p:ph type="sldNum" sz="quarter" idx="20"/>
-          </p:nvPr>
-        </p:nvSpPr>
-        <p:spPr/>
-        <p:txBody>
-          <a:bodyPr rtlCol="0"/>
-          <a:lstStyle/>
-          <a:p>
-            <a:pPr rtl="0"/>
-            <a:fld id="{19B51A1E-902D-48AF-9020-955120F399B6}" type="slidenum">
-              <a:rPr lang="pl-PL" smtClean="0"/>
-              <a:pPr rtl="0"/>
-              <a:t>12</a:t>
-            </a:fld>
-            <a:endParaRPr lang="pl-PL" dirty="0"/>
-          </a:p>
-        </p:txBody>
-      </p:sp>
-    </p:spTree>
-    <p:extLst>
-      <p:ext uri="{BB962C8B-B14F-4D97-AF65-F5344CB8AC3E}">
-        <p14:creationId xmlns:p14="http://schemas.microsoft.com/office/powerpoint/2010/main" val="4153678306"/>
-      </p:ext>
-    </p:extLst>
-  </p:cSld>
-  <p:clrMapOvr>
-    <a:masterClrMapping/>
-  </p:clrMapOvr>
-</p:sld>
-</file>
-
-<file path=ppt/slides/slide2.xml><?xml version="1.0" encoding="utf-8"?>
-<p:sld xmlns:a="http://schemas.openxmlformats.org/drawingml/2006/main" xmlns:r="http://schemas.openxmlformats.org/officeDocument/2006/relationships" xmlns:p="http://schemas.openxmlformats.org/presentationml/2006/main">
-  <p:cSld>
-    <p:spTree>
-      <p:nvGrpSpPr>
-        <p:cNvPr id="1" name=""/>
-        <p:cNvGrpSpPr/>
-        <p:nvPr/>
-      </p:nvGrpSpPr>
-      <p:grpSpPr>
-        <a:xfrm>
-          <a:off x="0" y="0"/>
-          <a:ext cx="0" cy="0"/>
-          <a:chOff x="0" y="0"/>
-          <a:chExt cx="0" cy="0"/>
-        </a:xfrm>
-      </p:grpSpPr>
-      <p:sp>
-        <p:nvSpPr>
-          <p:cNvPr id="4" name="Zawartość — symbol zastępczy 3">
-            <a:extLst>
-              <a:ext uri="{FF2B5EF4-FFF2-40B4-BE49-F238E27FC236}">
-                <a16:creationId xmlns:a16="http://schemas.microsoft.com/office/drawing/2014/main" id="{D355C61F-C8F1-4977-8E1F-F16C0D9EA88C}"/>
-              </a:ext>
-            </a:extLst>
-          </p:cNvPr>
-          <p:cNvSpPr>
-            <a:spLocks noGrp="1"/>
-          </p:cNvSpPr>
-          <p:nvPr>
-            <p:ph sz="half" idx="1"/>
-          </p:nvPr>
-        </p:nvSpPr>
-        <p:spPr>
-          <a:xfrm>
-            <a:off x="432000" y="746061"/>
-            <a:ext cx="5472000" cy="2999426"/>
-          </a:xfrm>
-        </p:spPr>
-        <p:txBody>
-          <a:bodyPr rtlCol="0"/>
-          <a:lstStyle/>
-          <a:p>
-            <a:r>
-              <a:rPr lang="pl-PL" sz="2400" dirty="0"/>
-              <a:t>Konieczność efektywnego segmentowania rynku klientów korzystających z pożyczek w celu zwiększenia skuteczności kampanii marketingowych.</a:t>
-            </a:r>
-          </a:p>
-          <a:p>
-            <a:r>
-              <a:rPr lang="pl-PL" sz="2400" dirty="0"/>
-              <a:t>Zrozumienie potrzeb i preferencji poszczególnych segmentów klientów, co umożliwi bardziej precyzyjne dostosowanie ofert reklamowych.</a:t>
-            </a:r>
-          </a:p>
-        </p:txBody>
-      </p:sp>
-      <p:pic>
-        <p:nvPicPr>
-          <p:cNvPr id="9" name="Obraz — symbol zastępczy 8" descr="Ręce dotykające telefonu komórkowego">
-            <a:extLst>
-              <a:ext uri="{FF2B5EF4-FFF2-40B4-BE49-F238E27FC236}">
-                <a16:creationId xmlns:a16="http://schemas.microsoft.com/office/drawing/2014/main" id="{A9A75888-22E3-1D43-9112-DA02186070B5}"/>
-              </a:ext>
-            </a:extLst>
-          </p:cNvPr>
-          <p:cNvPicPr>
-            <a:picLocks noGrp="1" noChangeAspect="1"/>
-          </p:cNvPicPr>
-          <p:nvPr>
-            <p:ph type="pic" sz="quarter" idx="14"/>
-          </p:nvPr>
-        </p:nvPicPr>
-        <p:blipFill>
-          <a:blip r:embed="rId3" cstate="screen">
-            <a:extLst>
-              <a:ext uri="{28A0092B-C50C-407E-A947-70E740481C1C}">
-                <a14:useLocalDpi xmlns:a14="http://schemas.microsoft.com/office/drawing/2010/main"/>
-              </a:ext>
-            </a:extLst>
-          </a:blip>
-          <a:srcRect/>
-          <a:stretch>
-            <a:fillRect/>
-          </a:stretch>
-        </p:blipFill>
-        <p:spPr/>
-      </p:pic>
-      <p:sp>
-        <p:nvSpPr>
-          <p:cNvPr id="20" name="Prostokąt 19" descr="Blok z akcentem">
-            <a:extLst>
-              <a:ext uri="{FF2B5EF4-FFF2-40B4-BE49-F238E27FC236}">
-                <a16:creationId xmlns:a16="http://schemas.microsoft.com/office/drawing/2014/main" id="{EFA08948-2B6F-46B1-9D2D-8D7B2B3FBD56}"/>
-              </a:ext>
-              <a:ext uri="{C183D7F6-B498-43B3-948B-1728B52AA6E4}">
-                <adec:decorative xmlns:adec="http://schemas.microsoft.com/office/drawing/2017/decorative" val="1"/>
-              </a:ext>
-            </a:extLst>
-          </p:cNvPr>
-          <p:cNvSpPr/>
-          <p:nvPr/>
-        </p:nvSpPr>
-        <p:spPr>
-          <a:xfrm>
-            <a:off x="9348588" y="3688075"/>
-            <a:ext cx="2411412" cy="114824"/>
-          </a:xfrm>
-          <a:prstGeom prst="rect">
-            <a:avLst/>
-          </a:prstGeom>
-          <a:solidFill>
-            <a:schemeClr val="accent1"/>
-          </a:solidFill>
-          <a:ln>
-            <a:noFill/>
-          </a:ln>
-        </p:spPr>
-        <p:style>
-          <a:lnRef idx="2">
-            <a:schemeClr val="accent1">
-              <a:shade val="50000"/>
-            </a:schemeClr>
-          </a:lnRef>
-          <a:fillRef idx="1">
-            <a:schemeClr val="accent1"/>
-          </a:fillRef>
-          <a:effectRef idx="0">
-            <a:schemeClr val="accent1"/>
-          </a:effectRef>
-          <a:fontRef idx="minor">
-            <a:schemeClr val="lt1"/>
-          </a:fontRef>
-        </p:style>
-        <p:txBody>
-          <a:bodyPr rtlCol="0" anchor="ctr"/>
-          <a:lstStyle/>
-          <a:p>
-            <a:pPr algn="l" rtl="0"/>
-            <a:endParaRPr lang="pl-PL" dirty="0"/>
-          </a:p>
-        </p:txBody>
-      </p:sp>
-      <p:sp>
-        <p:nvSpPr>
-          <p:cNvPr id="2" name="Tytuł 1">
-            <a:extLst>
-              <a:ext uri="{FF2B5EF4-FFF2-40B4-BE49-F238E27FC236}">
-                <a16:creationId xmlns:a16="http://schemas.microsoft.com/office/drawing/2014/main" id="{3560F281-4FF6-4617-A809-AC9C15ECF18A}"/>
-              </a:ext>
-            </a:extLst>
-          </p:cNvPr>
-          <p:cNvSpPr>
-            <a:spLocks noGrp="1"/>
-          </p:cNvSpPr>
-          <p:nvPr>
-            <p:ph type="title"/>
-          </p:nvPr>
-        </p:nvSpPr>
-        <p:spPr/>
-        <p:txBody>
-          <a:bodyPr rtlCol="0"/>
-          <a:lstStyle/>
-          <a:p>
-            <a:r>
-              <a:rPr lang="pl-PL" sz="4400" dirty="0"/>
-              <a:t>Problem biznesowy</a:t>
-            </a:r>
-          </a:p>
-        </p:txBody>
-      </p:sp>
-      <p:sp>
-        <p:nvSpPr>
-          <p:cNvPr id="3" name="Tekst — symbol zastępczy 2">
-            <a:extLst>
-              <a:ext uri="{FF2B5EF4-FFF2-40B4-BE49-F238E27FC236}">
-                <a16:creationId xmlns:a16="http://schemas.microsoft.com/office/drawing/2014/main" id="{611DC577-0A95-47D0-95D9-5F8DA763D46B}"/>
-              </a:ext>
-            </a:extLst>
-          </p:cNvPr>
-          <p:cNvSpPr>
-            <a:spLocks noGrp="1"/>
-          </p:cNvSpPr>
-          <p:nvPr>
-            <p:ph type="body" sz="quarter" idx="32"/>
-          </p:nvPr>
-        </p:nvSpPr>
-        <p:spPr/>
-        <p:txBody>
-          <a:bodyPr rtlCol="0"/>
-          <a:lstStyle/>
-          <a:p>
-            <a:pPr rtl="0"/>
-            <a:r>
-              <a:rPr lang="pl-PL" dirty="0"/>
-              <a:t>Jak lepiej targetować odbiorców reklam związanych z sektorem finansowym?</a:t>
-            </a:r>
-          </a:p>
-        </p:txBody>
-      </p:sp>
-      <p:sp>
-        <p:nvSpPr>
-          <p:cNvPr id="6" name="Numer slajdu — symbol zastępczy 5">
-            <a:extLst>
-              <a:ext uri="{FF2B5EF4-FFF2-40B4-BE49-F238E27FC236}">
-                <a16:creationId xmlns:a16="http://schemas.microsoft.com/office/drawing/2014/main" id="{1C554D9F-1895-486E-BFBA-905BB2D29E08}"/>
-              </a:ext>
-            </a:extLst>
-          </p:cNvPr>
-          <p:cNvSpPr>
-            <a:spLocks noGrp="1"/>
-          </p:cNvSpPr>
-          <p:nvPr>
-            <p:ph type="sldNum" sz="quarter" idx="33"/>
-          </p:nvPr>
-        </p:nvSpPr>
-        <p:spPr/>
-        <p:txBody>
-          <a:bodyPr rtlCol="0"/>
-          <a:lstStyle/>
-          <a:p>
-            <a:pPr rtl="0"/>
-            <a:fld id="{19B51A1E-902D-48AF-9020-955120F399B6}" type="slidenum">
-              <a:rPr lang="pl-PL" smtClean="0"/>
-              <a:pPr/>
-              <a:t>2</a:t>
-            </a:fld>
-            <a:endParaRPr lang="pl-PL" dirty="0"/>
-          </a:p>
-        </p:txBody>
-      </p:sp>
-    </p:spTree>
-    <p:extLst>
-      <p:ext uri="{BB962C8B-B14F-4D97-AF65-F5344CB8AC3E}">
-        <p14:creationId xmlns:p14="http://schemas.microsoft.com/office/powerpoint/2010/main" val="1329746698"/>
-      </p:ext>
-    </p:extLst>
-  </p:cSld>
-  <p:clrMapOvr>
-    <a:masterClrMapping/>
-  </p:clrMapOvr>
-</p:sld>
-</file>
-
-<file path=ppt/slides/slide3.xml><?xml version="1.0" encoding="utf-8"?>
-<p:sld xmlns:a="http://schemas.openxmlformats.org/drawingml/2006/main" xmlns:r="http://schemas.openxmlformats.org/officeDocument/2006/relationships" xmlns:p="http://schemas.openxmlformats.org/presentationml/2006/main">
-  <p:cSld>
-    <p:spTree>
-      <p:nvGrpSpPr>
-        <p:cNvPr id="1" name=""/>
-        <p:cNvGrpSpPr/>
-        <p:nvPr/>
-      </p:nvGrpSpPr>
-      <p:grpSpPr>
-        <a:xfrm>
-          <a:off x="0" y="0"/>
-          <a:ext cx="0" cy="0"/>
-          <a:chOff x="0" y="0"/>
-          <a:chExt cx="0" cy="0"/>
-        </a:xfrm>
-      </p:grpSpPr>
-      <p:pic>
-        <p:nvPicPr>
-          <p:cNvPr id="14" name="Obraz — symbol zastępczy 13" descr="Dłoń pisząca na karteczce do przyklejania">
-            <a:extLst>
-              <a:ext uri="{FF2B5EF4-FFF2-40B4-BE49-F238E27FC236}">
-                <a16:creationId xmlns:a16="http://schemas.microsoft.com/office/drawing/2014/main" id="{7E468295-904F-0743-AD06-67DA21353B9E}"/>
-              </a:ext>
-            </a:extLst>
-          </p:cNvPr>
-          <p:cNvPicPr>
-            <a:picLocks noGrp="1" noChangeAspect="1"/>
-          </p:cNvPicPr>
-          <p:nvPr>
-            <p:ph type="pic" sz="quarter" idx="14"/>
-          </p:nvPr>
-        </p:nvPicPr>
-        <p:blipFill rotWithShape="1">
-          <a:blip r:embed="rId3" cstate="screen">
-            <a:extLst>
-              <a:ext uri="{28A0092B-C50C-407E-A947-70E740481C1C}">
-                <a14:useLocalDpi xmlns:a14="http://schemas.microsoft.com/office/drawing/2010/main"/>
-              </a:ext>
-            </a:extLst>
-          </a:blip>
-          <a:srcRect/>
-          <a:stretch/>
-        </p:blipFill>
-        <p:spPr>
-          <a:xfrm>
-            <a:off x="0" y="-1"/>
-            <a:ext cx="6096000" cy="6371351"/>
-          </a:xfrm>
-        </p:spPr>
-      </p:pic>
-      <p:sp>
-        <p:nvSpPr>
-          <p:cNvPr id="20" name="Prostokąt 19" descr="Blok z akcentem">
-            <a:extLst>
-              <a:ext uri="{FF2B5EF4-FFF2-40B4-BE49-F238E27FC236}">
-                <a16:creationId xmlns:a16="http://schemas.microsoft.com/office/drawing/2014/main" id="{EFA08948-2B6F-46B1-9D2D-8D7B2B3FBD56}"/>
-              </a:ext>
-              <a:ext uri="{C183D7F6-B498-43B3-948B-1728B52AA6E4}">
-                <adec:decorative xmlns:adec="http://schemas.microsoft.com/office/drawing/2017/decorative" val="1"/>
-              </a:ext>
-            </a:extLst>
-          </p:cNvPr>
-          <p:cNvSpPr/>
-          <p:nvPr/>
-        </p:nvSpPr>
-        <p:spPr>
-          <a:xfrm>
-            <a:off x="9775824" y="1762069"/>
-            <a:ext cx="1984175" cy="114824"/>
-          </a:xfrm>
-          <a:prstGeom prst="rect">
-            <a:avLst/>
-          </a:prstGeom>
-          <a:solidFill>
-            <a:schemeClr val="accent1"/>
-          </a:solidFill>
-          <a:ln>
-            <a:noFill/>
-          </a:ln>
-        </p:spPr>
-        <p:style>
-          <a:lnRef idx="2">
-            <a:schemeClr val="accent1">
-              <a:shade val="50000"/>
-            </a:schemeClr>
-          </a:lnRef>
-          <a:fillRef idx="1">
-            <a:schemeClr val="accent1"/>
-          </a:fillRef>
-          <a:effectRef idx="0">
-            <a:schemeClr val="accent1"/>
-          </a:effectRef>
-          <a:fontRef idx="minor">
-            <a:schemeClr val="lt1"/>
-          </a:fontRef>
-        </p:style>
-        <p:txBody>
-          <a:bodyPr rtlCol="0" anchor="ctr"/>
-          <a:lstStyle/>
-          <a:p>
-            <a:pPr algn="l" rtl="0"/>
-            <a:endParaRPr lang="pl-PL" dirty="0"/>
-          </a:p>
-        </p:txBody>
-      </p:sp>
-      <p:sp>
-        <p:nvSpPr>
-          <p:cNvPr id="2" name="Tytuł 1">
-            <a:extLst>
-              <a:ext uri="{FF2B5EF4-FFF2-40B4-BE49-F238E27FC236}">
-                <a16:creationId xmlns:a16="http://schemas.microsoft.com/office/drawing/2014/main" id="{3560F281-4FF6-4617-A809-AC9C15ECF18A}"/>
-              </a:ext>
-            </a:extLst>
-          </p:cNvPr>
-          <p:cNvSpPr>
-            <a:spLocks noGrp="1"/>
-          </p:cNvSpPr>
-          <p:nvPr>
-            <p:ph type="title"/>
-          </p:nvPr>
-        </p:nvSpPr>
-        <p:spPr>
-          <a:xfrm>
-            <a:off x="5118100" y="1869795"/>
-            <a:ext cx="6641900" cy="1124345"/>
-          </a:xfrm>
-        </p:spPr>
-        <p:txBody>
-          <a:bodyPr rtlCol="0"/>
-          <a:lstStyle/>
-          <a:p>
-            <a:pPr rtl="0"/>
-            <a:r>
-              <a:rPr lang="pl-PL" sz="4400" dirty="0"/>
-              <a:t>Model segmentacji klientów</a:t>
-            </a:r>
-          </a:p>
-        </p:txBody>
-      </p:sp>
-      <p:sp>
-        <p:nvSpPr>
-          <p:cNvPr id="3" name="Tekst — symbol zastępczy 2">
-            <a:extLst>
-              <a:ext uri="{FF2B5EF4-FFF2-40B4-BE49-F238E27FC236}">
-                <a16:creationId xmlns:a16="http://schemas.microsoft.com/office/drawing/2014/main" id="{611DC577-0A95-47D0-95D9-5F8DA763D46B}"/>
-              </a:ext>
-            </a:extLst>
-          </p:cNvPr>
-          <p:cNvSpPr>
-            <a:spLocks noGrp="1"/>
-          </p:cNvSpPr>
-          <p:nvPr>
-            <p:ph type="body" sz="quarter" idx="32"/>
-          </p:nvPr>
-        </p:nvSpPr>
-        <p:spPr/>
-        <p:txBody>
-          <a:bodyPr rtlCol="0"/>
-          <a:lstStyle/>
-          <a:p>
-            <a:pPr rtl="0"/>
-            <a:r>
-              <a:rPr lang="pl-PL" dirty="0"/>
-              <a:t>W celu rozpoznania grup docelowych reklam</a:t>
-            </a:r>
-          </a:p>
-        </p:txBody>
-      </p:sp>
-      <p:sp>
-        <p:nvSpPr>
-          <p:cNvPr id="4" name="Zawartość — symbol zastępczy 3">
-            <a:extLst>
-              <a:ext uri="{FF2B5EF4-FFF2-40B4-BE49-F238E27FC236}">
-                <a16:creationId xmlns:a16="http://schemas.microsoft.com/office/drawing/2014/main" id="{D355C61F-C8F1-4977-8E1F-F16C0D9EA88C}"/>
-              </a:ext>
-            </a:extLst>
-          </p:cNvPr>
-          <p:cNvSpPr>
-            <a:spLocks noGrp="1"/>
-          </p:cNvSpPr>
-          <p:nvPr>
-            <p:ph sz="half" idx="1"/>
-          </p:nvPr>
-        </p:nvSpPr>
-        <p:spPr/>
-        <p:txBody>
-          <a:bodyPr rtlCol="0"/>
-          <a:lstStyle/>
-          <a:p>
-            <a:pPr marL="0" indent="0">
-              <a:buNone/>
-            </a:pPr>
-            <a:r>
-              <a:rPr lang="pl-PL" sz="2400" dirty="0"/>
-              <a:t>Wykorzystuje dane klientów dotyczące wysokości dochodu, stanu własnościowego miejsca zamieszkania, zawodu, oceny kredytowej, wskaźnika zadłużenia, wysokości raty, kwoty pożyczki i inne.</a:t>
-            </a:r>
-            <a:endParaRPr lang="pl-PL" sz="1600" dirty="0"/>
-          </a:p>
-        </p:txBody>
-      </p:sp>
-      <p:sp>
-        <p:nvSpPr>
-          <p:cNvPr id="6" name="Numer slajdu — symbol zastępczy 5">
-            <a:extLst>
-              <a:ext uri="{FF2B5EF4-FFF2-40B4-BE49-F238E27FC236}">
-                <a16:creationId xmlns:a16="http://schemas.microsoft.com/office/drawing/2014/main" id="{1C554D9F-1895-486E-BFBA-905BB2D29E08}"/>
-              </a:ext>
-            </a:extLst>
-          </p:cNvPr>
-          <p:cNvSpPr>
-            <a:spLocks noGrp="1"/>
-          </p:cNvSpPr>
-          <p:nvPr>
-            <p:ph type="sldNum" sz="quarter" idx="33"/>
-          </p:nvPr>
-        </p:nvSpPr>
-        <p:spPr/>
-        <p:txBody>
-          <a:bodyPr rtlCol="0"/>
-          <a:lstStyle/>
-          <a:p>
-            <a:pPr rtl="0"/>
-            <a:fld id="{19B51A1E-902D-48AF-9020-955120F399B6}" type="slidenum">
-              <a:rPr lang="pl-PL" smtClean="0"/>
-              <a:pPr/>
-              <a:t>3</a:t>
-            </a:fld>
-            <a:endParaRPr lang="pl-PL" dirty="0"/>
-          </a:p>
-        </p:txBody>
-      </p:sp>
-    </p:spTree>
-    <p:extLst>
-      <p:ext uri="{BB962C8B-B14F-4D97-AF65-F5344CB8AC3E}">
-        <p14:creationId xmlns:p14="http://schemas.microsoft.com/office/powerpoint/2010/main" val="722098795"/>
-      </p:ext>
-    </p:extLst>
-  </p:cSld>
-  <p:clrMapOvr>
-    <a:masterClrMapping/>
-  </p:clrMapOvr>
-</p:sld>
-</file>
-
-<file path=ppt/slides/slide4.xml><?xml version="1.0" encoding="utf-8"?>
-<p:sld xmlns:a="http://schemas.openxmlformats.org/drawingml/2006/main" xmlns:r="http://schemas.openxmlformats.org/officeDocument/2006/relationships" xmlns:p="http://schemas.openxmlformats.org/presentationml/2006/main">
-  <p:cSld>
-    <p:spTree>
-      <p:nvGrpSpPr>
-        <p:cNvPr id="1" name="">
-          <a:extLst>
-            <a:ext uri="{FF2B5EF4-FFF2-40B4-BE49-F238E27FC236}">
-              <a16:creationId xmlns:a16="http://schemas.microsoft.com/office/drawing/2014/main" id="{852C6D64-DEBC-2C50-0DEF-1151B4D3ABD4}"/>
-            </a:ext>
-          </a:extLst>
-        </p:cNvPr>
-        <p:cNvGrpSpPr/>
-        <p:nvPr/>
-      </p:nvGrpSpPr>
-      <p:grpSpPr>
-        <a:xfrm>
-          <a:off x="0" y="0"/>
-          <a:ext cx="0" cy="0"/>
-          <a:chOff x="0" y="0"/>
-          <a:chExt cx="0" cy="0"/>
-        </a:xfrm>
-      </p:grpSpPr>
-      <p:sp>
-        <p:nvSpPr>
-          <p:cNvPr id="2" name="Tytuł 1">
-            <a:extLst>
-              <a:ext uri="{FF2B5EF4-FFF2-40B4-BE49-F238E27FC236}">
-                <a16:creationId xmlns:a16="http://schemas.microsoft.com/office/drawing/2014/main" id="{35898779-DD72-19A3-B58D-CA3C830082F9}"/>
-              </a:ext>
-            </a:extLst>
-          </p:cNvPr>
-          <p:cNvSpPr>
-            <a:spLocks noGrp="1"/>
-          </p:cNvSpPr>
-          <p:nvPr>
-            <p:ph type="title"/>
-          </p:nvPr>
-        </p:nvSpPr>
-        <p:spPr/>
-        <p:txBody>
-          <a:bodyPr rtlCol="0"/>
-          <a:lstStyle/>
-          <a:p>
-            <a:pPr rtl="0"/>
-            <a:r>
-              <a:rPr lang="pl-PL" sz="4400" dirty="0"/>
-              <a:t>Co to jest, jak  działa i do czego może się przydać?</a:t>
-            </a:r>
-          </a:p>
-        </p:txBody>
-      </p:sp>
-      <p:sp>
-        <p:nvSpPr>
-          <p:cNvPr id="12" name="Prostokąt 11" descr="Blok z akcentem z lewej">
-            <a:extLst>
-              <a:ext uri="{FF2B5EF4-FFF2-40B4-BE49-F238E27FC236}">
-                <a16:creationId xmlns:a16="http://schemas.microsoft.com/office/drawing/2014/main" id="{9E288327-B996-623F-2B14-346FF38AB027}"/>
-              </a:ext>
-              <a:ext uri="{C183D7F6-B498-43B3-948B-1728B52AA6E4}">
-                <adec:decorative xmlns:adec="http://schemas.microsoft.com/office/drawing/2017/decorative" val="1"/>
-              </a:ext>
-            </a:extLst>
-          </p:cNvPr>
-          <p:cNvSpPr/>
-          <p:nvPr/>
-        </p:nvSpPr>
-        <p:spPr>
-          <a:xfrm>
-            <a:off x="431800" y="1693917"/>
-            <a:ext cx="1984175" cy="114824"/>
-          </a:xfrm>
-          <a:prstGeom prst="rect">
-            <a:avLst/>
-          </a:prstGeom>
-          <a:solidFill>
-            <a:schemeClr val="accent1"/>
-          </a:solidFill>
-          <a:ln>
-            <a:noFill/>
-          </a:ln>
-        </p:spPr>
-        <p:style>
-          <a:lnRef idx="2">
-            <a:schemeClr val="accent1">
-              <a:shade val="50000"/>
-            </a:schemeClr>
-          </a:lnRef>
-          <a:fillRef idx="1">
-            <a:schemeClr val="accent1"/>
-          </a:fillRef>
-          <a:effectRef idx="0">
-            <a:schemeClr val="accent1"/>
-          </a:effectRef>
-          <a:fontRef idx="minor">
-            <a:schemeClr val="lt1"/>
-          </a:fontRef>
-        </p:style>
-        <p:txBody>
-          <a:bodyPr rtlCol="0" anchor="ctr"/>
-          <a:lstStyle/>
-          <a:p>
-            <a:pPr algn="l" rtl="0"/>
-            <a:endParaRPr lang="pl-PL" dirty="0"/>
-          </a:p>
-        </p:txBody>
-      </p:sp>
-      <p:sp>
-        <p:nvSpPr>
-          <p:cNvPr id="4" name="Tekst — symbol zastępczy 3">
-            <a:extLst>
-              <a:ext uri="{FF2B5EF4-FFF2-40B4-BE49-F238E27FC236}">
-                <a16:creationId xmlns:a16="http://schemas.microsoft.com/office/drawing/2014/main" id="{4A388C1F-0E06-F295-2E8B-832AC725D7ED}"/>
-              </a:ext>
-            </a:extLst>
-          </p:cNvPr>
-          <p:cNvSpPr>
-            <a:spLocks noGrp="1"/>
-          </p:cNvSpPr>
-          <p:nvPr>
-            <p:ph type="body" idx="1"/>
-          </p:nvPr>
-        </p:nvSpPr>
-        <p:spPr>
-          <a:xfrm>
-            <a:off x="432000" y="2036534"/>
-            <a:ext cx="5472000" cy="360000"/>
-          </a:xfrm>
-        </p:spPr>
-        <p:txBody>
-          <a:bodyPr rtlCol="0"/>
-          <a:lstStyle/>
-          <a:p>
-            <a:r>
-              <a:rPr lang="pl-PL" dirty="0"/>
-              <a:t>Jak to działa:</a:t>
-            </a:r>
-          </a:p>
-        </p:txBody>
-      </p:sp>
-      <p:sp>
-        <p:nvSpPr>
-          <p:cNvPr id="5" name="Zawartość — symbol zastępczy 4">
-            <a:extLst>
-              <a:ext uri="{FF2B5EF4-FFF2-40B4-BE49-F238E27FC236}">
-                <a16:creationId xmlns:a16="http://schemas.microsoft.com/office/drawing/2014/main" id="{9F24D7F4-3D42-5DF0-AE22-AE41B699BBDA}"/>
-              </a:ext>
-            </a:extLst>
-          </p:cNvPr>
-          <p:cNvSpPr>
-            <a:spLocks noGrp="1"/>
-          </p:cNvSpPr>
-          <p:nvPr>
-            <p:ph sz="half" idx="2"/>
-          </p:nvPr>
-        </p:nvSpPr>
-        <p:spPr>
-          <a:xfrm>
-            <a:off x="432000" y="2544368"/>
-            <a:ext cx="5472000" cy="2194694"/>
-          </a:xfrm>
-        </p:spPr>
-        <p:txBody>
-          <a:bodyPr rtlCol="0"/>
-          <a:lstStyle/>
-          <a:p>
-            <a:pPr rtl="0"/>
-            <a:r>
-              <a:rPr lang="pl-PL" dirty="0"/>
-              <a:t>Wykorzystaliśmy model uczenia maszynowego (GMM) – czyli algorytm, który samodzielnie analizuje dane i grupuje klientów o podobnych cechach.</a:t>
-            </a:r>
-          </a:p>
-          <a:p>
-            <a:pPr rtl="0"/>
-            <a:r>
-              <a:rPr lang="pl-PL" dirty="0"/>
-              <a:t>Model znajduje ukryte wzorce w danych – na przykład klientów o podobnym dochodzie, zadłużeniu czy historii kredytowej.</a:t>
-            </a:r>
-          </a:p>
-          <a:p>
-            <a:pPr rtl="0"/>
-            <a:r>
-              <a:rPr lang="pl-PL" dirty="0"/>
-              <a:t>Model sam decyduje, jak najlepiej podzielić klientów na segmenty, analizując wiele cech naraz.</a:t>
-            </a:r>
-          </a:p>
-          <a:p>
-            <a:pPr rtl="0"/>
-            <a:r>
-              <a:rPr lang="pl-PL" dirty="0"/>
-              <a:t>Każdy klient trafia do jednego z klastrów – czyli grupy osób o podobnym profilu finansowym i behawioralnym.</a:t>
-            </a:r>
-          </a:p>
-        </p:txBody>
-      </p:sp>
-      <p:cxnSp>
-        <p:nvCxnSpPr>
-          <p:cNvPr id="11" name="Łącznik prosty 10" descr="Podział slajdu">
-            <a:extLst>
-              <a:ext uri="{FF2B5EF4-FFF2-40B4-BE49-F238E27FC236}">
-                <a16:creationId xmlns:a16="http://schemas.microsoft.com/office/drawing/2014/main" id="{A0593098-A66B-EBE9-B5E3-C6B2E076D7C9}"/>
-              </a:ext>
-              <a:ext uri="{C183D7F6-B498-43B3-948B-1728B52AA6E4}">
-                <adec:decorative xmlns:adec="http://schemas.microsoft.com/office/drawing/2017/decorative" val="1"/>
-              </a:ext>
-            </a:extLst>
-          </p:cNvPr>
-          <p:cNvCxnSpPr/>
-          <p:nvPr/>
-        </p:nvCxnSpPr>
-        <p:spPr>
-          <a:xfrm>
-            <a:off x="6096000" y="1956635"/>
-            <a:ext cx="0" cy="2411330"/>
-          </a:xfrm>
-          <a:prstGeom prst="line">
-            <a:avLst/>
-          </a:prstGeom>
-          <a:ln>
-            <a:solidFill>
-              <a:schemeClr val="bg1">
-                <a:lumMod val="95000"/>
-              </a:schemeClr>
-            </a:solidFill>
-          </a:ln>
-        </p:spPr>
-        <p:style>
-          <a:lnRef idx="1">
-            <a:schemeClr val="accent1"/>
-          </a:lnRef>
-          <a:fillRef idx="0">
-            <a:schemeClr val="accent1"/>
-          </a:fillRef>
-          <a:effectRef idx="0">
-            <a:schemeClr val="accent1"/>
-          </a:effectRef>
-          <a:fontRef idx="minor">
-            <a:schemeClr val="tx1"/>
-          </a:fontRef>
-        </p:style>
-      </p:cxnSp>
-      <p:sp>
-        <p:nvSpPr>
-          <p:cNvPr id="13" name="Prostokąt 12" descr="Kreska z akcentem z prawej&#10;">
-            <a:extLst>
-              <a:ext uri="{FF2B5EF4-FFF2-40B4-BE49-F238E27FC236}">
-                <a16:creationId xmlns:a16="http://schemas.microsoft.com/office/drawing/2014/main" id="{AFD8B317-5A08-2D32-97E5-D85BD1403307}"/>
-              </a:ext>
-              <a:ext uri="{C183D7F6-B498-43B3-948B-1728B52AA6E4}">
-                <adec:decorative xmlns:adec="http://schemas.microsoft.com/office/drawing/2017/decorative" val="1"/>
-              </a:ext>
-            </a:extLst>
-          </p:cNvPr>
-          <p:cNvSpPr/>
-          <p:nvPr/>
-        </p:nvSpPr>
-        <p:spPr>
-          <a:xfrm>
-            <a:off x="6299887" y="1693917"/>
-            <a:ext cx="1984175" cy="114824"/>
-          </a:xfrm>
-          <a:prstGeom prst="rect">
-            <a:avLst/>
-          </a:prstGeom>
-          <a:solidFill>
-            <a:schemeClr val="accent3"/>
-          </a:solidFill>
-          <a:ln>
-            <a:noFill/>
-          </a:ln>
-        </p:spPr>
-        <p:style>
-          <a:lnRef idx="2">
-            <a:schemeClr val="accent1">
-              <a:shade val="50000"/>
-            </a:schemeClr>
-          </a:lnRef>
-          <a:fillRef idx="1">
-            <a:schemeClr val="accent1"/>
-          </a:fillRef>
-          <a:effectRef idx="0">
-            <a:schemeClr val="accent1"/>
-          </a:effectRef>
-          <a:fontRef idx="minor">
-            <a:schemeClr val="lt1"/>
-          </a:fontRef>
-        </p:style>
-        <p:txBody>
-          <a:bodyPr rtlCol="0" anchor="ctr"/>
-          <a:lstStyle/>
-          <a:p>
-            <a:pPr algn="l" rtl="0"/>
-            <a:endParaRPr lang="pl-PL" dirty="0"/>
-          </a:p>
-        </p:txBody>
-      </p:sp>
-      <p:sp>
-        <p:nvSpPr>
-          <p:cNvPr id="6" name="Tekst — symbol zastępczy 5">
-            <a:extLst>
-              <a:ext uri="{FF2B5EF4-FFF2-40B4-BE49-F238E27FC236}">
-                <a16:creationId xmlns:a16="http://schemas.microsoft.com/office/drawing/2014/main" id="{3FE6026D-B70C-229A-4892-66B8977401D3}"/>
-              </a:ext>
-            </a:extLst>
-          </p:cNvPr>
-          <p:cNvSpPr>
-            <a:spLocks noGrp="1"/>
-          </p:cNvSpPr>
-          <p:nvPr>
-            <p:ph type="body" sz="quarter" idx="13"/>
-          </p:nvPr>
-        </p:nvSpPr>
-        <p:spPr>
-          <a:xfrm>
-            <a:off x="6300000" y="2037059"/>
-            <a:ext cx="5472000" cy="358775"/>
-          </a:xfrm>
-        </p:spPr>
-        <p:txBody>
-          <a:bodyPr rtlCol="0"/>
-          <a:lstStyle/>
-          <a:p>
-            <a:r>
-              <a:rPr lang="pl-PL" dirty="0"/>
-              <a:t>Dlaczego to działa i przynosi korzyści:</a:t>
-            </a:r>
-          </a:p>
-        </p:txBody>
-      </p:sp>
-      <p:sp>
-        <p:nvSpPr>
-          <p:cNvPr id="7" name="Tekst — symbol zastępczy 6">
-            <a:extLst>
-              <a:ext uri="{FF2B5EF4-FFF2-40B4-BE49-F238E27FC236}">
-                <a16:creationId xmlns:a16="http://schemas.microsoft.com/office/drawing/2014/main" id="{3552D115-9B75-2BE9-49EE-B693006611AC}"/>
-              </a:ext>
-            </a:extLst>
-          </p:cNvPr>
-          <p:cNvSpPr>
-            <a:spLocks noGrp="1"/>
-          </p:cNvSpPr>
-          <p:nvPr>
-            <p:ph type="body" sz="quarter" idx="12"/>
-          </p:nvPr>
-        </p:nvSpPr>
-        <p:spPr>
-          <a:xfrm>
-            <a:off x="6299887" y="2541059"/>
-            <a:ext cx="5472113" cy="2196041"/>
-          </a:xfrm>
-        </p:spPr>
-        <p:txBody>
-          <a:bodyPr rtlCol="0"/>
-          <a:lstStyle/>
-          <a:p>
-            <a:pPr rtl="0"/>
-            <a:r>
-              <a:rPr lang="pl-PL" dirty="0"/>
-              <a:t>Model oparty jest na statystyce i prawdopodobieństwie – ocenia, jak bardzo klient „pasuje” do danej grupy, co zapewnia trafność podziału.</a:t>
-            </a:r>
-          </a:p>
-          <a:p>
-            <a:pPr rtl="0"/>
-            <a:r>
-              <a:rPr lang="pl-PL" dirty="0"/>
-              <a:t>Pomaga zrozumieć klientów – każda grupa ma unikalny profil, co pozwala lepiej dopasować ofertę i sposób komunikacji.</a:t>
-            </a:r>
-          </a:p>
-          <a:p>
-            <a:pPr rtl="0"/>
-            <a:r>
-              <a:rPr lang="pl-PL" dirty="0"/>
-              <a:t>Zwiększa skuteczność marketingu – celując w odpowiednie grupy, firma może prowadzić bardziej trafne kampanie i lepiej wykorzystać budżet.</a:t>
-            </a:r>
-          </a:p>
-        </p:txBody>
-      </p:sp>
-      <p:sp>
-        <p:nvSpPr>
-          <p:cNvPr id="8" name="Numer slajdu — symbol zastępczy 7">
-            <a:extLst>
-              <a:ext uri="{FF2B5EF4-FFF2-40B4-BE49-F238E27FC236}">
-                <a16:creationId xmlns:a16="http://schemas.microsoft.com/office/drawing/2014/main" id="{09DE337C-EA52-5BB1-3646-0693884AADB1}"/>
-              </a:ext>
-            </a:extLst>
-          </p:cNvPr>
-          <p:cNvSpPr>
-            <a:spLocks noGrp="1"/>
-          </p:cNvSpPr>
-          <p:nvPr>
-            <p:ph type="sldNum" sz="quarter" idx="33"/>
-          </p:nvPr>
-        </p:nvSpPr>
-        <p:spPr>
-          <a:xfrm>
-            <a:off x="11760000" y="6371351"/>
-            <a:ext cx="432000" cy="432000"/>
-          </a:xfrm>
-        </p:spPr>
-        <p:txBody>
-          <a:bodyPr rtlCol="0"/>
-          <a:lstStyle/>
-          <a:p>
-            <a:pPr rtl="0"/>
-            <a:fld id="{19B51A1E-902D-48AF-9020-955120F399B6}" type="slidenum">
-              <a:rPr lang="pl-PL" smtClean="0"/>
-              <a:pPr rtl="0"/>
-              <a:t>4</a:t>
-            </a:fld>
-            <a:endParaRPr lang="pl-PL" dirty="0"/>
-          </a:p>
-        </p:txBody>
-      </p:sp>
-    </p:spTree>
-    <p:extLst>
-      <p:ext uri="{BB962C8B-B14F-4D97-AF65-F5344CB8AC3E}">
-        <p14:creationId xmlns:p14="http://schemas.microsoft.com/office/powerpoint/2010/main" val="2794640881"/>
-      </p:ext>
-    </p:extLst>
-  </p:cSld>
-  <p:clrMapOvr>
-    <a:masterClrMapping/>
-  </p:clrMapOvr>
-</p:sld>
-</file>
-
-<file path=ppt/slides/slide5.xml><?xml version="1.0" encoding="utf-8"?>
-<p:sld xmlns:a="http://schemas.openxmlformats.org/drawingml/2006/main" xmlns:r="http://schemas.openxmlformats.org/officeDocument/2006/relationships" xmlns:p="http://schemas.openxmlformats.org/presentationml/2006/main">
-  <p:cSld>
-    <p:spTree>
-      <p:nvGrpSpPr>
-        <p:cNvPr id="1" name=""/>
-        <p:cNvGrpSpPr/>
-        <p:nvPr/>
-      </p:nvGrpSpPr>
-      <p:grpSpPr>
-        <a:xfrm>
-          <a:off x="0" y="0"/>
-          <a:ext cx="0" cy="0"/>
-          <a:chOff x="0" y="0"/>
-          <a:chExt cx="0" cy="0"/>
-        </a:xfrm>
-      </p:grpSpPr>
-      <p:pic>
-        <p:nvPicPr>
-          <p:cNvPr id="11" name="Obraz — symbol zastępczy 10" descr="Biurko z komputerem, telefonem, książkami itp.">
-            <a:extLst>
-              <a:ext uri="{FF2B5EF4-FFF2-40B4-BE49-F238E27FC236}">
-                <a16:creationId xmlns:a16="http://schemas.microsoft.com/office/drawing/2014/main" id="{2E7ADBC3-DECA-9F4C-9289-9E43C727592F}"/>
-              </a:ext>
-            </a:extLst>
-          </p:cNvPr>
-          <p:cNvPicPr>
-            <a:picLocks noGrp="1" noChangeAspect="1"/>
-          </p:cNvPicPr>
-          <p:nvPr>
-            <p:ph type="pic" sz="quarter" idx="10"/>
-          </p:nvPr>
-        </p:nvPicPr>
-        <p:blipFill>
-          <a:blip r:embed="rId3" cstate="screen">
-            <a:extLst>
-              <a:ext uri="{28A0092B-C50C-407E-A947-70E740481C1C}">
-                <a14:useLocalDpi xmlns:a14="http://schemas.microsoft.com/office/drawing/2010/main"/>
-              </a:ext>
-            </a:extLst>
-          </a:blip>
-          <a:srcRect/>
-          <a:stretch>
-            <a:fillRect/>
-          </a:stretch>
-        </p:blipFill>
-        <p:spPr/>
-      </p:pic>
-      <p:sp>
-        <p:nvSpPr>
-          <p:cNvPr id="3" name="Tytuł 2">
-            <a:extLst>
-              <a:ext uri="{FF2B5EF4-FFF2-40B4-BE49-F238E27FC236}">
-                <a16:creationId xmlns:a16="http://schemas.microsoft.com/office/drawing/2014/main" id="{200B3D2B-613A-41BE-987D-E6A1324B456D}"/>
-              </a:ext>
-            </a:extLst>
-          </p:cNvPr>
-          <p:cNvSpPr>
-            <a:spLocks noGrp="1"/>
-          </p:cNvSpPr>
-          <p:nvPr>
-            <p:ph type="ctrTitle"/>
-          </p:nvPr>
-        </p:nvSpPr>
-        <p:spPr>
-          <a:xfrm>
-            <a:off x="6235700" y="2480732"/>
-            <a:ext cx="5956300" cy="1668059"/>
-          </a:xfrm>
-        </p:spPr>
-        <p:txBody>
-          <a:bodyPr rtlCol="0"/>
-          <a:lstStyle/>
-          <a:p>
-            <a:pPr rtl="0"/>
-            <a:r>
-              <a:rPr lang="pl-PL" sz="4400" dirty="0"/>
-              <a:t>Jak model podejmuje decyzje?</a:t>
-            </a:r>
-          </a:p>
-        </p:txBody>
-      </p:sp>
-      <p:sp>
-        <p:nvSpPr>
-          <p:cNvPr id="14" name="Tekst — symbol zastępczy 13">
-            <a:extLst>
-              <a:ext uri="{FF2B5EF4-FFF2-40B4-BE49-F238E27FC236}">
-                <a16:creationId xmlns:a16="http://schemas.microsoft.com/office/drawing/2014/main" id="{F278402B-CA7D-4F5B-B3FA-ED74AB3CFB6C}"/>
-              </a:ext>
-            </a:extLst>
-          </p:cNvPr>
-          <p:cNvSpPr>
-            <a:spLocks noGrp="1"/>
-          </p:cNvSpPr>
-          <p:nvPr>
-            <p:ph type="body" sz="quarter" idx="13"/>
-          </p:nvPr>
-        </p:nvSpPr>
-        <p:spPr/>
-        <p:txBody>
-          <a:bodyPr rtlCol="0"/>
-          <a:lstStyle/>
-          <a:p>
-            <a:pPr rtl="0"/>
-            <a:r>
-              <a:rPr lang="pl-PL" dirty="0"/>
-              <a:t>Czyli skąd mamy pewność, że nasz podział jest praktyczny?</a:t>
-            </a:r>
-          </a:p>
-        </p:txBody>
-      </p:sp>
-      <p:sp>
-        <p:nvSpPr>
-          <p:cNvPr id="5" name="Numer slajdu — symbol zastępczy 4">
-            <a:extLst>
-              <a:ext uri="{FF2B5EF4-FFF2-40B4-BE49-F238E27FC236}">
-                <a16:creationId xmlns:a16="http://schemas.microsoft.com/office/drawing/2014/main" id="{BDD5A594-D852-43BB-B591-E9D9027253BD}"/>
-              </a:ext>
-            </a:extLst>
-          </p:cNvPr>
-          <p:cNvSpPr>
-            <a:spLocks noGrp="1"/>
-          </p:cNvSpPr>
-          <p:nvPr>
-            <p:ph type="sldNum" sz="quarter" idx="12"/>
-          </p:nvPr>
-        </p:nvSpPr>
-        <p:spPr/>
-        <p:txBody>
-          <a:bodyPr rtlCol="0"/>
-          <a:lstStyle/>
-          <a:p>
-            <a:pPr rtl="0"/>
-            <a:fld id="{19B51A1E-902D-48AF-9020-955120F399B6}" type="slidenum">
-              <a:rPr lang="pl-PL" smtClean="0"/>
-              <a:pPr rtl="0"/>
-              <a:t>5</a:t>
-            </a:fld>
-            <a:endParaRPr lang="pl-PL" dirty="0"/>
-          </a:p>
-        </p:txBody>
-      </p:sp>
-    </p:spTree>
-    <p:extLst>
-      <p:ext uri="{BB962C8B-B14F-4D97-AF65-F5344CB8AC3E}">
-        <p14:creationId xmlns:p14="http://schemas.microsoft.com/office/powerpoint/2010/main" val="4091674644"/>
-      </p:ext>
-    </p:extLst>
-  </p:cSld>
-  <p:clrMapOvr>
-    <a:masterClrMapping/>
-  </p:clrMapOvr>
-</p:sld>
-</file>
-
-<file path=ppt/slides/slide6.xml><?xml version="1.0" encoding="utf-8"?>
-<p:sld xmlns:a="http://schemas.openxmlformats.org/drawingml/2006/main" xmlns:r="http://schemas.openxmlformats.org/officeDocument/2006/relationships" xmlns:p="http://schemas.openxmlformats.org/presentationml/2006/main">
-  <p:cSld>
-    <p:spTree>
-      <p:nvGrpSpPr>
-        <p:cNvPr id="1" name=""/>
-        <p:cNvGrpSpPr/>
-        <p:nvPr/>
-      </p:nvGrpSpPr>
-      <p:grpSpPr>
-        <a:xfrm>
-          <a:off x="0" y="0"/>
-          <a:ext cx="0" cy="0"/>
-          <a:chOff x="0" y="0"/>
-          <a:chExt cx="0" cy="0"/>
-        </a:xfrm>
-      </p:grpSpPr>
-      <p:sp>
-        <p:nvSpPr>
-          <p:cNvPr id="2" name="Tytuł 1">
-            <a:extLst>
-              <a:ext uri="{FF2B5EF4-FFF2-40B4-BE49-F238E27FC236}">
-                <a16:creationId xmlns:a16="http://schemas.microsoft.com/office/drawing/2014/main" id="{19304E83-A4F0-49C5-BB01-F5773509A2B3}"/>
-              </a:ext>
-            </a:extLst>
-          </p:cNvPr>
-          <p:cNvSpPr>
-            <a:spLocks noGrp="1"/>
-          </p:cNvSpPr>
-          <p:nvPr>
-            <p:ph type="title"/>
-          </p:nvPr>
-        </p:nvSpPr>
-        <p:spPr/>
-        <p:txBody>
-          <a:bodyPr rtlCol="0"/>
-          <a:lstStyle/>
-          <a:p>
-            <a:pPr rtl="0"/>
-            <a:r>
-              <a:rPr lang="pl-PL" dirty="0"/>
-              <a:t>Decyzyjność modelu</a:t>
-            </a:r>
-          </a:p>
-        </p:txBody>
-      </p:sp>
-      <p:sp>
-        <p:nvSpPr>
-          <p:cNvPr id="3" name="Tekst — symbol zastępczy 2">
-            <a:extLst>
-              <a:ext uri="{FF2B5EF4-FFF2-40B4-BE49-F238E27FC236}">
-                <a16:creationId xmlns:a16="http://schemas.microsoft.com/office/drawing/2014/main" id="{7CA42D59-EAD6-4F95-84F1-32A30F057856}"/>
-              </a:ext>
-            </a:extLst>
-          </p:cNvPr>
-          <p:cNvSpPr>
-            <a:spLocks noGrp="1"/>
-          </p:cNvSpPr>
-          <p:nvPr>
-            <p:ph type="body" sz="quarter" idx="32"/>
-          </p:nvPr>
-        </p:nvSpPr>
-        <p:spPr/>
-        <p:txBody>
-          <a:bodyPr rtlCol="0"/>
-          <a:lstStyle/>
-          <a:p>
-            <a:pPr rtl="0"/>
-            <a:r>
-              <a:rPr lang="pl-PL" dirty="0"/>
-              <a:t>Jakie cechy algorytm bierze pod uwagę przy segmentacji?</a:t>
-            </a:r>
-          </a:p>
-        </p:txBody>
-      </p:sp>
-      <p:sp>
-        <p:nvSpPr>
-          <p:cNvPr id="12" name="Prostokąt 11" descr="Blok z akcentem z lewej">
-            <a:extLst>
-              <a:ext uri="{FF2B5EF4-FFF2-40B4-BE49-F238E27FC236}">
-                <a16:creationId xmlns:a16="http://schemas.microsoft.com/office/drawing/2014/main" id="{7F65E93D-09FF-42EE-B9DD-750638966686}"/>
-              </a:ext>
-              <a:ext uri="{C183D7F6-B498-43B3-948B-1728B52AA6E4}">
-                <adec:decorative xmlns:adec="http://schemas.microsoft.com/office/drawing/2017/decorative" val="1"/>
-              </a:ext>
-            </a:extLst>
-          </p:cNvPr>
-          <p:cNvSpPr/>
-          <p:nvPr/>
-        </p:nvSpPr>
-        <p:spPr>
-          <a:xfrm>
-            <a:off x="431800" y="1579768"/>
-            <a:ext cx="1984175" cy="114824"/>
-          </a:xfrm>
-          <a:prstGeom prst="rect">
-            <a:avLst/>
-          </a:prstGeom>
-          <a:solidFill>
-            <a:schemeClr val="accent1"/>
-          </a:solidFill>
-          <a:ln>
-            <a:noFill/>
-          </a:ln>
-        </p:spPr>
-        <p:style>
-          <a:lnRef idx="2">
-            <a:schemeClr val="accent1">
-              <a:shade val="50000"/>
-            </a:schemeClr>
-          </a:lnRef>
-          <a:fillRef idx="1">
-            <a:schemeClr val="accent1"/>
-          </a:fillRef>
-          <a:effectRef idx="0">
-            <a:schemeClr val="accent1"/>
-          </a:effectRef>
-          <a:fontRef idx="minor">
-            <a:schemeClr val="lt1"/>
-          </a:fontRef>
-        </p:style>
-        <p:txBody>
-          <a:bodyPr rtlCol="0" anchor="ctr"/>
-          <a:lstStyle/>
-          <a:p>
-            <a:pPr algn="l" rtl="0"/>
-            <a:endParaRPr lang="pl-PL" dirty="0"/>
-          </a:p>
-        </p:txBody>
-      </p:sp>
-      <p:sp>
-        <p:nvSpPr>
-          <p:cNvPr id="5" name="Zawartość — symbol zastępczy 4">
-            <a:extLst>
-              <a:ext uri="{FF2B5EF4-FFF2-40B4-BE49-F238E27FC236}">
-                <a16:creationId xmlns:a16="http://schemas.microsoft.com/office/drawing/2014/main" id="{CEEB3BAE-C0B2-447C-B8BE-96C6BD84D658}"/>
-              </a:ext>
-            </a:extLst>
-          </p:cNvPr>
-          <p:cNvSpPr>
-            <a:spLocks noGrp="1"/>
-          </p:cNvSpPr>
-          <p:nvPr>
-            <p:ph sz="half" idx="2"/>
-          </p:nvPr>
-        </p:nvSpPr>
-        <p:spPr>
-          <a:xfrm>
-            <a:off x="431800" y="1906360"/>
-            <a:ext cx="4961466" cy="2194694"/>
-          </a:xfrm>
-        </p:spPr>
-        <p:txBody>
-          <a:bodyPr rtlCol="0"/>
-          <a:lstStyle/>
-          <a:p>
-            <a:pPr marL="0" indent="0" rtl="0">
-              <a:buNone/>
-            </a:pPr>
-            <a:r>
-              <a:rPr lang="pl-PL" dirty="0"/>
-              <a:t>Do analizy istotności poszczególnych cech klientów wykorzystaliśmy algorytm klasyfikacyjny </a:t>
-            </a:r>
-            <a:r>
-              <a:rPr lang="pl-PL" dirty="0" err="1"/>
-              <a:t>RandomForest</a:t>
-            </a:r>
-            <a:r>
-              <a:rPr lang="pl-PL" dirty="0"/>
-              <a:t>, który zwraca czytelną informację na podstawie jakich cech algorytmy podejmują decyzję o podziale na klasy.</a:t>
-            </a:r>
-          </a:p>
-          <a:p>
-            <a:pPr marL="0" indent="0" rtl="0">
-              <a:buNone/>
-            </a:pPr>
-            <a:r>
-              <a:rPr lang="pl-PL" dirty="0"/>
-              <a:t>W rezultacie, wpływ na kształt segmentów mają następujące cechy:</a:t>
-            </a:r>
-          </a:p>
-          <a:p>
-            <a:r>
-              <a:rPr lang="pl-PL" dirty="0"/>
-              <a:t>wysokość kredytu,</a:t>
-            </a:r>
-          </a:p>
-          <a:p>
-            <a:r>
-              <a:rPr lang="pl-PL" dirty="0"/>
-              <a:t>wysokość dochodu,</a:t>
-            </a:r>
-          </a:p>
-          <a:p>
-            <a:r>
-              <a:rPr lang="pl-PL" dirty="0"/>
-              <a:t>stan własnościowy domu/mieszkania (hipoteka / wynajem / mieszkanie własne),</a:t>
-            </a:r>
-          </a:p>
-          <a:p>
-            <a:r>
-              <a:rPr lang="pl-PL" dirty="0"/>
-              <a:t>przeznaczenie kredytów (np. na wydatki związane z domem).</a:t>
-            </a:r>
-          </a:p>
-        </p:txBody>
-      </p:sp>
-      <p:cxnSp>
-        <p:nvCxnSpPr>
-          <p:cNvPr id="11" name="Łącznik prosty 10" descr="Podział slajdu">
-            <a:extLst>
-              <a:ext uri="{FF2B5EF4-FFF2-40B4-BE49-F238E27FC236}">
-                <a16:creationId xmlns:a16="http://schemas.microsoft.com/office/drawing/2014/main" id="{5A563457-1EC8-4978-BCCB-AFD88C9ED04C}"/>
-              </a:ext>
-              <a:ext uri="{C183D7F6-B498-43B3-948B-1728B52AA6E4}">
-                <adec:decorative xmlns:adec="http://schemas.microsoft.com/office/drawing/2017/decorative" val="1"/>
-              </a:ext>
-            </a:extLst>
-          </p:cNvPr>
-          <p:cNvCxnSpPr/>
-          <p:nvPr/>
-        </p:nvCxnSpPr>
-        <p:spPr>
-          <a:xfrm>
-            <a:off x="6096000" y="2363035"/>
-            <a:ext cx="0" cy="2411330"/>
-          </a:xfrm>
-          <a:prstGeom prst="line">
-            <a:avLst/>
-          </a:prstGeom>
-          <a:ln>
-            <a:solidFill>
-              <a:schemeClr val="bg1">
-                <a:lumMod val="95000"/>
-              </a:schemeClr>
-            </a:solidFill>
-          </a:ln>
-        </p:spPr>
-        <p:style>
-          <a:lnRef idx="1">
-            <a:schemeClr val="accent1"/>
-          </a:lnRef>
-          <a:fillRef idx="0">
-            <a:schemeClr val="accent1"/>
-          </a:fillRef>
-          <a:effectRef idx="0">
-            <a:schemeClr val="accent1"/>
-          </a:effectRef>
-          <a:fontRef idx="minor">
-            <a:schemeClr val="tx1"/>
-          </a:fontRef>
-        </p:style>
-      </p:cxnSp>
-      <p:sp>
-        <p:nvSpPr>
-          <p:cNvPr id="8" name="Numer slajdu — symbol zastępczy 7">
-            <a:extLst>
-              <a:ext uri="{FF2B5EF4-FFF2-40B4-BE49-F238E27FC236}">
-                <a16:creationId xmlns:a16="http://schemas.microsoft.com/office/drawing/2014/main" id="{E6AC9832-FB01-464A-9824-61887B77997E}"/>
-              </a:ext>
-            </a:extLst>
-          </p:cNvPr>
-          <p:cNvSpPr>
-            <a:spLocks noGrp="1"/>
-          </p:cNvSpPr>
-          <p:nvPr>
-            <p:ph type="sldNum" sz="quarter" idx="33"/>
-          </p:nvPr>
-        </p:nvSpPr>
-        <p:spPr>
-          <a:xfrm>
-            <a:off x="11760000" y="6371351"/>
-            <a:ext cx="432000" cy="432000"/>
-          </a:xfrm>
-        </p:spPr>
-        <p:txBody>
-          <a:bodyPr rtlCol="0"/>
-          <a:lstStyle/>
-          <a:p>
-            <a:pPr rtl="0"/>
-            <a:fld id="{19B51A1E-902D-48AF-9020-955120F399B6}" type="slidenum">
-              <a:rPr lang="pl-PL" smtClean="0"/>
-              <a:pPr rtl="0"/>
-              <a:t>6</a:t>
-            </a:fld>
-            <a:endParaRPr lang="pl-PL" dirty="0"/>
-          </a:p>
-        </p:txBody>
-      </p:sp>
-      <p:pic>
-        <p:nvPicPr>
-          <p:cNvPr id="17" name="Obraz 16">
-            <a:extLst>
-              <a:ext uri="{FF2B5EF4-FFF2-40B4-BE49-F238E27FC236}">
-                <a16:creationId xmlns:a16="http://schemas.microsoft.com/office/drawing/2014/main" id="{DC7EBA4D-72D7-F145-DE2B-6F087A235D60}"/>
-              </a:ext>
-            </a:extLst>
-          </p:cNvPr>
-          <p:cNvPicPr>
-            <a:picLocks noChangeAspect="1"/>
-          </p:cNvPicPr>
-          <p:nvPr/>
-        </p:nvPicPr>
-        <p:blipFill>
-          <a:blip r:embed="rId3"/>
-          <a:stretch>
-            <a:fillRect/>
-          </a:stretch>
-        </p:blipFill>
-        <p:spPr>
-          <a:xfrm>
-            <a:off x="5572553" y="1818082"/>
-            <a:ext cx="6403447" cy="3785605"/>
-          </a:xfrm>
-          <a:prstGeom prst="rect">
-            <a:avLst/>
-          </a:prstGeom>
-        </p:spPr>
-      </p:pic>
-    </p:spTree>
-    <p:extLst>
-      <p:ext uri="{BB962C8B-B14F-4D97-AF65-F5344CB8AC3E}">
-        <p14:creationId xmlns:p14="http://schemas.microsoft.com/office/powerpoint/2010/main" val="3188837873"/>
-      </p:ext>
-    </p:extLst>
-  </p:cSld>
-  <p:clrMapOvr>
-    <a:masterClrMapping/>
-  </p:clrMapOvr>
-</p:sld>
-</file>
-
-<file path=ppt/slides/slide7.xml><?xml version="1.0" encoding="utf-8"?>
-<p:sld xmlns:a="http://schemas.openxmlformats.org/drawingml/2006/main" xmlns:r="http://schemas.openxmlformats.org/officeDocument/2006/relationships" xmlns:p="http://schemas.openxmlformats.org/presentationml/2006/main">
-  <p:cSld>
-    <p:spTree>
-      <p:nvGrpSpPr>
-        <p:cNvPr id="1" name="">
-          <a:extLst>
-            <a:ext uri="{FF2B5EF4-FFF2-40B4-BE49-F238E27FC236}">
-              <a16:creationId xmlns:a16="http://schemas.microsoft.com/office/drawing/2014/main" id="{8C561970-819E-08F2-F201-619F003574F5}"/>
-            </a:ext>
-          </a:extLst>
-        </p:cNvPr>
-        <p:cNvGrpSpPr/>
-        <p:nvPr/>
-      </p:nvGrpSpPr>
-      <p:grpSpPr>
-        <a:xfrm>
-          <a:off x="0" y="0"/>
-          <a:ext cx="0" cy="0"/>
-          <a:chOff x="0" y="0"/>
-          <a:chExt cx="0" cy="0"/>
-        </a:xfrm>
-      </p:grpSpPr>
-      <p:sp>
-        <p:nvSpPr>
-          <p:cNvPr id="2" name="Tytuł 1">
-            <a:extLst>
-              <a:ext uri="{FF2B5EF4-FFF2-40B4-BE49-F238E27FC236}">
-                <a16:creationId xmlns:a16="http://schemas.microsoft.com/office/drawing/2014/main" id="{D225413B-225F-1515-3E08-81B3895040A9}"/>
-              </a:ext>
-            </a:extLst>
-          </p:cNvPr>
-          <p:cNvSpPr>
-            <a:spLocks noGrp="1"/>
-          </p:cNvSpPr>
-          <p:nvPr>
-            <p:ph type="title"/>
-          </p:nvPr>
-        </p:nvSpPr>
-        <p:spPr/>
-        <p:txBody>
-          <a:bodyPr rtlCol="0"/>
-          <a:lstStyle/>
-          <a:p>
-            <a:pPr rtl="0"/>
-            <a:r>
-              <a:rPr lang="pl-PL" dirty="0"/>
-              <a:t>Najważniejsze cechy klastrów</a:t>
-            </a:r>
-          </a:p>
-        </p:txBody>
-      </p:sp>
-      <p:sp>
-        <p:nvSpPr>
-          <p:cNvPr id="8" name="Numer slajdu — symbol zastępczy 7">
-            <a:extLst>
-              <a:ext uri="{FF2B5EF4-FFF2-40B4-BE49-F238E27FC236}">
-                <a16:creationId xmlns:a16="http://schemas.microsoft.com/office/drawing/2014/main" id="{376E8DCA-F48A-7FFF-6F59-F14F6EC1467C}"/>
-              </a:ext>
-            </a:extLst>
-          </p:cNvPr>
-          <p:cNvSpPr>
-            <a:spLocks noGrp="1"/>
-          </p:cNvSpPr>
-          <p:nvPr>
-            <p:ph type="sldNum" sz="quarter" idx="33"/>
-          </p:nvPr>
-        </p:nvSpPr>
-        <p:spPr>
-          <a:xfrm>
-            <a:off x="11760000" y="6371351"/>
-            <a:ext cx="432000" cy="432000"/>
-          </a:xfrm>
-        </p:spPr>
-        <p:txBody>
-          <a:bodyPr rtlCol="0"/>
-          <a:lstStyle/>
-          <a:p>
-            <a:pPr rtl="0"/>
-            <a:fld id="{19B51A1E-902D-48AF-9020-955120F399B6}" type="slidenum">
-              <a:rPr lang="pl-PL" smtClean="0"/>
-              <a:pPr rtl="0"/>
-              <a:t>7</a:t>
-            </a:fld>
-            <a:endParaRPr lang="pl-PL" dirty="0"/>
-          </a:p>
-        </p:txBody>
-      </p:sp>
-      <p:pic>
-        <p:nvPicPr>
-          <p:cNvPr id="23" name="Obraz 22">
-            <a:extLst>
-              <a:ext uri="{FF2B5EF4-FFF2-40B4-BE49-F238E27FC236}">
-                <a16:creationId xmlns:a16="http://schemas.microsoft.com/office/drawing/2014/main" id="{FE827C7E-9D48-43D1-1CCE-A6BA068FD008}"/>
-              </a:ext>
-            </a:extLst>
-          </p:cNvPr>
-          <p:cNvPicPr>
-            <a:picLocks noChangeAspect="1"/>
-          </p:cNvPicPr>
-          <p:nvPr/>
-        </p:nvPicPr>
-        <p:blipFill>
-          <a:blip r:embed="rId3"/>
-          <a:stretch>
-            <a:fillRect/>
-          </a:stretch>
-        </p:blipFill>
-        <p:spPr>
-          <a:xfrm>
-            <a:off x="98246" y="1145765"/>
-            <a:ext cx="5924070" cy="2283235"/>
-          </a:xfrm>
-          <a:prstGeom prst="rect">
-            <a:avLst/>
-          </a:prstGeom>
-        </p:spPr>
-      </p:pic>
-      <p:pic>
-        <p:nvPicPr>
-          <p:cNvPr id="4" name="Obraz 3">
-            <a:extLst>
-              <a:ext uri="{FF2B5EF4-FFF2-40B4-BE49-F238E27FC236}">
-                <a16:creationId xmlns:a16="http://schemas.microsoft.com/office/drawing/2014/main" id="{5244D18D-454D-2FC8-76F8-D206431F6632}"/>
-              </a:ext>
-            </a:extLst>
-          </p:cNvPr>
-          <p:cNvPicPr>
-            <a:picLocks noChangeAspect="1"/>
-          </p:cNvPicPr>
-          <p:nvPr/>
-        </p:nvPicPr>
-        <p:blipFill>
-          <a:blip r:embed="rId4"/>
-          <a:stretch>
-            <a:fillRect/>
-          </a:stretch>
-        </p:blipFill>
-        <p:spPr>
-          <a:xfrm>
-            <a:off x="6257026" y="2473676"/>
-            <a:ext cx="5836728" cy="2287998"/>
-          </a:xfrm>
-          <a:prstGeom prst="rect">
-            <a:avLst/>
-          </a:prstGeom>
-        </p:spPr>
-      </p:pic>
-      <p:pic>
-        <p:nvPicPr>
-          <p:cNvPr id="6" name="Obraz 5">
-            <a:extLst>
-              <a:ext uri="{FF2B5EF4-FFF2-40B4-BE49-F238E27FC236}">
-                <a16:creationId xmlns:a16="http://schemas.microsoft.com/office/drawing/2014/main" id="{4D1D8282-E44E-8C81-F8E6-646E6633F0C7}"/>
-              </a:ext>
-            </a:extLst>
-          </p:cNvPr>
-          <p:cNvPicPr>
-            <a:picLocks noChangeAspect="1"/>
-          </p:cNvPicPr>
-          <p:nvPr/>
-        </p:nvPicPr>
-        <p:blipFill>
-          <a:blip r:embed="rId5"/>
-          <a:stretch>
-            <a:fillRect/>
-          </a:stretch>
-        </p:blipFill>
-        <p:spPr>
-          <a:xfrm>
-            <a:off x="98246" y="3984081"/>
-            <a:ext cx="5924070" cy="2267808"/>
-          </a:xfrm>
-          <a:prstGeom prst="rect">
-            <a:avLst/>
-          </a:prstGeom>
-        </p:spPr>
-      </p:pic>
-    </p:spTree>
-    <p:extLst>
-      <p:ext uri="{BB962C8B-B14F-4D97-AF65-F5344CB8AC3E}">
-        <p14:creationId xmlns:p14="http://schemas.microsoft.com/office/powerpoint/2010/main" val="3473937371"/>
-      </p:ext>
-    </p:extLst>
-  </p:cSld>
-  <p:clrMapOvr>
-    <a:masterClrMapping/>
-  </p:clrMapOvr>
-</p:sld>
-</file>
-
-<file path=ppt/slides/slide8.xml><?xml version="1.0" encoding="utf-8"?>
-<p:sld xmlns:a="http://schemas.openxmlformats.org/drawingml/2006/main" xmlns:r="http://schemas.openxmlformats.org/officeDocument/2006/relationships" xmlns:p="http://schemas.openxmlformats.org/presentationml/2006/main">
-  <p:cSld>
-    <p:spTree>
-      <p:nvGrpSpPr>
-        <p:cNvPr id="1" name="">
-          <a:extLst>
-            <a:ext uri="{FF2B5EF4-FFF2-40B4-BE49-F238E27FC236}">
-              <a16:creationId xmlns:a16="http://schemas.microsoft.com/office/drawing/2014/main" id="{A784E359-D813-3745-605F-63454E48F937}"/>
-            </a:ext>
-          </a:extLst>
-        </p:cNvPr>
-        <p:cNvGrpSpPr/>
-        <p:nvPr/>
-      </p:nvGrpSpPr>
-      <p:grpSpPr>
-        <a:xfrm>
-          <a:off x="0" y="0"/>
-          <a:ext cx="0" cy="0"/>
-          <a:chOff x="0" y="0"/>
-          <a:chExt cx="0" cy="0"/>
-        </a:xfrm>
-      </p:grpSpPr>
-      <p:sp>
-        <p:nvSpPr>
-          <p:cNvPr id="2" name="Tytuł 1">
-            <a:extLst>
-              <a:ext uri="{FF2B5EF4-FFF2-40B4-BE49-F238E27FC236}">
-                <a16:creationId xmlns:a16="http://schemas.microsoft.com/office/drawing/2014/main" id="{A4D31930-3E9D-86DA-E688-AF93B6718DBD}"/>
-              </a:ext>
-            </a:extLst>
-          </p:cNvPr>
-          <p:cNvSpPr>
-            <a:spLocks noGrp="1"/>
-          </p:cNvSpPr>
-          <p:nvPr>
-            <p:ph type="title"/>
-          </p:nvPr>
-        </p:nvSpPr>
-        <p:spPr/>
-        <p:txBody>
-          <a:bodyPr rtlCol="0"/>
-          <a:lstStyle/>
-          <a:p>
-            <a:pPr rtl="0"/>
-            <a:r>
-              <a:rPr lang="pl-PL" dirty="0"/>
-              <a:t>Najważniejsze cechy klastrów</a:t>
-            </a:r>
-          </a:p>
-        </p:txBody>
-      </p:sp>
-      <p:sp>
-        <p:nvSpPr>
-          <p:cNvPr id="8" name="Numer slajdu — symbol zastępczy 7">
-            <a:extLst>
-              <a:ext uri="{FF2B5EF4-FFF2-40B4-BE49-F238E27FC236}">
-                <a16:creationId xmlns:a16="http://schemas.microsoft.com/office/drawing/2014/main" id="{C093B19C-6E2B-C5E1-4B08-9195E6F58736}"/>
-              </a:ext>
-            </a:extLst>
-          </p:cNvPr>
-          <p:cNvSpPr>
-            <a:spLocks noGrp="1"/>
-          </p:cNvSpPr>
-          <p:nvPr>
-            <p:ph type="sldNum" sz="quarter" idx="33"/>
-          </p:nvPr>
-        </p:nvSpPr>
-        <p:spPr>
-          <a:xfrm>
-            <a:off x="11760000" y="6371351"/>
-            <a:ext cx="432000" cy="432000"/>
-          </a:xfrm>
-        </p:spPr>
-        <p:txBody>
-          <a:bodyPr rtlCol="0"/>
-          <a:lstStyle/>
-          <a:p>
-            <a:pPr rtl="0"/>
-            <a:fld id="{19B51A1E-902D-48AF-9020-955120F399B6}" type="slidenum">
-              <a:rPr lang="pl-PL" smtClean="0"/>
-              <a:pPr rtl="0"/>
-              <a:t>8</a:t>
-            </a:fld>
-            <a:endParaRPr lang="pl-PL" dirty="0"/>
-          </a:p>
-        </p:txBody>
-      </p:sp>
-      <p:pic>
-        <p:nvPicPr>
-          <p:cNvPr id="9" name="Obraz 8">
-            <a:extLst>
-              <a:ext uri="{FF2B5EF4-FFF2-40B4-BE49-F238E27FC236}">
-                <a16:creationId xmlns:a16="http://schemas.microsoft.com/office/drawing/2014/main" id="{61704ED2-F9EC-6DA2-DD1D-698D0B990EC9}"/>
-              </a:ext>
-            </a:extLst>
-          </p:cNvPr>
-          <p:cNvPicPr>
-            <a:picLocks noChangeAspect="1"/>
-          </p:cNvPicPr>
-          <p:nvPr/>
-        </p:nvPicPr>
-        <p:blipFill>
-          <a:blip r:embed="rId3"/>
-          <a:stretch>
-            <a:fillRect/>
-          </a:stretch>
-        </p:blipFill>
-        <p:spPr>
-          <a:xfrm>
-            <a:off x="3089869" y="3754363"/>
-            <a:ext cx="6012261" cy="2413524"/>
-          </a:xfrm>
-          <a:prstGeom prst="rect">
-            <a:avLst/>
-          </a:prstGeom>
-        </p:spPr>
-      </p:pic>
-      <p:pic>
-        <p:nvPicPr>
-          <p:cNvPr id="11" name="Obraz 10">
-            <a:extLst>
-              <a:ext uri="{FF2B5EF4-FFF2-40B4-BE49-F238E27FC236}">
-                <a16:creationId xmlns:a16="http://schemas.microsoft.com/office/drawing/2014/main" id="{9CA551A0-5C93-9062-7900-E6E578605E6F}"/>
-              </a:ext>
-            </a:extLst>
-          </p:cNvPr>
-          <p:cNvPicPr>
-            <a:picLocks noChangeAspect="1"/>
-          </p:cNvPicPr>
-          <p:nvPr/>
-        </p:nvPicPr>
-        <p:blipFill>
-          <a:blip r:embed="rId4"/>
-          <a:stretch>
-            <a:fillRect/>
-          </a:stretch>
-        </p:blipFill>
-        <p:spPr>
-          <a:xfrm>
-            <a:off x="5798373" y="1063130"/>
-            <a:ext cx="6287448" cy="2275264"/>
-          </a:xfrm>
-          <a:prstGeom prst="rect">
-            <a:avLst/>
-          </a:prstGeom>
-        </p:spPr>
-      </p:pic>
-      <p:pic>
-        <p:nvPicPr>
-          <p:cNvPr id="13" name="Obraz 12">
-            <a:extLst>
-              <a:ext uri="{FF2B5EF4-FFF2-40B4-BE49-F238E27FC236}">
-                <a16:creationId xmlns:a16="http://schemas.microsoft.com/office/drawing/2014/main" id="{E5B4ABFA-7B12-CE0B-5B6F-86250FF30B77}"/>
-              </a:ext>
-            </a:extLst>
-          </p:cNvPr>
-          <p:cNvPicPr>
-            <a:picLocks noChangeAspect="1"/>
-          </p:cNvPicPr>
-          <p:nvPr/>
-        </p:nvPicPr>
-        <p:blipFill>
-          <a:blip r:embed="rId5"/>
-          <a:stretch>
-            <a:fillRect/>
-          </a:stretch>
-        </p:blipFill>
-        <p:spPr>
-          <a:xfrm>
-            <a:off x="106179" y="1102870"/>
-            <a:ext cx="5568848" cy="2235523"/>
-          </a:xfrm>
-          <a:prstGeom prst="rect">
-            <a:avLst/>
-          </a:prstGeom>
-        </p:spPr>
-      </p:pic>
-    </p:spTree>
-    <p:extLst>
-      <p:ext uri="{BB962C8B-B14F-4D97-AF65-F5344CB8AC3E}">
-        <p14:creationId xmlns:p14="http://schemas.microsoft.com/office/powerpoint/2010/main" val="2527696421"/>
-      </p:ext>
-    </p:extLst>
-  </p:cSld>
-  <p:clrMapOvr>
-    <a:masterClrMapping/>
-  </p:clrMapOvr>
-</p:sld>
-</file>
-
-<file path=ppt/slides/slide9.xml><?xml version="1.0" encoding="utf-8"?>
-<p:sld xmlns:a="http://schemas.openxmlformats.org/drawingml/2006/main" xmlns:r="http://schemas.openxmlformats.org/officeDocument/2006/relationships" xmlns:p="http://schemas.openxmlformats.org/presentationml/2006/main">
-  <p:cSld>
     <p:spTree>
       <p:nvGrpSpPr>
         <p:cNvPr id="1" name="">
@@ -11045,7 +8679,7 @@
             <a:pPr rtl="0"/>
             <a:r>
               <a:rPr lang="pl-PL" dirty="0"/>
-              <a:t>Najwyższe kwoty pożyczek</a:t>
+              <a:t>Najwyższe kwoty dochodów i pożyczek</a:t>
             </a:r>
           </a:p>
           <a:p>
@@ -11298,7 +8932,7 @@
             <a:fld id="{19B51A1E-902D-48AF-9020-955120F399B6}" type="slidenum">
               <a:rPr lang="pl-PL" smtClean="0"/>
               <a:pPr rtl="0"/>
-              <a:t>9</a:t>
+              <a:t>10</a:t>
             </a:fld>
             <a:endParaRPr lang="pl-PL" dirty="0"/>
           </a:p>
@@ -11826,7 +9460,7 @@
           <a:p>
             <a:r>
               <a:rPr lang="pl-PL" dirty="0"/>
-              <a:t>Najniższe kwoty pożyczek i dochody</a:t>
+              <a:t>Najniższe kwoty dochodów i pożyczek</a:t>
             </a:r>
           </a:p>
           <a:p>
@@ -11853,6 +9487,2865 @@
     <p:extLst>
       <p:ext uri="{BB962C8B-B14F-4D97-AF65-F5344CB8AC3E}">
         <p14:creationId xmlns:p14="http://schemas.microsoft.com/office/powerpoint/2010/main" val="3270937097"/>
+      </p:ext>
+    </p:extLst>
+  </p:cSld>
+  <p:clrMapOvr>
+    <a:masterClrMapping/>
+  </p:clrMapOvr>
+</p:sld>
+</file>
+
+<file path=ppt/slides/slide11.xml><?xml version="1.0" encoding="utf-8"?>
+<p:sld xmlns:a="http://schemas.openxmlformats.org/drawingml/2006/main" xmlns:r="http://schemas.openxmlformats.org/officeDocument/2006/relationships" xmlns:p="http://schemas.openxmlformats.org/presentationml/2006/main">
+  <p:cSld>
+    <p:bg>
+      <p:bgPr>
+        <a:solidFill>
+          <a:schemeClr val="tx1">
+            <a:lumMod val="75000"/>
+            <a:lumOff val="25000"/>
+          </a:schemeClr>
+        </a:solidFill>
+        <a:effectLst/>
+      </p:bgPr>
+    </p:bg>
+    <p:spTree>
+      <p:nvGrpSpPr>
+        <p:cNvPr id="1" name=""/>
+        <p:cNvGrpSpPr/>
+        <p:nvPr/>
+      </p:nvGrpSpPr>
+      <p:grpSpPr>
+        <a:xfrm>
+          <a:off x="0" y="0"/>
+          <a:ext cx="0" cy="0"/>
+          <a:chOff x="0" y="0"/>
+          <a:chExt cx="0" cy="0"/>
+        </a:xfrm>
+      </p:grpSpPr>
+      <p:pic>
+        <p:nvPicPr>
+          <p:cNvPr id="23" name="Obraz — symbol zastępczy 22" descr="Kobieta przy laptopie uśmiechająca się">
+            <a:extLst>
+              <a:ext uri="{FF2B5EF4-FFF2-40B4-BE49-F238E27FC236}">
+                <a16:creationId xmlns:a16="http://schemas.microsoft.com/office/drawing/2014/main" id="{35E3CE9E-B03C-CB4B-A83A-D3265C7A0545}"/>
+              </a:ext>
+            </a:extLst>
+          </p:cNvPr>
+          <p:cNvPicPr>
+            <a:picLocks noGrp="1" noChangeAspect="1"/>
+          </p:cNvPicPr>
+          <p:nvPr>
+            <p:ph type="pic" sz="quarter" idx="10"/>
+          </p:nvPr>
+        </p:nvPicPr>
+        <p:blipFill>
+          <a:blip r:embed="rId3" cstate="screen">
+            <a:extLst>
+              <a:ext uri="{28A0092B-C50C-407E-A947-70E740481C1C}">
+                <a14:useLocalDpi xmlns:a14="http://schemas.microsoft.com/office/drawing/2010/main"/>
+              </a:ext>
+            </a:extLst>
+          </a:blip>
+          <a:srcRect/>
+          <a:stretch>
+            <a:fillRect/>
+          </a:stretch>
+        </p:blipFill>
+        <p:spPr/>
+      </p:pic>
+      <p:sp>
+        <p:nvSpPr>
+          <p:cNvPr id="3" name="Tytuł 2">
+            <a:extLst>
+              <a:ext uri="{FF2B5EF4-FFF2-40B4-BE49-F238E27FC236}">
+                <a16:creationId xmlns:a16="http://schemas.microsoft.com/office/drawing/2014/main" id="{200B3D2B-613A-41BE-987D-E6A1324B456D}"/>
+              </a:ext>
+            </a:extLst>
+          </p:cNvPr>
+          <p:cNvSpPr>
+            <a:spLocks noGrp="1"/>
+          </p:cNvSpPr>
+          <p:nvPr>
+            <p:ph type="title"/>
+          </p:nvPr>
+        </p:nvSpPr>
+        <p:spPr>
+          <a:xfrm>
+            <a:off x="-1700" y="2624574"/>
+            <a:ext cx="4903599" cy="1160026"/>
+          </a:xfrm>
+        </p:spPr>
+        <p:txBody>
+          <a:bodyPr rtlCol="0"/>
+          <a:lstStyle/>
+          <a:p>
+            <a:pPr rtl="0"/>
+            <a:r>
+              <a:rPr lang="pl-PL" sz="4400" spc="-350" dirty="0"/>
+              <a:t>Niezależna walidacja</a:t>
+            </a:r>
+          </a:p>
+        </p:txBody>
+      </p:sp>
+      <p:sp>
+        <p:nvSpPr>
+          <p:cNvPr id="10" name="Tekst — symbol zastępczy 9">
+            <a:extLst>
+              <a:ext uri="{FF2B5EF4-FFF2-40B4-BE49-F238E27FC236}">
+                <a16:creationId xmlns:a16="http://schemas.microsoft.com/office/drawing/2014/main" id="{2972F17A-D965-40B9-8ABB-C634072DBCC0}"/>
+              </a:ext>
+            </a:extLst>
+          </p:cNvPr>
+          <p:cNvSpPr>
+            <a:spLocks noGrp="1"/>
+          </p:cNvSpPr>
+          <p:nvPr>
+            <p:ph type="body" sz="quarter" idx="13"/>
+          </p:nvPr>
+        </p:nvSpPr>
+        <p:spPr>
+          <a:xfrm>
+            <a:off x="0" y="3784600"/>
+            <a:ext cx="4902200" cy="1426725"/>
+          </a:xfrm>
+        </p:spPr>
+        <p:txBody>
+          <a:bodyPr rtlCol="0"/>
+          <a:lstStyle/>
+          <a:p>
+            <a:r>
+              <a:rPr lang="pl-PL" sz="1600" dirty="0"/>
+              <a:t>Nad budową modelu czuwał niezależny zespół ekspertów, który oceniał jakość stosowanych rozwiązań oraz sugerował zmiany, które doprowadziły do powstania modelu o jak największej wydajności. </a:t>
+            </a:r>
+          </a:p>
+        </p:txBody>
+      </p:sp>
+      <p:sp>
+        <p:nvSpPr>
+          <p:cNvPr id="5" name="Numer slajdu — symbol zastępczy 4">
+            <a:extLst>
+              <a:ext uri="{FF2B5EF4-FFF2-40B4-BE49-F238E27FC236}">
+                <a16:creationId xmlns:a16="http://schemas.microsoft.com/office/drawing/2014/main" id="{F6964141-6F81-4947-A236-746D94ED3F6F}"/>
+              </a:ext>
+            </a:extLst>
+          </p:cNvPr>
+          <p:cNvSpPr>
+            <a:spLocks noGrp="1"/>
+          </p:cNvSpPr>
+          <p:nvPr>
+            <p:ph type="sldNum" sz="quarter" idx="12"/>
+          </p:nvPr>
+        </p:nvSpPr>
+        <p:spPr/>
+        <p:txBody>
+          <a:bodyPr rtlCol="0"/>
+          <a:lstStyle/>
+          <a:p>
+            <a:pPr rtl="0"/>
+            <a:fld id="{19B51A1E-902D-48AF-9020-955120F399B6}" type="slidenum">
+              <a:rPr lang="pl-PL" smtClean="0"/>
+              <a:pPr rtl="0"/>
+              <a:t>11</a:t>
+            </a:fld>
+            <a:endParaRPr lang="pl-PL" dirty="0"/>
+          </a:p>
+        </p:txBody>
+      </p:sp>
+    </p:spTree>
+    <p:extLst>
+      <p:ext uri="{BB962C8B-B14F-4D97-AF65-F5344CB8AC3E}">
+        <p14:creationId xmlns:p14="http://schemas.microsoft.com/office/powerpoint/2010/main" val="2117695413"/>
+      </p:ext>
+    </p:extLst>
+  </p:cSld>
+  <p:clrMapOvr>
+    <a:masterClrMapping/>
+  </p:clrMapOvr>
+</p:sld>
+</file>
+
+<file path=ppt/slides/slide12.xml><?xml version="1.0" encoding="utf-8"?>
+<p:sld xmlns:a="http://schemas.openxmlformats.org/drawingml/2006/main" xmlns:r="http://schemas.openxmlformats.org/officeDocument/2006/relationships" xmlns:p="http://schemas.openxmlformats.org/presentationml/2006/main">
+  <p:cSld>
+    <p:spTree>
+      <p:nvGrpSpPr>
+        <p:cNvPr id="1" name=""/>
+        <p:cNvGrpSpPr/>
+        <p:nvPr/>
+      </p:nvGrpSpPr>
+      <p:grpSpPr>
+        <a:xfrm>
+          <a:off x="0" y="0"/>
+          <a:ext cx="0" cy="0"/>
+          <a:chOff x="0" y="0"/>
+          <a:chExt cx="0" cy="0"/>
+        </a:xfrm>
+      </p:grpSpPr>
+      <p:sp>
+        <p:nvSpPr>
+          <p:cNvPr id="2" name="Tytuł 1">
+            <a:extLst>
+              <a:ext uri="{FF2B5EF4-FFF2-40B4-BE49-F238E27FC236}">
+                <a16:creationId xmlns:a16="http://schemas.microsoft.com/office/drawing/2014/main" id="{623FB4D5-DA14-4F29-9320-2DE0A6B571B9}"/>
+              </a:ext>
+            </a:extLst>
+          </p:cNvPr>
+          <p:cNvSpPr>
+            <a:spLocks noGrp="1"/>
+          </p:cNvSpPr>
+          <p:nvPr>
+            <p:ph type="title"/>
+          </p:nvPr>
+        </p:nvSpPr>
+        <p:spPr/>
+        <p:txBody>
+          <a:bodyPr rtlCol="0"/>
+          <a:lstStyle/>
+          <a:p>
+            <a:pPr rtl="0"/>
+            <a:r>
+              <a:rPr lang="pl-PL" dirty="0"/>
+              <a:t>Potencjalne korzyści</a:t>
+            </a:r>
+          </a:p>
+        </p:txBody>
+      </p:sp>
+      <p:sp>
+        <p:nvSpPr>
+          <p:cNvPr id="9" name="Numer slajdu — symbol zastępczy 8">
+            <a:extLst>
+              <a:ext uri="{FF2B5EF4-FFF2-40B4-BE49-F238E27FC236}">
+                <a16:creationId xmlns:a16="http://schemas.microsoft.com/office/drawing/2014/main" id="{00A34EBD-7DEA-4599-A81B-0A363A0E17FC}"/>
+              </a:ext>
+            </a:extLst>
+          </p:cNvPr>
+          <p:cNvSpPr>
+            <a:spLocks noGrp="1"/>
+          </p:cNvSpPr>
+          <p:nvPr>
+            <p:ph type="sldNum" sz="quarter" idx="33"/>
+          </p:nvPr>
+        </p:nvSpPr>
+        <p:spPr>
+          <a:xfrm>
+            <a:off x="11760000" y="6371351"/>
+            <a:ext cx="432000" cy="432000"/>
+          </a:xfrm>
+        </p:spPr>
+        <p:txBody>
+          <a:bodyPr rtlCol="0"/>
+          <a:lstStyle/>
+          <a:p>
+            <a:pPr rtl="0"/>
+            <a:fld id="{19B51A1E-902D-48AF-9020-955120F399B6}" type="slidenum">
+              <a:rPr lang="pl-PL" smtClean="0"/>
+              <a:pPr rtl="0"/>
+              <a:t>12</a:t>
+            </a:fld>
+            <a:endParaRPr lang="pl-PL" dirty="0"/>
+          </a:p>
+        </p:txBody>
+      </p:sp>
+      <p:sp>
+        <p:nvSpPr>
+          <p:cNvPr id="12" name="Zawartość — symbol zastępczy 4">
+            <a:extLst>
+              <a:ext uri="{FF2B5EF4-FFF2-40B4-BE49-F238E27FC236}">
+                <a16:creationId xmlns:a16="http://schemas.microsoft.com/office/drawing/2014/main" id="{6CC2C337-59AD-4DA9-2A4E-2FC73C7993A9}"/>
+              </a:ext>
+            </a:extLst>
+          </p:cNvPr>
+          <p:cNvSpPr txBox="1">
+            <a:spLocks/>
+          </p:cNvSpPr>
+          <p:nvPr/>
+        </p:nvSpPr>
+        <p:spPr>
+          <a:xfrm>
+            <a:off x="279599" y="1170584"/>
+            <a:ext cx="5494667" cy="4516832"/>
+          </a:xfrm>
+          <a:prstGeom prst="rect">
+            <a:avLst/>
+          </a:prstGeom>
+        </p:spPr>
+        <p:txBody>
+          <a:bodyPr rtlCol="0"/>
+          <a:lstStyle>
+            <a:lvl1pPr marL="266700" indent="-266700" algn="l" defTabSz="914400" rtl="0" eaLnBrk="1" latinLnBrk="0" hangingPunct="1">
+              <a:lnSpc>
+                <a:spcPct val="90000"/>
+              </a:lnSpc>
+              <a:spcBef>
+                <a:spcPts val="1000"/>
+              </a:spcBef>
+              <a:buFont typeface="Arial" panose="020B0604020202020204" pitchFamily="34" charset="0"/>
+              <a:buChar char="•"/>
+              <a:defRPr sz="1800" kern="1200">
+                <a:solidFill>
+                  <a:schemeClr val="tx1">
+                    <a:lumMod val="75000"/>
+                    <a:lumOff val="25000"/>
+                  </a:schemeClr>
+                </a:solidFill>
+                <a:latin typeface="+mn-lt"/>
+                <a:ea typeface="+mn-ea"/>
+                <a:cs typeface="+mn-cs"/>
+              </a:defRPr>
+            </a:lvl1pPr>
+            <a:lvl2pPr marL="542925" indent="-276225" algn="l" defTabSz="914400" rtl="0" eaLnBrk="1" latinLnBrk="0" hangingPunct="1">
+              <a:lnSpc>
+                <a:spcPct val="90000"/>
+              </a:lnSpc>
+              <a:spcBef>
+                <a:spcPts val="500"/>
+              </a:spcBef>
+              <a:buFont typeface="Arial" panose="020B0604020202020204" pitchFamily="34" charset="0"/>
+              <a:buChar char="•"/>
+              <a:defRPr sz="1600" kern="1200">
+                <a:solidFill>
+                  <a:schemeClr val="tx1">
+                    <a:lumMod val="75000"/>
+                    <a:lumOff val="25000"/>
+                  </a:schemeClr>
+                </a:solidFill>
+                <a:latin typeface="+mn-lt"/>
+                <a:ea typeface="+mn-ea"/>
+                <a:cs typeface="+mn-cs"/>
+              </a:defRPr>
+            </a:lvl2pPr>
+            <a:lvl3pPr marL="809625" indent="-266700" algn="l" defTabSz="914400" rtl="0" eaLnBrk="1" latinLnBrk="0" hangingPunct="1">
+              <a:lnSpc>
+                <a:spcPct val="90000"/>
+              </a:lnSpc>
+              <a:spcBef>
+                <a:spcPts val="500"/>
+              </a:spcBef>
+              <a:buFont typeface="Arial" panose="020B0604020202020204" pitchFamily="34" charset="0"/>
+              <a:buChar char="•"/>
+              <a:defRPr sz="1400" kern="1200">
+                <a:solidFill>
+                  <a:schemeClr val="tx1">
+                    <a:lumMod val="75000"/>
+                    <a:lumOff val="25000"/>
+                  </a:schemeClr>
+                </a:solidFill>
+                <a:latin typeface="+mn-lt"/>
+                <a:ea typeface="+mn-ea"/>
+                <a:cs typeface="+mn-cs"/>
+              </a:defRPr>
+            </a:lvl3pPr>
+            <a:lvl4pPr marL="1076325" indent="-266700" algn="l" defTabSz="914400" rtl="0" eaLnBrk="1" latinLnBrk="0" hangingPunct="1">
+              <a:lnSpc>
+                <a:spcPct val="90000"/>
+              </a:lnSpc>
+              <a:spcBef>
+                <a:spcPts val="500"/>
+              </a:spcBef>
+              <a:buFont typeface="Arial" panose="020B0604020202020204" pitchFamily="34" charset="0"/>
+              <a:buChar char="•"/>
+              <a:defRPr sz="1400" kern="1200">
+                <a:solidFill>
+                  <a:schemeClr val="tx1">
+                    <a:lumMod val="75000"/>
+                    <a:lumOff val="25000"/>
+                  </a:schemeClr>
+                </a:solidFill>
+                <a:latin typeface="+mn-lt"/>
+                <a:ea typeface="+mn-ea"/>
+                <a:cs typeface="+mn-cs"/>
+              </a:defRPr>
+            </a:lvl4pPr>
+            <a:lvl5pPr marL="1343025" indent="-266700" algn="l" defTabSz="914400" rtl="0" eaLnBrk="1" latinLnBrk="0" hangingPunct="1">
+              <a:lnSpc>
+                <a:spcPct val="90000"/>
+              </a:lnSpc>
+              <a:spcBef>
+                <a:spcPts val="500"/>
+              </a:spcBef>
+              <a:buFont typeface="Arial" panose="020B0604020202020204" pitchFamily="34" charset="0"/>
+              <a:buChar char="•"/>
+              <a:defRPr sz="1400" kern="1200">
+                <a:solidFill>
+                  <a:schemeClr val="tx1">
+                    <a:lumMod val="75000"/>
+                    <a:lumOff val="25000"/>
+                  </a:schemeClr>
+                </a:solidFill>
+                <a:latin typeface="+mn-lt"/>
+                <a:ea typeface="+mn-ea"/>
+                <a:cs typeface="+mn-cs"/>
+              </a:defRPr>
+            </a:lvl5pPr>
+            <a:lvl6pPr marL="2514600" indent="-228600" algn="l" defTabSz="914400" rtl="0" eaLnBrk="1" latinLnBrk="0" hangingPunct="1">
+              <a:lnSpc>
+                <a:spcPct val="90000"/>
+              </a:lnSpc>
+              <a:spcBef>
+                <a:spcPts val="500"/>
+              </a:spcBef>
+              <a:buFont typeface="Arial" panose="020B0604020202020204" pitchFamily="34" charset="0"/>
+              <a:buChar char="•"/>
+              <a:defRPr sz="1800" kern="1200">
+                <a:solidFill>
+                  <a:schemeClr val="tx1"/>
+                </a:solidFill>
+                <a:latin typeface="+mn-lt"/>
+                <a:ea typeface="+mn-ea"/>
+                <a:cs typeface="+mn-cs"/>
+              </a:defRPr>
+            </a:lvl6pPr>
+            <a:lvl7pPr marL="2971800" indent="-228600" algn="l" defTabSz="914400" rtl="0" eaLnBrk="1" latinLnBrk="0" hangingPunct="1">
+              <a:lnSpc>
+                <a:spcPct val="90000"/>
+              </a:lnSpc>
+              <a:spcBef>
+                <a:spcPts val="500"/>
+              </a:spcBef>
+              <a:buFont typeface="Arial" panose="020B0604020202020204" pitchFamily="34" charset="0"/>
+              <a:buChar char="•"/>
+              <a:defRPr sz="1800" kern="1200">
+                <a:solidFill>
+                  <a:schemeClr val="tx1"/>
+                </a:solidFill>
+                <a:latin typeface="+mn-lt"/>
+                <a:ea typeface="+mn-ea"/>
+                <a:cs typeface="+mn-cs"/>
+              </a:defRPr>
+            </a:lvl7pPr>
+            <a:lvl8pPr marL="3429000" indent="-228600" algn="l" defTabSz="914400" rtl="0" eaLnBrk="1" latinLnBrk="0" hangingPunct="1">
+              <a:lnSpc>
+                <a:spcPct val="90000"/>
+              </a:lnSpc>
+              <a:spcBef>
+                <a:spcPts val="500"/>
+              </a:spcBef>
+              <a:buFont typeface="Arial" panose="020B0604020202020204" pitchFamily="34" charset="0"/>
+              <a:buChar char="•"/>
+              <a:defRPr sz="1800" kern="1200">
+                <a:solidFill>
+                  <a:schemeClr val="tx1"/>
+                </a:solidFill>
+                <a:latin typeface="+mn-lt"/>
+                <a:ea typeface="+mn-ea"/>
+                <a:cs typeface="+mn-cs"/>
+              </a:defRPr>
+            </a:lvl8pPr>
+            <a:lvl9pPr marL="3886200" indent="-228600" algn="l" defTabSz="914400" rtl="0" eaLnBrk="1" latinLnBrk="0" hangingPunct="1">
+              <a:lnSpc>
+                <a:spcPct val="90000"/>
+              </a:lnSpc>
+              <a:spcBef>
+                <a:spcPts val="500"/>
+              </a:spcBef>
+              <a:buFont typeface="Arial" panose="020B0604020202020204" pitchFamily="34" charset="0"/>
+              <a:buChar char="•"/>
+              <a:defRPr sz="1800" kern="1200">
+                <a:solidFill>
+                  <a:schemeClr val="tx1"/>
+                </a:solidFill>
+                <a:latin typeface="+mn-lt"/>
+                <a:ea typeface="+mn-ea"/>
+                <a:cs typeface="+mn-cs"/>
+              </a:defRPr>
+            </a:lvl9pPr>
+          </a:lstStyle>
+          <a:p>
+            <a:r>
+              <a:rPr lang="pl-PL" b="1" dirty="0"/>
+              <a:t>Lepsze dopasowanie ofert</a:t>
+            </a:r>
+            <a:br>
+              <a:rPr lang="pl-PL" dirty="0"/>
+            </a:br>
+            <a:r>
+              <a:rPr lang="pl-PL" dirty="0"/>
+              <a:t>– Możliwość tworzenia dedykowanych kampanii marketingowych dla każdego klastra.</a:t>
+            </a:r>
+            <a:br>
+              <a:rPr lang="pl-PL" dirty="0"/>
+            </a:br>
+            <a:r>
+              <a:rPr lang="pl-PL" dirty="0"/>
+              <a:t>– Wyższe zainteresowanie produktami finansowymi dzięki personalizacji.</a:t>
+            </a:r>
+          </a:p>
+          <a:p>
+            <a:r>
+              <a:rPr lang="pl-PL" b="1" dirty="0"/>
+              <a:t>Większa skuteczność kampanii</a:t>
+            </a:r>
+            <a:br>
+              <a:rPr lang="pl-PL" dirty="0"/>
+            </a:br>
+            <a:r>
+              <a:rPr lang="pl-PL" dirty="0"/>
+              <a:t>– Lepsze </a:t>
+            </a:r>
+            <a:r>
+              <a:rPr lang="pl-PL" dirty="0" err="1"/>
+              <a:t>targetowanie</a:t>
+            </a:r>
+            <a:r>
+              <a:rPr lang="pl-PL" dirty="0"/>
+              <a:t> → niższe koszty reklamy i wyższy współczynnik konwersji.</a:t>
+            </a:r>
+          </a:p>
+          <a:p>
+            <a:r>
+              <a:rPr lang="pl-PL" b="1" dirty="0"/>
+              <a:t>Wzrost lojalności klientów</a:t>
+            </a:r>
+            <a:br>
+              <a:rPr lang="pl-PL" dirty="0"/>
+            </a:br>
+            <a:r>
+              <a:rPr lang="pl-PL" dirty="0"/>
+              <a:t>– Klienci czują się lepiej zrozumiani i bardziej związani z marką.</a:t>
+            </a:r>
+          </a:p>
+          <a:p>
+            <a:r>
+              <a:rPr lang="pl-PL" b="1"/>
+              <a:t>Efektywniejsze </a:t>
+            </a:r>
+            <a:r>
+              <a:rPr lang="pl-PL" b="1" dirty="0"/>
+              <a:t>zarządzanie ryzykiem</a:t>
+            </a:r>
+            <a:br>
+              <a:rPr lang="pl-PL" dirty="0"/>
+            </a:br>
+            <a:r>
+              <a:rPr lang="pl-PL" dirty="0"/>
+              <a:t>– Możliwość oceny profilu ryzyka dla każdej grupy – np. klaster 2 może wymagać ostrożniejszych ofert.</a:t>
+            </a:r>
+          </a:p>
+        </p:txBody>
+      </p:sp>
+      <p:pic>
+        <p:nvPicPr>
+          <p:cNvPr id="7" name="Obraz 6">
+            <a:extLst>
+              <a:ext uri="{FF2B5EF4-FFF2-40B4-BE49-F238E27FC236}">
+                <a16:creationId xmlns:a16="http://schemas.microsoft.com/office/drawing/2014/main" id="{0D4FF252-57FF-8CCD-420B-601DEABDDED2}"/>
+              </a:ext>
+            </a:extLst>
+          </p:cNvPr>
+          <p:cNvPicPr>
+            <a:picLocks noChangeAspect="1"/>
+          </p:cNvPicPr>
+          <p:nvPr/>
+        </p:nvPicPr>
+        <p:blipFill>
+          <a:blip r:embed="rId3"/>
+          <a:stretch>
+            <a:fillRect/>
+          </a:stretch>
+        </p:blipFill>
+        <p:spPr>
+          <a:xfrm>
+            <a:off x="5918200" y="2180362"/>
+            <a:ext cx="5994201" cy="3575913"/>
+          </a:xfrm>
+          <a:prstGeom prst="rect">
+            <a:avLst/>
+          </a:prstGeom>
+        </p:spPr>
+      </p:pic>
+    </p:spTree>
+    <p:extLst>
+      <p:ext uri="{BB962C8B-B14F-4D97-AF65-F5344CB8AC3E}">
+        <p14:creationId xmlns:p14="http://schemas.microsoft.com/office/powerpoint/2010/main" val="25800700"/>
+      </p:ext>
+    </p:extLst>
+  </p:cSld>
+  <p:clrMapOvr>
+    <a:masterClrMapping/>
+  </p:clrMapOvr>
+</p:sld>
+</file>
+
+<file path=ppt/slides/slide13.xml><?xml version="1.0" encoding="utf-8"?>
+<p:sld xmlns:a="http://schemas.openxmlformats.org/drawingml/2006/main" xmlns:r="http://schemas.openxmlformats.org/officeDocument/2006/relationships" xmlns:p="http://schemas.openxmlformats.org/presentationml/2006/main">
+  <p:cSld>
+    <p:spTree>
+      <p:nvGrpSpPr>
+        <p:cNvPr id="1" name=""/>
+        <p:cNvGrpSpPr/>
+        <p:nvPr/>
+      </p:nvGrpSpPr>
+      <p:grpSpPr>
+        <a:xfrm>
+          <a:off x="0" y="0"/>
+          <a:ext cx="0" cy="0"/>
+          <a:chOff x="0" y="0"/>
+          <a:chExt cx="0" cy="0"/>
+        </a:xfrm>
+      </p:grpSpPr>
+      <p:pic>
+        <p:nvPicPr>
+          <p:cNvPr id="32" name="Obraz — symbol zastępczy 31" descr="klaszczące ręce">
+            <a:extLst>
+              <a:ext uri="{FF2B5EF4-FFF2-40B4-BE49-F238E27FC236}">
+                <a16:creationId xmlns:a16="http://schemas.microsoft.com/office/drawing/2014/main" id="{AAB6EE12-FEF8-FB41-A909-0DA61D7725C7}"/>
+              </a:ext>
+            </a:extLst>
+          </p:cNvPr>
+          <p:cNvPicPr>
+            <a:picLocks noGrp="1" noChangeAspect="1"/>
+          </p:cNvPicPr>
+          <p:nvPr>
+            <p:ph type="pic" sz="quarter" idx="10"/>
+          </p:nvPr>
+        </p:nvPicPr>
+        <p:blipFill>
+          <a:blip r:embed="rId3" cstate="screen">
+            <a:extLst>
+              <a:ext uri="{28A0092B-C50C-407E-A947-70E740481C1C}">
+                <a14:useLocalDpi xmlns:a14="http://schemas.microsoft.com/office/drawing/2010/main"/>
+              </a:ext>
+            </a:extLst>
+          </a:blip>
+          <a:srcRect/>
+          <a:stretch>
+            <a:fillRect/>
+          </a:stretch>
+        </p:blipFill>
+        <p:spPr/>
+      </p:pic>
+      <p:sp>
+        <p:nvSpPr>
+          <p:cNvPr id="14" name="Tytuł 13">
+            <a:extLst>
+              <a:ext uri="{FF2B5EF4-FFF2-40B4-BE49-F238E27FC236}">
+                <a16:creationId xmlns:a16="http://schemas.microsoft.com/office/drawing/2014/main" id="{6C38D7A9-9299-4108-BB08-026F4B9CAE7B}"/>
+              </a:ext>
+            </a:extLst>
+          </p:cNvPr>
+          <p:cNvSpPr>
+            <a:spLocks noGrp="1"/>
+          </p:cNvSpPr>
+          <p:nvPr>
+            <p:ph type="ctrTitle"/>
+          </p:nvPr>
+        </p:nvSpPr>
+        <p:spPr/>
+        <p:txBody>
+          <a:bodyPr rtlCol="0"/>
+          <a:lstStyle/>
+          <a:p>
+            <a:pPr rtl="0"/>
+            <a:r>
+              <a:rPr lang="pl-PL" dirty="0"/>
+              <a:t>Dziękujemy!</a:t>
+            </a:r>
+          </a:p>
+        </p:txBody>
+      </p:sp>
+      <p:sp>
+        <p:nvSpPr>
+          <p:cNvPr id="12" name="Numer slajdu — symbol zastępczy 11">
+            <a:extLst>
+              <a:ext uri="{FF2B5EF4-FFF2-40B4-BE49-F238E27FC236}">
+                <a16:creationId xmlns:a16="http://schemas.microsoft.com/office/drawing/2014/main" id="{91814EC9-246A-4C6E-941E-5774FE72F08E}"/>
+              </a:ext>
+            </a:extLst>
+          </p:cNvPr>
+          <p:cNvSpPr>
+            <a:spLocks noGrp="1"/>
+          </p:cNvSpPr>
+          <p:nvPr>
+            <p:ph type="sldNum" sz="quarter" idx="20"/>
+          </p:nvPr>
+        </p:nvSpPr>
+        <p:spPr/>
+        <p:txBody>
+          <a:bodyPr rtlCol="0"/>
+          <a:lstStyle/>
+          <a:p>
+            <a:pPr rtl="0"/>
+            <a:fld id="{19B51A1E-902D-48AF-9020-955120F399B6}" type="slidenum">
+              <a:rPr lang="pl-PL" smtClean="0"/>
+              <a:pPr rtl="0"/>
+              <a:t>13</a:t>
+            </a:fld>
+            <a:endParaRPr lang="pl-PL" dirty="0"/>
+          </a:p>
+        </p:txBody>
+      </p:sp>
+    </p:spTree>
+    <p:extLst>
+      <p:ext uri="{BB962C8B-B14F-4D97-AF65-F5344CB8AC3E}">
+        <p14:creationId xmlns:p14="http://schemas.microsoft.com/office/powerpoint/2010/main" val="4153678306"/>
+      </p:ext>
+    </p:extLst>
+  </p:cSld>
+  <p:clrMapOvr>
+    <a:masterClrMapping/>
+  </p:clrMapOvr>
+</p:sld>
+</file>
+
+<file path=ppt/slides/slide2.xml><?xml version="1.0" encoding="utf-8"?>
+<p:sld xmlns:a="http://schemas.openxmlformats.org/drawingml/2006/main" xmlns:r="http://schemas.openxmlformats.org/officeDocument/2006/relationships" xmlns:p="http://schemas.openxmlformats.org/presentationml/2006/main">
+  <p:cSld>
+    <p:spTree>
+      <p:nvGrpSpPr>
+        <p:cNvPr id="1" name=""/>
+        <p:cNvGrpSpPr/>
+        <p:nvPr/>
+      </p:nvGrpSpPr>
+      <p:grpSpPr>
+        <a:xfrm>
+          <a:off x="0" y="0"/>
+          <a:ext cx="0" cy="0"/>
+          <a:chOff x="0" y="0"/>
+          <a:chExt cx="0" cy="0"/>
+        </a:xfrm>
+      </p:grpSpPr>
+      <p:sp>
+        <p:nvSpPr>
+          <p:cNvPr id="4" name="Zawartość — symbol zastępczy 3">
+            <a:extLst>
+              <a:ext uri="{FF2B5EF4-FFF2-40B4-BE49-F238E27FC236}">
+                <a16:creationId xmlns:a16="http://schemas.microsoft.com/office/drawing/2014/main" id="{D355C61F-C8F1-4977-8E1F-F16C0D9EA88C}"/>
+              </a:ext>
+            </a:extLst>
+          </p:cNvPr>
+          <p:cNvSpPr>
+            <a:spLocks noGrp="1"/>
+          </p:cNvSpPr>
+          <p:nvPr>
+            <p:ph sz="half" idx="1"/>
+          </p:nvPr>
+        </p:nvSpPr>
+        <p:spPr>
+          <a:xfrm>
+            <a:off x="432000" y="746061"/>
+            <a:ext cx="5472000" cy="2999426"/>
+          </a:xfrm>
+        </p:spPr>
+        <p:txBody>
+          <a:bodyPr rtlCol="0"/>
+          <a:lstStyle/>
+          <a:p>
+            <a:r>
+              <a:rPr lang="pl-PL" sz="2400" dirty="0"/>
+              <a:t>Konieczność efektywnego segmentowania rynku klientów korzystających z pożyczek w celu zwiększenia skuteczności kampanii marketingowych.</a:t>
+            </a:r>
+          </a:p>
+          <a:p>
+            <a:r>
+              <a:rPr lang="pl-PL" sz="2400" dirty="0"/>
+              <a:t>Zrozumienie potrzeb i preferencji poszczególnych segmentów klientów, co umożliwi bardziej precyzyjne dostosowanie ofert reklamowych.</a:t>
+            </a:r>
+          </a:p>
+        </p:txBody>
+      </p:sp>
+      <p:pic>
+        <p:nvPicPr>
+          <p:cNvPr id="9" name="Obraz — symbol zastępczy 8" descr="Ręce dotykające telefonu komórkowego">
+            <a:extLst>
+              <a:ext uri="{FF2B5EF4-FFF2-40B4-BE49-F238E27FC236}">
+                <a16:creationId xmlns:a16="http://schemas.microsoft.com/office/drawing/2014/main" id="{A9A75888-22E3-1D43-9112-DA02186070B5}"/>
+              </a:ext>
+            </a:extLst>
+          </p:cNvPr>
+          <p:cNvPicPr>
+            <a:picLocks noGrp="1" noChangeAspect="1"/>
+          </p:cNvPicPr>
+          <p:nvPr>
+            <p:ph type="pic" sz="quarter" idx="14"/>
+          </p:nvPr>
+        </p:nvPicPr>
+        <p:blipFill>
+          <a:blip r:embed="rId3" cstate="screen">
+            <a:extLst>
+              <a:ext uri="{28A0092B-C50C-407E-A947-70E740481C1C}">
+                <a14:useLocalDpi xmlns:a14="http://schemas.microsoft.com/office/drawing/2010/main"/>
+              </a:ext>
+            </a:extLst>
+          </a:blip>
+          <a:srcRect/>
+          <a:stretch>
+            <a:fillRect/>
+          </a:stretch>
+        </p:blipFill>
+        <p:spPr/>
+      </p:pic>
+      <p:sp>
+        <p:nvSpPr>
+          <p:cNvPr id="20" name="Prostokąt 19" descr="Blok z akcentem">
+            <a:extLst>
+              <a:ext uri="{FF2B5EF4-FFF2-40B4-BE49-F238E27FC236}">
+                <a16:creationId xmlns:a16="http://schemas.microsoft.com/office/drawing/2014/main" id="{EFA08948-2B6F-46B1-9D2D-8D7B2B3FBD56}"/>
+              </a:ext>
+              <a:ext uri="{C183D7F6-B498-43B3-948B-1728B52AA6E4}">
+                <adec:decorative xmlns:adec="http://schemas.microsoft.com/office/drawing/2017/decorative" val="1"/>
+              </a:ext>
+            </a:extLst>
+          </p:cNvPr>
+          <p:cNvSpPr/>
+          <p:nvPr/>
+        </p:nvSpPr>
+        <p:spPr>
+          <a:xfrm>
+            <a:off x="9348588" y="3688075"/>
+            <a:ext cx="2411412" cy="114824"/>
+          </a:xfrm>
+          <a:prstGeom prst="rect">
+            <a:avLst/>
+          </a:prstGeom>
+          <a:solidFill>
+            <a:schemeClr val="accent1"/>
+          </a:solidFill>
+          <a:ln>
+            <a:noFill/>
+          </a:ln>
+        </p:spPr>
+        <p:style>
+          <a:lnRef idx="2">
+            <a:schemeClr val="accent1">
+              <a:shade val="50000"/>
+            </a:schemeClr>
+          </a:lnRef>
+          <a:fillRef idx="1">
+            <a:schemeClr val="accent1"/>
+          </a:fillRef>
+          <a:effectRef idx="0">
+            <a:schemeClr val="accent1"/>
+          </a:effectRef>
+          <a:fontRef idx="minor">
+            <a:schemeClr val="lt1"/>
+          </a:fontRef>
+        </p:style>
+        <p:txBody>
+          <a:bodyPr rtlCol="0" anchor="ctr"/>
+          <a:lstStyle/>
+          <a:p>
+            <a:pPr algn="l" rtl="0"/>
+            <a:endParaRPr lang="pl-PL" dirty="0"/>
+          </a:p>
+        </p:txBody>
+      </p:sp>
+      <p:sp>
+        <p:nvSpPr>
+          <p:cNvPr id="2" name="Tytuł 1">
+            <a:extLst>
+              <a:ext uri="{FF2B5EF4-FFF2-40B4-BE49-F238E27FC236}">
+                <a16:creationId xmlns:a16="http://schemas.microsoft.com/office/drawing/2014/main" id="{3560F281-4FF6-4617-A809-AC9C15ECF18A}"/>
+              </a:ext>
+            </a:extLst>
+          </p:cNvPr>
+          <p:cNvSpPr>
+            <a:spLocks noGrp="1"/>
+          </p:cNvSpPr>
+          <p:nvPr>
+            <p:ph type="title"/>
+          </p:nvPr>
+        </p:nvSpPr>
+        <p:spPr/>
+        <p:txBody>
+          <a:bodyPr rtlCol="0"/>
+          <a:lstStyle/>
+          <a:p>
+            <a:r>
+              <a:rPr lang="pl-PL" sz="4400" dirty="0"/>
+              <a:t>Problem biznesowy</a:t>
+            </a:r>
+          </a:p>
+        </p:txBody>
+      </p:sp>
+      <p:sp>
+        <p:nvSpPr>
+          <p:cNvPr id="3" name="Tekst — symbol zastępczy 2">
+            <a:extLst>
+              <a:ext uri="{FF2B5EF4-FFF2-40B4-BE49-F238E27FC236}">
+                <a16:creationId xmlns:a16="http://schemas.microsoft.com/office/drawing/2014/main" id="{611DC577-0A95-47D0-95D9-5F8DA763D46B}"/>
+              </a:ext>
+            </a:extLst>
+          </p:cNvPr>
+          <p:cNvSpPr>
+            <a:spLocks noGrp="1"/>
+          </p:cNvSpPr>
+          <p:nvPr>
+            <p:ph type="body" sz="quarter" idx="32"/>
+          </p:nvPr>
+        </p:nvSpPr>
+        <p:spPr/>
+        <p:txBody>
+          <a:bodyPr rtlCol="0"/>
+          <a:lstStyle/>
+          <a:p>
+            <a:pPr rtl="0"/>
+            <a:r>
+              <a:rPr lang="pl-PL" dirty="0"/>
+              <a:t>Jak lepiej targetować odbiorców reklam związanych z sektorem finansowym?</a:t>
+            </a:r>
+          </a:p>
+        </p:txBody>
+      </p:sp>
+      <p:sp>
+        <p:nvSpPr>
+          <p:cNvPr id="6" name="Numer slajdu — symbol zastępczy 5">
+            <a:extLst>
+              <a:ext uri="{FF2B5EF4-FFF2-40B4-BE49-F238E27FC236}">
+                <a16:creationId xmlns:a16="http://schemas.microsoft.com/office/drawing/2014/main" id="{1C554D9F-1895-486E-BFBA-905BB2D29E08}"/>
+              </a:ext>
+            </a:extLst>
+          </p:cNvPr>
+          <p:cNvSpPr>
+            <a:spLocks noGrp="1"/>
+          </p:cNvSpPr>
+          <p:nvPr>
+            <p:ph type="sldNum" sz="quarter" idx="33"/>
+          </p:nvPr>
+        </p:nvSpPr>
+        <p:spPr/>
+        <p:txBody>
+          <a:bodyPr rtlCol="0"/>
+          <a:lstStyle/>
+          <a:p>
+            <a:pPr rtl="0"/>
+            <a:fld id="{19B51A1E-902D-48AF-9020-955120F399B6}" type="slidenum">
+              <a:rPr lang="pl-PL" smtClean="0"/>
+              <a:pPr/>
+              <a:t>2</a:t>
+            </a:fld>
+            <a:endParaRPr lang="pl-PL" dirty="0"/>
+          </a:p>
+        </p:txBody>
+      </p:sp>
+    </p:spTree>
+    <p:extLst>
+      <p:ext uri="{BB962C8B-B14F-4D97-AF65-F5344CB8AC3E}">
+        <p14:creationId xmlns:p14="http://schemas.microsoft.com/office/powerpoint/2010/main" val="1329746698"/>
+      </p:ext>
+    </p:extLst>
+  </p:cSld>
+  <p:clrMapOvr>
+    <a:masterClrMapping/>
+  </p:clrMapOvr>
+</p:sld>
+</file>
+
+<file path=ppt/slides/slide3.xml><?xml version="1.0" encoding="utf-8"?>
+<p:sld xmlns:a="http://schemas.openxmlformats.org/drawingml/2006/main" xmlns:r="http://schemas.openxmlformats.org/officeDocument/2006/relationships" xmlns:p="http://schemas.openxmlformats.org/presentationml/2006/main">
+  <p:cSld>
+    <p:spTree>
+      <p:nvGrpSpPr>
+        <p:cNvPr id="1" name=""/>
+        <p:cNvGrpSpPr/>
+        <p:nvPr/>
+      </p:nvGrpSpPr>
+      <p:grpSpPr>
+        <a:xfrm>
+          <a:off x="0" y="0"/>
+          <a:ext cx="0" cy="0"/>
+          <a:chOff x="0" y="0"/>
+          <a:chExt cx="0" cy="0"/>
+        </a:xfrm>
+      </p:grpSpPr>
+      <p:pic>
+        <p:nvPicPr>
+          <p:cNvPr id="14" name="Obraz — symbol zastępczy 13" descr="Dłoń pisząca na karteczce do przyklejania">
+            <a:extLst>
+              <a:ext uri="{FF2B5EF4-FFF2-40B4-BE49-F238E27FC236}">
+                <a16:creationId xmlns:a16="http://schemas.microsoft.com/office/drawing/2014/main" id="{7E468295-904F-0743-AD06-67DA21353B9E}"/>
+              </a:ext>
+            </a:extLst>
+          </p:cNvPr>
+          <p:cNvPicPr>
+            <a:picLocks noGrp="1" noChangeAspect="1"/>
+          </p:cNvPicPr>
+          <p:nvPr>
+            <p:ph type="pic" sz="quarter" idx="14"/>
+          </p:nvPr>
+        </p:nvPicPr>
+        <p:blipFill rotWithShape="1">
+          <a:blip r:embed="rId3" cstate="screen">
+            <a:extLst>
+              <a:ext uri="{28A0092B-C50C-407E-A947-70E740481C1C}">
+                <a14:useLocalDpi xmlns:a14="http://schemas.microsoft.com/office/drawing/2010/main"/>
+              </a:ext>
+            </a:extLst>
+          </a:blip>
+          <a:srcRect/>
+          <a:stretch/>
+        </p:blipFill>
+        <p:spPr>
+          <a:xfrm>
+            <a:off x="0" y="-1"/>
+            <a:ext cx="6096000" cy="6371351"/>
+          </a:xfrm>
+        </p:spPr>
+      </p:pic>
+      <p:sp>
+        <p:nvSpPr>
+          <p:cNvPr id="20" name="Prostokąt 19" descr="Blok z akcentem">
+            <a:extLst>
+              <a:ext uri="{FF2B5EF4-FFF2-40B4-BE49-F238E27FC236}">
+                <a16:creationId xmlns:a16="http://schemas.microsoft.com/office/drawing/2014/main" id="{EFA08948-2B6F-46B1-9D2D-8D7B2B3FBD56}"/>
+              </a:ext>
+              <a:ext uri="{C183D7F6-B498-43B3-948B-1728B52AA6E4}">
+                <adec:decorative xmlns:adec="http://schemas.microsoft.com/office/drawing/2017/decorative" val="1"/>
+              </a:ext>
+            </a:extLst>
+          </p:cNvPr>
+          <p:cNvSpPr/>
+          <p:nvPr/>
+        </p:nvSpPr>
+        <p:spPr>
+          <a:xfrm>
+            <a:off x="9775824" y="1762069"/>
+            <a:ext cx="1984175" cy="114824"/>
+          </a:xfrm>
+          <a:prstGeom prst="rect">
+            <a:avLst/>
+          </a:prstGeom>
+          <a:solidFill>
+            <a:schemeClr val="accent1"/>
+          </a:solidFill>
+          <a:ln>
+            <a:noFill/>
+          </a:ln>
+        </p:spPr>
+        <p:style>
+          <a:lnRef idx="2">
+            <a:schemeClr val="accent1">
+              <a:shade val="50000"/>
+            </a:schemeClr>
+          </a:lnRef>
+          <a:fillRef idx="1">
+            <a:schemeClr val="accent1"/>
+          </a:fillRef>
+          <a:effectRef idx="0">
+            <a:schemeClr val="accent1"/>
+          </a:effectRef>
+          <a:fontRef idx="minor">
+            <a:schemeClr val="lt1"/>
+          </a:fontRef>
+        </p:style>
+        <p:txBody>
+          <a:bodyPr rtlCol="0" anchor="ctr"/>
+          <a:lstStyle/>
+          <a:p>
+            <a:pPr algn="l" rtl="0"/>
+            <a:endParaRPr lang="pl-PL" dirty="0"/>
+          </a:p>
+        </p:txBody>
+      </p:sp>
+      <p:sp>
+        <p:nvSpPr>
+          <p:cNvPr id="2" name="Tytuł 1">
+            <a:extLst>
+              <a:ext uri="{FF2B5EF4-FFF2-40B4-BE49-F238E27FC236}">
+                <a16:creationId xmlns:a16="http://schemas.microsoft.com/office/drawing/2014/main" id="{3560F281-4FF6-4617-A809-AC9C15ECF18A}"/>
+              </a:ext>
+            </a:extLst>
+          </p:cNvPr>
+          <p:cNvSpPr>
+            <a:spLocks noGrp="1"/>
+          </p:cNvSpPr>
+          <p:nvPr>
+            <p:ph type="title"/>
+          </p:nvPr>
+        </p:nvSpPr>
+        <p:spPr>
+          <a:xfrm>
+            <a:off x="5118100" y="1869795"/>
+            <a:ext cx="6641900" cy="1124345"/>
+          </a:xfrm>
+        </p:spPr>
+        <p:txBody>
+          <a:bodyPr rtlCol="0"/>
+          <a:lstStyle/>
+          <a:p>
+            <a:pPr rtl="0"/>
+            <a:r>
+              <a:rPr lang="pl-PL" sz="4400" dirty="0"/>
+              <a:t>Model segmentacji klientów</a:t>
+            </a:r>
+          </a:p>
+        </p:txBody>
+      </p:sp>
+      <p:sp>
+        <p:nvSpPr>
+          <p:cNvPr id="3" name="Tekst — symbol zastępczy 2">
+            <a:extLst>
+              <a:ext uri="{FF2B5EF4-FFF2-40B4-BE49-F238E27FC236}">
+                <a16:creationId xmlns:a16="http://schemas.microsoft.com/office/drawing/2014/main" id="{611DC577-0A95-47D0-95D9-5F8DA763D46B}"/>
+              </a:ext>
+            </a:extLst>
+          </p:cNvPr>
+          <p:cNvSpPr>
+            <a:spLocks noGrp="1"/>
+          </p:cNvSpPr>
+          <p:nvPr>
+            <p:ph type="body" sz="quarter" idx="32"/>
+          </p:nvPr>
+        </p:nvSpPr>
+        <p:spPr/>
+        <p:txBody>
+          <a:bodyPr rtlCol="0"/>
+          <a:lstStyle/>
+          <a:p>
+            <a:pPr rtl="0"/>
+            <a:r>
+              <a:rPr lang="pl-PL" dirty="0"/>
+              <a:t>W celu rozpoznania grup docelowych reklam</a:t>
+            </a:r>
+          </a:p>
+        </p:txBody>
+      </p:sp>
+      <p:sp>
+        <p:nvSpPr>
+          <p:cNvPr id="4" name="Zawartość — symbol zastępczy 3">
+            <a:extLst>
+              <a:ext uri="{FF2B5EF4-FFF2-40B4-BE49-F238E27FC236}">
+                <a16:creationId xmlns:a16="http://schemas.microsoft.com/office/drawing/2014/main" id="{D355C61F-C8F1-4977-8E1F-F16C0D9EA88C}"/>
+              </a:ext>
+            </a:extLst>
+          </p:cNvPr>
+          <p:cNvSpPr>
+            <a:spLocks noGrp="1"/>
+          </p:cNvSpPr>
+          <p:nvPr>
+            <p:ph sz="half" idx="1"/>
+          </p:nvPr>
+        </p:nvSpPr>
+        <p:spPr/>
+        <p:txBody>
+          <a:bodyPr rtlCol="0"/>
+          <a:lstStyle/>
+          <a:p>
+            <a:pPr marL="0" indent="0">
+              <a:buNone/>
+            </a:pPr>
+            <a:r>
+              <a:rPr lang="pl-PL" sz="2400" dirty="0"/>
+              <a:t>Wykorzystuje dane klientów dotyczące wysokości dochodu, stanu własnościowego miejsca zamieszkania, zawodu, oceny kredytowej, wskaźnika zadłużenia, wysokości raty, kwoty pożyczki i inne.</a:t>
+            </a:r>
+            <a:endParaRPr lang="pl-PL" sz="1600" dirty="0"/>
+          </a:p>
+        </p:txBody>
+      </p:sp>
+      <p:sp>
+        <p:nvSpPr>
+          <p:cNvPr id="6" name="Numer slajdu — symbol zastępczy 5">
+            <a:extLst>
+              <a:ext uri="{FF2B5EF4-FFF2-40B4-BE49-F238E27FC236}">
+                <a16:creationId xmlns:a16="http://schemas.microsoft.com/office/drawing/2014/main" id="{1C554D9F-1895-486E-BFBA-905BB2D29E08}"/>
+              </a:ext>
+            </a:extLst>
+          </p:cNvPr>
+          <p:cNvSpPr>
+            <a:spLocks noGrp="1"/>
+          </p:cNvSpPr>
+          <p:nvPr>
+            <p:ph type="sldNum" sz="quarter" idx="33"/>
+          </p:nvPr>
+        </p:nvSpPr>
+        <p:spPr/>
+        <p:txBody>
+          <a:bodyPr rtlCol="0"/>
+          <a:lstStyle/>
+          <a:p>
+            <a:pPr rtl="0"/>
+            <a:fld id="{19B51A1E-902D-48AF-9020-955120F399B6}" type="slidenum">
+              <a:rPr lang="pl-PL" smtClean="0"/>
+              <a:pPr/>
+              <a:t>3</a:t>
+            </a:fld>
+            <a:endParaRPr lang="pl-PL" dirty="0"/>
+          </a:p>
+        </p:txBody>
+      </p:sp>
+    </p:spTree>
+    <p:extLst>
+      <p:ext uri="{BB962C8B-B14F-4D97-AF65-F5344CB8AC3E}">
+        <p14:creationId xmlns:p14="http://schemas.microsoft.com/office/powerpoint/2010/main" val="722098795"/>
+      </p:ext>
+    </p:extLst>
+  </p:cSld>
+  <p:clrMapOvr>
+    <a:masterClrMapping/>
+  </p:clrMapOvr>
+</p:sld>
+</file>
+
+<file path=ppt/slides/slide4.xml><?xml version="1.0" encoding="utf-8"?>
+<p:sld xmlns:a="http://schemas.openxmlformats.org/drawingml/2006/main" xmlns:r="http://schemas.openxmlformats.org/officeDocument/2006/relationships" xmlns:p="http://schemas.openxmlformats.org/presentationml/2006/main">
+  <p:cSld>
+    <p:spTree>
+      <p:nvGrpSpPr>
+        <p:cNvPr id="1" name="">
+          <a:extLst>
+            <a:ext uri="{FF2B5EF4-FFF2-40B4-BE49-F238E27FC236}">
+              <a16:creationId xmlns:a16="http://schemas.microsoft.com/office/drawing/2014/main" id="{852C6D64-DEBC-2C50-0DEF-1151B4D3ABD4}"/>
+            </a:ext>
+          </a:extLst>
+        </p:cNvPr>
+        <p:cNvGrpSpPr/>
+        <p:nvPr/>
+      </p:nvGrpSpPr>
+      <p:grpSpPr>
+        <a:xfrm>
+          <a:off x="0" y="0"/>
+          <a:ext cx="0" cy="0"/>
+          <a:chOff x="0" y="0"/>
+          <a:chExt cx="0" cy="0"/>
+        </a:xfrm>
+      </p:grpSpPr>
+      <p:sp>
+        <p:nvSpPr>
+          <p:cNvPr id="2" name="Tytuł 1">
+            <a:extLst>
+              <a:ext uri="{FF2B5EF4-FFF2-40B4-BE49-F238E27FC236}">
+                <a16:creationId xmlns:a16="http://schemas.microsoft.com/office/drawing/2014/main" id="{35898779-DD72-19A3-B58D-CA3C830082F9}"/>
+              </a:ext>
+            </a:extLst>
+          </p:cNvPr>
+          <p:cNvSpPr>
+            <a:spLocks noGrp="1"/>
+          </p:cNvSpPr>
+          <p:nvPr>
+            <p:ph type="title"/>
+          </p:nvPr>
+        </p:nvSpPr>
+        <p:spPr/>
+        <p:txBody>
+          <a:bodyPr rtlCol="0"/>
+          <a:lstStyle/>
+          <a:p>
+            <a:pPr rtl="0"/>
+            <a:r>
+              <a:rPr lang="pl-PL" sz="4400" dirty="0"/>
+              <a:t>Co to jest, jak  działa i do czego może się przydać?</a:t>
+            </a:r>
+          </a:p>
+        </p:txBody>
+      </p:sp>
+      <p:sp>
+        <p:nvSpPr>
+          <p:cNvPr id="12" name="Prostokąt 11" descr="Blok z akcentem z lewej">
+            <a:extLst>
+              <a:ext uri="{FF2B5EF4-FFF2-40B4-BE49-F238E27FC236}">
+                <a16:creationId xmlns:a16="http://schemas.microsoft.com/office/drawing/2014/main" id="{9E288327-B996-623F-2B14-346FF38AB027}"/>
+              </a:ext>
+              <a:ext uri="{C183D7F6-B498-43B3-948B-1728B52AA6E4}">
+                <adec:decorative xmlns:adec="http://schemas.microsoft.com/office/drawing/2017/decorative" val="1"/>
+              </a:ext>
+            </a:extLst>
+          </p:cNvPr>
+          <p:cNvSpPr/>
+          <p:nvPr/>
+        </p:nvSpPr>
+        <p:spPr>
+          <a:xfrm>
+            <a:off x="431800" y="1693917"/>
+            <a:ext cx="1984175" cy="114824"/>
+          </a:xfrm>
+          <a:prstGeom prst="rect">
+            <a:avLst/>
+          </a:prstGeom>
+          <a:solidFill>
+            <a:schemeClr val="accent1"/>
+          </a:solidFill>
+          <a:ln>
+            <a:noFill/>
+          </a:ln>
+        </p:spPr>
+        <p:style>
+          <a:lnRef idx="2">
+            <a:schemeClr val="accent1">
+              <a:shade val="50000"/>
+            </a:schemeClr>
+          </a:lnRef>
+          <a:fillRef idx="1">
+            <a:schemeClr val="accent1"/>
+          </a:fillRef>
+          <a:effectRef idx="0">
+            <a:schemeClr val="accent1"/>
+          </a:effectRef>
+          <a:fontRef idx="minor">
+            <a:schemeClr val="lt1"/>
+          </a:fontRef>
+        </p:style>
+        <p:txBody>
+          <a:bodyPr rtlCol="0" anchor="ctr"/>
+          <a:lstStyle/>
+          <a:p>
+            <a:pPr algn="l" rtl="0"/>
+            <a:endParaRPr lang="pl-PL" dirty="0"/>
+          </a:p>
+        </p:txBody>
+      </p:sp>
+      <p:sp>
+        <p:nvSpPr>
+          <p:cNvPr id="4" name="Tekst — symbol zastępczy 3">
+            <a:extLst>
+              <a:ext uri="{FF2B5EF4-FFF2-40B4-BE49-F238E27FC236}">
+                <a16:creationId xmlns:a16="http://schemas.microsoft.com/office/drawing/2014/main" id="{4A388C1F-0E06-F295-2E8B-832AC725D7ED}"/>
+              </a:ext>
+            </a:extLst>
+          </p:cNvPr>
+          <p:cNvSpPr>
+            <a:spLocks noGrp="1"/>
+          </p:cNvSpPr>
+          <p:nvPr>
+            <p:ph type="body" idx="1"/>
+          </p:nvPr>
+        </p:nvSpPr>
+        <p:spPr>
+          <a:xfrm>
+            <a:off x="432000" y="2036534"/>
+            <a:ext cx="5472000" cy="360000"/>
+          </a:xfrm>
+        </p:spPr>
+        <p:txBody>
+          <a:bodyPr rtlCol="0"/>
+          <a:lstStyle/>
+          <a:p>
+            <a:r>
+              <a:rPr lang="pl-PL" dirty="0"/>
+              <a:t>Jak to działa:</a:t>
+            </a:r>
+          </a:p>
+        </p:txBody>
+      </p:sp>
+      <p:sp>
+        <p:nvSpPr>
+          <p:cNvPr id="5" name="Zawartość — symbol zastępczy 4">
+            <a:extLst>
+              <a:ext uri="{FF2B5EF4-FFF2-40B4-BE49-F238E27FC236}">
+                <a16:creationId xmlns:a16="http://schemas.microsoft.com/office/drawing/2014/main" id="{9F24D7F4-3D42-5DF0-AE22-AE41B699BBDA}"/>
+              </a:ext>
+            </a:extLst>
+          </p:cNvPr>
+          <p:cNvSpPr>
+            <a:spLocks noGrp="1"/>
+          </p:cNvSpPr>
+          <p:nvPr>
+            <p:ph sz="half" idx="2"/>
+          </p:nvPr>
+        </p:nvSpPr>
+        <p:spPr>
+          <a:xfrm>
+            <a:off x="432000" y="2544368"/>
+            <a:ext cx="5472000" cy="2194694"/>
+          </a:xfrm>
+        </p:spPr>
+        <p:txBody>
+          <a:bodyPr rtlCol="0"/>
+          <a:lstStyle/>
+          <a:p>
+            <a:pPr rtl="0"/>
+            <a:r>
+              <a:rPr lang="pl-PL" dirty="0"/>
+              <a:t>Wykorzystaliśmy model uczenia maszynowego (GMM) – czyli algorytm, który samodzielnie analizuje dane i grupuje klientów o podobnych cechach.</a:t>
+            </a:r>
+          </a:p>
+          <a:p>
+            <a:pPr rtl="0"/>
+            <a:r>
+              <a:rPr lang="pl-PL" dirty="0"/>
+              <a:t>Model znajduje ukryte wzorce w danych – na przykład klientów o podobnym dochodzie, zadłużeniu czy historii kredytowej.</a:t>
+            </a:r>
+          </a:p>
+          <a:p>
+            <a:pPr rtl="0"/>
+            <a:r>
+              <a:rPr lang="pl-PL" dirty="0"/>
+              <a:t>Model sam decyduje, jak najlepiej podzielić klientów na segmenty, analizując wiele cech naraz.</a:t>
+            </a:r>
+          </a:p>
+          <a:p>
+            <a:pPr rtl="0"/>
+            <a:r>
+              <a:rPr lang="pl-PL" dirty="0"/>
+              <a:t>Każdy klient trafia do jednego z klastrów – czyli grupy osób o podobnym profilu finansowym i behawioralnym.</a:t>
+            </a:r>
+          </a:p>
+        </p:txBody>
+      </p:sp>
+      <p:cxnSp>
+        <p:nvCxnSpPr>
+          <p:cNvPr id="11" name="Łącznik prosty 10" descr="Podział slajdu">
+            <a:extLst>
+              <a:ext uri="{FF2B5EF4-FFF2-40B4-BE49-F238E27FC236}">
+                <a16:creationId xmlns:a16="http://schemas.microsoft.com/office/drawing/2014/main" id="{A0593098-A66B-EBE9-B5E3-C6B2E076D7C9}"/>
+              </a:ext>
+              <a:ext uri="{C183D7F6-B498-43B3-948B-1728B52AA6E4}">
+                <adec:decorative xmlns:adec="http://schemas.microsoft.com/office/drawing/2017/decorative" val="1"/>
+              </a:ext>
+            </a:extLst>
+          </p:cNvPr>
+          <p:cNvCxnSpPr/>
+          <p:nvPr/>
+        </p:nvCxnSpPr>
+        <p:spPr>
+          <a:xfrm>
+            <a:off x="6096000" y="1956635"/>
+            <a:ext cx="0" cy="2411330"/>
+          </a:xfrm>
+          <a:prstGeom prst="line">
+            <a:avLst/>
+          </a:prstGeom>
+          <a:ln>
+            <a:solidFill>
+              <a:schemeClr val="bg1">
+                <a:lumMod val="95000"/>
+              </a:schemeClr>
+            </a:solidFill>
+          </a:ln>
+        </p:spPr>
+        <p:style>
+          <a:lnRef idx="1">
+            <a:schemeClr val="accent1"/>
+          </a:lnRef>
+          <a:fillRef idx="0">
+            <a:schemeClr val="accent1"/>
+          </a:fillRef>
+          <a:effectRef idx="0">
+            <a:schemeClr val="accent1"/>
+          </a:effectRef>
+          <a:fontRef idx="minor">
+            <a:schemeClr val="tx1"/>
+          </a:fontRef>
+        </p:style>
+      </p:cxnSp>
+      <p:sp>
+        <p:nvSpPr>
+          <p:cNvPr id="13" name="Prostokąt 12" descr="Kreska z akcentem z prawej&#10;">
+            <a:extLst>
+              <a:ext uri="{FF2B5EF4-FFF2-40B4-BE49-F238E27FC236}">
+                <a16:creationId xmlns:a16="http://schemas.microsoft.com/office/drawing/2014/main" id="{AFD8B317-5A08-2D32-97E5-D85BD1403307}"/>
+              </a:ext>
+              <a:ext uri="{C183D7F6-B498-43B3-948B-1728B52AA6E4}">
+                <adec:decorative xmlns:adec="http://schemas.microsoft.com/office/drawing/2017/decorative" val="1"/>
+              </a:ext>
+            </a:extLst>
+          </p:cNvPr>
+          <p:cNvSpPr/>
+          <p:nvPr/>
+        </p:nvSpPr>
+        <p:spPr>
+          <a:xfrm>
+            <a:off x="6299887" y="1693917"/>
+            <a:ext cx="1984175" cy="114824"/>
+          </a:xfrm>
+          <a:prstGeom prst="rect">
+            <a:avLst/>
+          </a:prstGeom>
+          <a:solidFill>
+            <a:schemeClr val="accent3"/>
+          </a:solidFill>
+          <a:ln>
+            <a:noFill/>
+          </a:ln>
+        </p:spPr>
+        <p:style>
+          <a:lnRef idx="2">
+            <a:schemeClr val="accent1">
+              <a:shade val="50000"/>
+            </a:schemeClr>
+          </a:lnRef>
+          <a:fillRef idx="1">
+            <a:schemeClr val="accent1"/>
+          </a:fillRef>
+          <a:effectRef idx="0">
+            <a:schemeClr val="accent1"/>
+          </a:effectRef>
+          <a:fontRef idx="minor">
+            <a:schemeClr val="lt1"/>
+          </a:fontRef>
+        </p:style>
+        <p:txBody>
+          <a:bodyPr rtlCol="0" anchor="ctr"/>
+          <a:lstStyle/>
+          <a:p>
+            <a:pPr algn="l" rtl="0"/>
+            <a:endParaRPr lang="pl-PL" dirty="0"/>
+          </a:p>
+        </p:txBody>
+      </p:sp>
+      <p:sp>
+        <p:nvSpPr>
+          <p:cNvPr id="6" name="Tekst — symbol zastępczy 5">
+            <a:extLst>
+              <a:ext uri="{FF2B5EF4-FFF2-40B4-BE49-F238E27FC236}">
+                <a16:creationId xmlns:a16="http://schemas.microsoft.com/office/drawing/2014/main" id="{3FE6026D-B70C-229A-4892-66B8977401D3}"/>
+              </a:ext>
+            </a:extLst>
+          </p:cNvPr>
+          <p:cNvSpPr>
+            <a:spLocks noGrp="1"/>
+          </p:cNvSpPr>
+          <p:nvPr>
+            <p:ph type="body" sz="quarter" idx="13"/>
+          </p:nvPr>
+        </p:nvSpPr>
+        <p:spPr>
+          <a:xfrm>
+            <a:off x="6300000" y="2037059"/>
+            <a:ext cx="5472000" cy="358775"/>
+          </a:xfrm>
+        </p:spPr>
+        <p:txBody>
+          <a:bodyPr rtlCol="0"/>
+          <a:lstStyle/>
+          <a:p>
+            <a:r>
+              <a:rPr lang="pl-PL" dirty="0"/>
+              <a:t>Dlaczego to działa i przynosi korzyści:</a:t>
+            </a:r>
+          </a:p>
+        </p:txBody>
+      </p:sp>
+      <p:sp>
+        <p:nvSpPr>
+          <p:cNvPr id="7" name="Tekst — symbol zastępczy 6">
+            <a:extLst>
+              <a:ext uri="{FF2B5EF4-FFF2-40B4-BE49-F238E27FC236}">
+                <a16:creationId xmlns:a16="http://schemas.microsoft.com/office/drawing/2014/main" id="{3552D115-9B75-2BE9-49EE-B693006611AC}"/>
+              </a:ext>
+            </a:extLst>
+          </p:cNvPr>
+          <p:cNvSpPr>
+            <a:spLocks noGrp="1"/>
+          </p:cNvSpPr>
+          <p:nvPr>
+            <p:ph type="body" sz="quarter" idx="12"/>
+          </p:nvPr>
+        </p:nvSpPr>
+        <p:spPr>
+          <a:xfrm>
+            <a:off x="6299887" y="2541059"/>
+            <a:ext cx="5472113" cy="2196041"/>
+          </a:xfrm>
+        </p:spPr>
+        <p:txBody>
+          <a:bodyPr rtlCol="0"/>
+          <a:lstStyle/>
+          <a:p>
+            <a:pPr rtl="0"/>
+            <a:r>
+              <a:rPr lang="pl-PL" dirty="0"/>
+              <a:t>Model oparty jest na statystyce i prawdopodobieństwie – ocenia, jak bardzo klient „pasuje” do danej grupy, co zapewnia trafność podziału.</a:t>
+            </a:r>
+          </a:p>
+          <a:p>
+            <a:pPr rtl="0"/>
+            <a:r>
+              <a:rPr lang="pl-PL" dirty="0"/>
+              <a:t>Pomaga zrozumieć klientów – każda grupa ma unikalny profil, co pozwala lepiej dopasować ofertę i sposób komunikacji.</a:t>
+            </a:r>
+          </a:p>
+          <a:p>
+            <a:pPr rtl="0"/>
+            <a:r>
+              <a:rPr lang="pl-PL" dirty="0"/>
+              <a:t>Zwiększa skuteczność marketingu – celując w odpowiednie grupy, firma może prowadzić bardziej trafne kampanie i lepiej wykorzystać budżet.</a:t>
+            </a:r>
+          </a:p>
+        </p:txBody>
+      </p:sp>
+      <p:sp>
+        <p:nvSpPr>
+          <p:cNvPr id="8" name="Numer slajdu — symbol zastępczy 7">
+            <a:extLst>
+              <a:ext uri="{FF2B5EF4-FFF2-40B4-BE49-F238E27FC236}">
+                <a16:creationId xmlns:a16="http://schemas.microsoft.com/office/drawing/2014/main" id="{09DE337C-EA52-5BB1-3646-0693884AADB1}"/>
+              </a:ext>
+            </a:extLst>
+          </p:cNvPr>
+          <p:cNvSpPr>
+            <a:spLocks noGrp="1"/>
+          </p:cNvSpPr>
+          <p:nvPr>
+            <p:ph type="sldNum" sz="quarter" idx="33"/>
+          </p:nvPr>
+        </p:nvSpPr>
+        <p:spPr>
+          <a:xfrm>
+            <a:off x="11760000" y="6371351"/>
+            <a:ext cx="432000" cy="432000"/>
+          </a:xfrm>
+        </p:spPr>
+        <p:txBody>
+          <a:bodyPr rtlCol="0"/>
+          <a:lstStyle/>
+          <a:p>
+            <a:pPr rtl="0"/>
+            <a:fld id="{19B51A1E-902D-48AF-9020-955120F399B6}" type="slidenum">
+              <a:rPr lang="pl-PL" smtClean="0"/>
+              <a:pPr rtl="0"/>
+              <a:t>4</a:t>
+            </a:fld>
+            <a:endParaRPr lang="pl-PL" dirty="0"/>
+          </a:p>
+        </p:txBody>
+      </p:sp>
+    </p:spTree>
+    <p:extLst>
+      <p:ext uri="{BB962C8B-B14F-4D97-AF65-F5344CB8AC3E}">
+        <p14:creationId xmlns:p14="http://schemas.microsoft.com/office/powerpoint/2010/main" val="2794640881"/>
+      </p:ext>
+    </p:extLst>
+  </p:cSld>
+  <p:clrMapOvr>
+    <a:masterClrMapping/>
+  </p:clrMapOvr>
+</p:sld>
+</file>
+
+<file path=ppt/slides/slide5.xml><?xml version="1.0" encoding="utf-8"?>
+<p:sld xmlns:a="http://schemas.openxmlformats.org/drawingml/2006/main" xmlns:r="http://schemas.openxmlformats.org/officeDocument/2006/relationships" xmlns:p="http://schemas.openxmlformats.org/presentationml/2006/main">
+  <p:cSld>
+    <p:spTree>
+      <p:nvGrpSpPr>
+        <p:cNvPr id="1" name=""/>
+        <p:cNvGrpSpPr/>
+        <p:nvPr/>
+      </p:nvGrpSpPr>
+      <p:grpSpPr>
+        <a:xfrm>
+          <a:off x="0" y="0"/>
+          <a:ext cx="0" cy="0"/>
+          <a:chOff x="0" y="0"/>
+          <a:chExt cx="0" cy="0"/>
+        </a:xfrm>
+      </p:grpSpPr>
+      <p:pic>
+        <p:nvPicPr>
+          <p:cNvPr id="11" name="Obraz — symbol zastępczy 10" descr="Biurko z komputerem, telefonem, książkami itp.">
+            <a:extLst>
+              <a:ext uri="{FF2B5EF4-FFF2-40B4-BE49-F238E27FC236}">
+                <a16:creationId xmlns:a16="http://schemas.microsoft.com/office/drawing/2014/main" id="{2E7ADBC3-DECA-9F4C-9289-9E43C727592F}"/>
+              </a:ext>
+            </a:extLst>
+          </p:cNvPr>
+          <p:cNvPicPr>
+            <a:picLocks noGrp="1" noChangeAspect="1"/>
+          </p:cNvPicPr>
+          <p:nvPr>
+            <p:ph type="pic" sz="quarter" idx="10"/>
+          </p:nvPr>
+        </p:nvPicPr>
+        <p:blipFill>
+          <a:blip r:embed="rId3" cstate="screen">
+            <a:extLst>
+              <a:ext uri="{28A0092B-C50C-407E-A947-70E740481C1C}">
+                <a14:useLocalDpi xmlns:a14="http://schemas.microsoft.com/office/drawing/2010/main"/>
+              </a:ext>
+            </a:extLst>
+          </a:blip>
+          <a:srcRect/>
+          <a:stretch>
+            <a:fillRect/>
+          </a:stretch>
+        </p:blipFill>
+        <p:spPr/>
+      </p:pic>
+      <p:sp>
+        <p:nvSpPr>
+          <p:cNvPr id="3" name="Tytuł 2">
+            <a:extLst>
+              <a:ext uri="{FF2B5EF4-FFF2-40B4-BE49-F238E27FC236}">
+                <a16:creationId xmlns:a16="http://schemas.microsoft.com/office/drawing/2014/main" id="{200B3D2B-613A-41BE-987D-E6A1324B456D}"/>
+              </a:ext>
+            </a:extLst>
+          </p:cNvPr>
+          <p:cNvSpPr>
+            <a:spLocks noGrp="1"/>
+          </p:cNvSpPr>
+          <p:nvPr>
+            <p:ph type="ctrTitle"/>
+          </p:nvPr>
+        </p:nvSpPr>
+        <p:spPr>
+          <a:xfrm>
+            <a:off x="6235700" y="2480732"/>
+            <a:ext cx="5956300" cy="1668059"/>
+          </a:xfrm>
+        </p:spPr>
+        <p:txBody>
+          <a:bodyPr rtlCol="0"/>
+          <a:lstStyle/>
+          <a:p>
+            <a:pPr rtl="0"/>
+            <a:r>
+              <a:rPr lang="pl-PL" sz="4400" dirty="0"/>
+              <a:t>Jak model podejmuje decyzje?</a:t>
+            </a:r>
+          </a:p>
+        </p:txBody>
+      </p:sp>
+      <p:sp>
+        <p:nvSpPr>
+          <p:cNvPr id="14" name="Tekst — symbol zastępczy 13">
+            <a:extLst>
+              <a:ext uri="{FF2B5EF4-FFF2-40B4-BE49-F238E27FC236}">
+                <a16:creationId xmlns:a16="http://schemas.microsoft.com/office/drawing/2014/main" id="{F278402B-CA7D-4F5B-B3FA-ED74AB3CFB6C}"/>
+              </a:ext>
+            </a:extLst>
+          </p:cNvPr>
+          <p:cNvSpPr>
+            <a:spLocks noGrp="1"/>
+          </p:cNvSpPr>
+          <p:nvPr>
+            <p:ph type="body" sz="quarter" idx="13"/>
+          </p:nvPr>
+        </p:nvSpPr>
+        <p:spPr/>
+        <p:txBody>
+          <a:bodyPr rtlCol="0"/>
+          <a:lstStyle/>
+          <a:p>
+            <a:pPr rtl="0"/>
+            <a:r>
+              <a:rPr lang="pl-PL" dirty="0"/>
+              <a:t>Czyli skąd mamy pewność, że nasz podział jest praktyczny?</a:t>
+            </a:r>
+          </a:p>
+        </p:txBody>
+      </p:sp>
+      <p:sp>
+        <p:nvSpPr>
+          <p:cNvPr id="5" name="Numer slajdu — symbol zastępczy 4">
+            <a:extLst>
+              <a:ext uri="{FF2B5EF4-FFF2-40B4-BE49-F238E27FC236}">
+                <a16:creationId xmlns:a16="http://schemas.microsoft.com/office/drawing/2014/main" id="{BDD5A594-D852-43BB-B591-E9D9027253BD}"/>
+              </a:ext>
+            </a:extLst>
+          </p:cNvPr>
+          <p:cNvSpPr>
+            <a:spLocks noGrp="1"/>
+          </p:cNvSpPr>
+          <p:nvPr>
+            <p:ph type="sldNum" sz="quarter" idx="12"/>
+          </p:nvPr>
+        </p:nvSpPr>
+        <p:spPr/>
+        <p:txBody>
+          <a:bodyPr rtlCol="0"/>
+          <a:lstStyle/>
+          <a:p>
+            <a:pPr rtl="0"/>
+            <a:fld id="{19B51A1E-902D-48AF-9020-955120F399B6}" type="slidenum">
+              <a:rPr lang="pl-PL" smtClean="0"/>
+              <a:pPr rtl="0"/>
+              <a:t>5</a:t>
+            </a:fld>
+            <a:endParaRPr lang="pl-PL" dirty="0"/>
+          </a:p>
+        </p:txBody>
+      </p:sp>
+    </p:spTree>
+    <p:extLst>
+      <p:ext uri="{BB962C8B-B14F-4D97-AF65-F5344CB8AC3E}">
+        <p14:creationId xmlns:p14="http://schemas.microsoft.com/office/powerpoint/2010/main" val="4091674644"/>
+      </p:ext>
+    </p:extLst>
+  </p:cSld>
+  <p:clrMapOvr>
+    <a:masterClrMapping/>
+  </p:clrMapOvr>
+</p:sld>
+</file>
+
+<file path=ppt/slides/slide6.xml><?xml version="1.0" encoding="utf-8"?>
+<p:sld xmlns:a="http://schemas.openxmlformats.org/drawingml/2006/main" xmlns:r="http://schemas.openxmlformats.org/officeDocument/2006/relationships" xmlns:p="http://schemas.openxmlformats.org/presentationml/2006/main">
+  <p:cSld>
+    <p:spTree>
+      <p:nvGrpSpPr>
+        <p:cNvPr id="1" name=""/>
+        <p:cNvGrpSpPr/>
+        <p:nvPr/>
+      </p:nvGrpSpPr>
+      <p:grpSpPr>
+        <a:xfrm>
+          <a:off x="0" y="0"/>
+          <a:ext cx="0" cy="0"/>
+          <a:chOff x="0" y="0"/>
+          <a:chExt cx="0" cy="0"/>
+        </a:xfrm>
+      </p:grpSpPr>
+      <p:sp>
+        <p:nvSpPr>
+          <p:cNvPr id="2" name="Tytuł 1">
+            <a:extLst>
+              <a:ext uri="{FF2B5EF4-FFF2-40B4-BE49-F238E27FC236}">
+                <a16:creationId xmlns:a16="http://schemas.microsoft.com/office/drawing/2014/main" id="{19304E83-A4F0-49C5-BB01-F5773509A2B3}"/>
+              </a:ext>
+            </a:extLst>
+          </p:cNvPr>
+          <p:cNvSpPr>
+            <a:spLocks noGrp="1"/>
+          </p:cNvSpPr>
+          <p:nvPr>
+            <p:ph type="title"/>
+          </p:nvPr>
+        </p:nvSpPr>
+        <p:spPr/>
+        <p:txBody>
+          <a:bodyPr rtlCol="0"/>
+          <a:lstStyle/>
+          <a:p>
+            <a:pPr rtl="0"/>
+            <a:r>
+              <a:rPr lang="pl-PL" dirty="0"/>
+              <a:t>Decyzyjność modelu</a:t>
+            </a:r>
+          </a:p>
+        </p:txBody>
+      </p:sp>
+      <p:sp>
+        <p:nvSpPr>
+          <p:cNvPr id="3" name="Tekst — symbol zastępczy 2">
+            <a:extLst>
+              <a:ext uri="{FF2B5EF4-FFF2-40B4-BE49-F238E27FC236}">
+                <a16:creationId xmlns:a16="http://schemas.microsoft.com/office/drawing/2014/main" id="{7CA42D59-EAD6-4F95-84F1-32A30F057856}"/>
+              </a:ext>
+            </a:extLst>
+          </p:cNvPr>
+          <p:cNvSpPr>
+            <a:spLocks noGrp="1"/>
+          </p:cNvSpPr>
+          <p:nvPr>
+            <p:ph type="body" sz="quarter" idx="32"/>
+          </p:nvPr>
+        </p:nvSpPr>
+        <p:spPr/>
+        <p:txBody>
+          <a:bodyPr rtlCol="0"/>
+          <a:lstStyle/>
+          <a:p>
+            <a:pPr rtl="0"/>
+            <a:r>
+              <a:rPr lang="pl-PL" dirty="0"/>
+              <a:t>Jakie cechy algorytm bierze pod uwagę przy segmentacji?</a:t>
+            </a:r>
+          </a:p>
+        </p:txBody>
+      </p:sp>
+      <p:sp>
+        <p:nvSpPr>
+          <p:cNvPr id="12" name="Prostokąt 11" descr="Blok z akcentem z lewej">
+            <a:extLst>
+              <a:ext uri="{FF2B5EF4-FFF2-40B4-BE49-F238E27FC236}">
+                <a16:creationId xmlns:a16="http://schemas.microsoft.com/office/drawing/2014/main" id="{7F65E93D-09FF-42EE-B9DD-750638966686}"/>
+              </a:ext>
+              <a:ext uri="{C183D7F6-B498-43B3-948B-1728B52AA6E4}">
+                <adec:decorative xmlns:adec="http://schemas.microsoft.com/office/drawing/2017/decorative" val="1"/>
+              </a:ext>
+            </a:extLst>
+          </p:cNvPr>
+          <p:cNvSpPr/>
+          <p:nvPr/>
+        </p:nvSpPr>
+        <p:spPr>
+          <a:xfrm>
+            <a:off x="431800" y="1579768"/>
+            <a:ext cx="1984175" cy="114824"/>
+          </a:xfrm>
+          <a:prstGeom prst="rect">
+            <a:avLst/>
+          </a:prstGeom>
+          <a:solidFill>
+            <a:schemeClr val="accent1"/>
+          </a:solidFill>
+          <a:ln>
+            <a:noFill/>
+          </a:ln>
+        </p:spPr>
+        <p:style>
+          <a:lnRef idx="2">
+            <a:schemeClr val="accent1">
+              <a:shade val="50000"/>
+            </a:schemeClr>
+          </a:lnRef>
+          <a:fillRef idx="1">
+            <a:schemeClr val="accent1"/>
+          </a:fillRef>
+          <a:effectRef idx="0">
+            <a:schemeClr val="accent1"/>
+          </a:effectRef>
+          <a:fontRef idx="minor">
+            <a:schemeClr val="lt1"/>
+          </a:fontRef>
+        </p:style>
+        <p:txBody>
+          <a:bodyPr rtlCol="0" anchor="ctr"/>
+          <a:lstStyle/>
+          <a:p>
+            <a:pPr algn="l" rtl="0"/>
+            <a:endParaRPr lang="pl-PL" dirty="0"/>
+          </a:p>
+        </p:txBody>
+      </p:sp>
+      <p:sp>
+        <p:nvSpPr>
+          <p:cNvPr id="5" name="Zawartość — symbol zastępczy 4">
+            <a:extLst>
+              <a:ext uri="{FF2B5EF4-FFF2-40B4-BE49-F238E27FC236}">
+                <a16:creationId xmlns:a16="http://schemas.microsoft.com/office/drawing/2014/main" id="{CEEB3BAE-C0B2-447C-B8BE-96C6BD84D658}"/>
+              </a:ext>
+            </a:extLst>
+          </p:cNvPr>
+          <p:cNvSpPr>
+            <a:spLocks noGrp="1"/>
+          </p:cNvSpPr>
+          <p:nvPr>
+            <p:ph sz="half" idx="2"/>
+          </p:nvPr>
+        </p:nvSpPr>
+        <p:spPr>
+          <a:xfrm>
+            <a:off x="431800" y="1906360"/>
+            <a:ext cx="4961466" cy="2194694"/>
+          </a:xfrm>
+        </p:spPr>
+        <p:txBody>
+          <a:bodyPr rtlCol="0"/>
+          <a:lstStyle/>
+          <a:p>
+            <a:pPr marL="0" indent="0" rtl="0">
+              <a:buNone/>
+            </a:pPr>
+            <a:r>
+              <a:rPr lang="pl-PL" dirty="0"/>
+              <a:t>Do analizy istotności poszczególnych cech klientów wykorzystaliśmy algorytm klasyfikacyjny </a:t>
+            </a:r>
+            <a:r>
+              <a:rPr lang="pl-PL" dirty="0" err="1"/>
+              <a:t>RandomForest</a:t>
+            </a:r>
+            <a:r>
+              <a:rPr lang="pl-PL" dirty="0"/>
+              <a:t>, który zwraca czytelną informację na podstawie jakich cech algorytmy podejmują decyzję o podziale na klasy.</a:t>
+            </a:r>
+          </a:p>
+          <a:p>
+            <a:pPr marL="0" indent="0" rtl="0">
+              <a:buNone/>
+            </a:pPr>
+            <a:r>
+              <a:rPr lang="pl-PL" dirty="0"/>
+              <a:t>W rezultacie, wpływ na kształt segmentów mają następujące cechy:</a:t>
+            </a:r>
+          </a:p>
+          <a:p>
+            <a:r>
+              <a:rPr lang="pl-PL" dirty="0"/>
+              <a:t>wysokość kredytu,</a:t>
+            </a:r>
+          </a:p>
+          <a:p>
+            <a:r>
+              <a:rPr lang="pl-PL" dirty="0"/>
+              <a:t>wysokość dochodu,</a:t>
+            </a:r>
+          </a:p>
+          <a:p>
+            <a:r>
+              <a:rPr lang="pl-PL" dirty="0"/>
+              <a:t>stan własnościowy domu/mieszkania (hipoteka / wynajem / mieszkanie własne),</a:t>
+            </a:r>
+          </a:p>
+          <a:p>
+            <a:r>
+              <a:rPr lang="pl-PL" dirty="0"/>
+              <a:t>przeznaczenie kredytów (np. na wydatki związane z domem).</a:t>
+            </a:r>
+          </a:p>
+        </p:txBody>
+      </p:sp>
+      <p:cxnSp>
+        <p:nvCxnSpPr>
+          <p:cNvPr id="11" name="Łącznik prosty 10" descr="Podział slajdu">
+            <a:extLst>
+              <a:ext uri="{FF2B5EF4-FFF2-40B4-BE49-F238E27FC236}">
+                <a16:creationId xmlns:a16="http://schemas.microsoft.com/office/drawing/2014/main" id="{5A563457-1EC8-4978-BCCB-AFD88C9ED04C}"/>
+              </a:ext>
+              <a:ext uri="{C183D7F6-B498-43B3-948B-1728B52AA6E4}">
+                <adec:decorative xmlns:adec="http://schemas.microsoft.com/office/drawing/2017/decorative" val="1"/>
+              </a:ext>
+            </a:extLst>
+          </p:cNvPr>
+          <p:cNvCxnSpPr/>
+          <p:nvPr/>
+        </p:nvCxnSpPr>
+        <p:spPr>
+          <a:xfrm>
+            <a:off x="6096000" y="2363035"/>
+            <a:ext cx="0" cy="2411330"/>
+          </a:xfrm>
+          <a:prstGeom prst="line">
+            <a:avLst/>
+          </a:prstGeom>
+          <a:ln>
+            <a:solidFill>
+              <a:schemeClr val="bg1">
+                <a:lumMod val="95000"/>
+              </a:schemeClr>
+            </a:solidFill>
+          </a:ln>
+        </p:spPr>
+        <p:style>
+          <a:lnRef idx="1">
+            <a:schemeClr val="accent1"/>
+          </a:lnRef>
+          <a:fillRef idx="0">
+            <a:schemeClr val="accent1"/>
+          </a:fillRef>
+          <a:effectRef idx="0">
+            <a:schemeClr val="accent1"/>
+          </a:effectRef>
+          <a:fontRef idx="minor">
+            <a:schemeClr val="tx1"/>
+          </a:fontRef>
+        </p:style>
+      </p:cxnSp>
+      <p:sp>
+        <p:nvSpPr>
+          <p:cNvPr id="8" name="Numer slajdu — symbol zastępczy 7">
+            <a:extLst>
+              <a:ext uri="{FF2B5EF4-FFF2-40B4-BE49-F238E27FC236}">
+                <a16:creationId xmlns:a16="http://schemas.microsoft.com/office/drawing/2014/main" id="{E6AC9832-FB01-464A-9824-61887B77997E}"/>
+              </a:ext>
+            </a:extLst>
+          </p:cNvPr>
+          <p:cNvSpPr>
+            <a:spLocks noGrp="1"/>
+          </p:cNvSpPr>
+          <p:nvPr>
+            <p:ph type="sldNum" sz="quarter" idx="33"/>
+          </p:nvPr>
+        </p:nvSpPr>
+        <p:spPr>
+          <a:xfrm>
+            <a:off x="11760000" y="6371351"/>
+            <a:ext cx="432000" cy="432000"/>
+          </a:xfrm>
+        </p:spPr>
+        <p:txBody>
+          <a:bodyPr rtlCol="0"/>
+          <a:lstStyle/>
+          <a:p>
+            <a:pPr rtl="0"/>
+            <a:fld id="{19B51A1E-902D-48AF-9020-955120F399B6}" type="slidenum">
+              <a:rPr lang="pl-PL" smtClean="0"/>
+              <a:pPr rtl="0"/>
+              <a:t>6</a:t>
+            </a:fld>
+            <a:endParaRPr lang="pl-PL" dirty="0"/>
+          </a:p>
+        </p:txBody>
+      </p:sp>
+      <p:pic>
+        <p:nvPicPr>
+          <p:cNvPr id="17" name="Obraz 16">
+            <a:extLst>
+              <a:ext uri="{FF2B5EF4-FFF2-40B4-BE49-F238E27FC236}">
+                <a16:creationId xmlns:a16="http://schemas.microsoft.com/office/drawing/2014/main" id="{DC7EBA4D-72D7-F145-DE2B-6F087A235D60}"/>
+              </a:ext>
+            </a:extLst>
+          </p:cNvPr>
+          <p:cNvPicPr>
+            <a:picLocks noChangeAspect="1"/>
+          </p:cNvPicPr>
+          <p:nvPr/>
+        </p:nvPicPr>
+        <p:blipFill>
+          <a:blip r:embed="rId3"/>
+          <a:stretch>
+            <a:fillRect/>
+          </a:stretch>
+        </p:blipFill>
+        <p:spPr>
+          <a:xfrm>
+            <a:off x="5572553" y="1818082"/>
+            <a:ext cx="6403447" cy="3785605"/>
+          </a:xfrm>
+          <a:prstGeom prst="rect">
+            <a:avLst/>
+          </a:prstGeom>
+        </p:spPr>
+      </p:pic>
+    </p:spTree>
+    <p:extLst>
+      <p:ext uri="{BB962C8B-B14F-4D97-AF65-F5344CB8AC3E}">
+        <p14:creationId xmlns:p14="http://schemas.microsoft.com/office/powerpoint/2010/main" val="3188837873"/>
+      </p:ext>
+    </p:extLst>
+  </p:cSld>
+  <p:clrMapOvr>
+    <a:masterClrMapping/>
+  </p:clrMapOvr>
+</p:sld>
+</file>
+
+<file path=ppt/slides/slide7.xml><?xml version="1.0" encoding="utf-8"?>
+<p:sld xmlns:a="http://schemas.openxmlformats.org/drawingml/2006/main" xmlns:r="http://schemas.openxmlformats.org/officeDocument/2006/relationships" xmlns:p="http://schemas.openxmlformats.org/presentationml/2006/main">
+  <p:cSld>
+    <p:spTree>
+      <p:nvGrpSpPr>
+        <p:cNvPr id="1" name="">
+          <a:extLst>
+            <a:ext uri="{FF2B5EF4-FFF2-40B4-BE49-F238E27FC236}">
+              <a16:creationId xmlns:a16="http://schemas.microsoft.com/office/drawing/2014/main" id="{1367B4F9-1509-06C4-800F-33A708B3E4F6}"/>
+            </a:ext>
+          </a:extLst>
+        </p:cNvPr>
+        <p:cNvGrpSpPr/>
+        <p:nvPr/>
+      </p:nvGrpSpPr>
+      <p:grpSpPr>
+        <a:xfrm>
+          <a:off x="0" y="0"/>
+          <a:ext cx="0" cy="0"/>
+          <a:chOff x="0" y="0"/>
+          <a:chExt cx="0" cy="0"/>
+        </a:xfrm>
+      </p:grpSpPr>
+      <p:sp>
+        <p:nvSpPr>
+          <p:cNvPr id="2" name="Tytuł 1">
+            <a:extLst>
+              <a:ext uri="{FF2B5EF4-FFF2-40B4-BE49-F238E27FC236}">
+                <a16:creationId xmlns:a16="http://schemas.microsoft.com/office/drawing/2014/main" id="{AB21BA3D-CD39-B1F4-7527-7D54A70003C0}"/>
+              </a:ext>
+            </a:extLst>
+          </p:cNvPr>
+          <p:cNvSpPr>
+            <a:spLocks noGrp="1"/>
+          </p:cNvSpPr>
+          <p:nvPr>
+            <p:ph type="title"/>
+          </p:nvPr>
+        </p:nvSpPr>
+        <p:spPr/>
+        <p:txBody>
+          <a:bodyPr rtlCol="0"/>
+          <a:lstStyle/>
+          <a:p>
+            <a:pPr rtl="0"/>
+            <a:r>
+              <a:rPr lang="pl-PL" sz="4400" dirty="0"/>
+              <a:t>Co to jest, jak  działa i do czego może się przydać?</a:t>
+            </a:r>
+          </a:p>
+        </p:txBody>
+      </p:sp>
+      <p:sp>
+        <p:nvSpPr>
+          <p:cNvPr id="12" name="Prostokąt 11" descr="Blok z akcentem z lewej">
+            <a:extLst>
+              <a:ext uri="{FF2B5EF4-FFF2-40B4-BE49-F238E27FC236}">
+                <a16:creationId xmlns:a16="http://schemas.microsoft.com/office/drawing/2014/main" id="{12A5EBA9-3274-B6E2-E573-6D35F2361E89}"/>
+              </a:ext>
+              <a:ext uri="{C183D7F6-B498-43B3-948B-1728B52AA6E4}">
+                <adec:decorative xmlns:adec="http://schemas.microsoft.com/office/drawing/2017/decorative" val="1"/>
+              </a:ext>
+            </a:extLst>
+          </p:cNvPr>
+          <p:cNvSpPr/>
+          <p:nvPr/>
+        </p:nvSpPr>
+        <p:spPr>
+          <a:xfrm>
+            <a:off x="431800" y="1693917"/>
+            <a:ext cx="1984175" cy="114824"/>
+          </a:xfrm>
+          <a:prstGeom prst="rect">
+            <a:avLst/>
+          </a:prstGeom>
+          <a:solidFill>
+            <a:schemeClr val="accent1"/>
+          </a:solidFill>
+          <a:ln>
+            <a:noFill/>
+          </a:ln>
+        </p:spPr>
+        <p:style>
+          <a:lnRef idx="2">
+            <a:schemeClr val="accent1">
+              <a:shade val="50000"/>
+            </a:schemeClr>
+          </a:lnRef>
+          <a:fillRef idx="1">
+            <a:schemeClr val="accent1"/>
+          </a:fillRef>
+          <a:effectRef idx="0">
+            <a:schemeClr val="accent1"/>
+          </a:effectRef>
+          <a:fontRef idx="minor">
+            <a:schemeClr val="lt1"/>
+          </a:fontRef>
+        </p:style>
+        <p:txBody>
+          <a:bodyPr rtlCol="0" anchor="ctr"/>
+          <a:lstStyle/>
+          <a:p>
+            <a:pPr algn="l" rtl="0"/>
+            <a:endParaRPr lang="pl-PL" dirty="0"/>
+          </a:p>
+        </p:txBody>
+      </p:sp>
+      <p:sp>
+        <p:nvSpPr>
+          <p:cNvPr id="4" name="Tekst — symbol zastępczy 3">
+            <a:extLst>
+              <a:ext uri="{FF2B5EF4-FFF2-40B4-BE49-F238E27FC236}">
+                <a16:creationId xmlns:a16="http://schemas.microsoft.com/office/drawing/2014/main" id="{1E8CAE51-5EF5-6148-4A9E-7775768DF841}"/>
+              </a:ext>
+            </a:extLst>
+          </p:cNvPr>
+          <p:cNvSpPr>
+            <a:spLocks noGrp="1"/>
+          </p:cNvSpPr>
+          <p:nvPr>
+            <p:ph type="body" idx="1"/>
+          </p:nvPr>
+        </p:nvSpPr>
+        <p:spPr>
+          <a:xfrm>
+            <a:off x="432000" y="2036534"/>
+            <a:ext cx="5472000" cy="360000"/>
+          </a:xfrm>
+        </p:spPr>
+        <p:txBody>
+          <a:bodyPr rtlCol="0"/>
+          <a:lstStyle/>
+          <a:p>
+            <a:r>
+              <a:rPr lang="pl-PL" dirty="0"/>
+              <a:t>Wyniki na zbiorze testowym</a:t>
+            </a:r>
+          </a:p>
+        </p:txBody>
+      </p:sp>
+      <p:cxnSp>
+        <p:nvCxnSpPr>
+          <p:cNvPr id="11" name="Łącznik prosty 10" descr="Podział slajdu">
+            <a:extLst>
+              <a:ext uri="{FF2B5EF4-FFF2-40B4-BE49-F238E27FC236}">
+                <a16:creationId xmlns:a16="http://schemas.microsoft.com/office/drawing/2014/main" id="{F2D24A4D-84B0-941F-9B42-EAC1C1D844C5}"/>
+              </a:ext>
+              <a:ext uri="{C183D7F6-B498-43B3-948B-1728B52AA6E4}">
+                <adec:decorative xmlns:adec="http://schemas.microsoft.com/office/drawing/2017/decorative" val="1"/>
+              </a:ext>
+            </a:extLst>
+          </p:cNvPr>
+          <p:cNvCxnSpPr/>
+          <p:nvPr/>
+        </p:nvCxnSpPr>
+        <p:spPr>
+          <a:xfrm>
+            <a:off x="5740400" y="1965101"/>
+            <a:ext cx="0" cy="2411330"/>
+          </a:xfrm>
+          <a:prstGeom prst="line">
+            <a:avLst/>
+          </a:prstGeom>
+          <a:ln>
+            <a:solidFill>
+              <a:schemeClr val="bg1">
+                <a:lumMod val="95000"/>
+              </a:schemeClr>
+            </a:solidFill>
+          </a:ln>
+        </p:spPr>
+        <p:style>
+          <a:lnRef idx="1">
+            <a:schemeClr val="accent1"/>
+          </a:lnRef>
+          <a:fillRef idx="0">
+            <a:schemeClr val="accent1"/>
+          </a:fillRef>
+          <a:effectRef idx="0">
+            <a:schemeClr val="accent1"/>
+          </a:effectRef>
+          <a:fontRef idx="minor">
+            <a:schemeClr val="tx1"/>
+          </a:fontRef>
+        </p:style>
+      </p:cxnSp>
+      <p:sp>
+        <p:nvSpPr>
+          <p:cNvPr id="13" name="Prostokąt 12" descr="Kreska z akcentem z prawej&#10;">
+            <a:extLst>
+              <a:ext uri="{FF2B5EF4-FFF2-40B4-BE49-F238E27FC236}">
+                <a16:creationId xmlns:a16="http://schemas.microsoft.com/office/drawing/2014/main" id="{20203F18-D64F-1F39-7246-BFA8DA04BFB7}"/>
+              </a:ext>
+              <a:ext uri="{C183D7F6-B498-43B3-948B-1728B52AA6E4}">
+                <adec:decorative xmlns:adec="http://schemas.microsoft.com/office/drawing/2017/decorative" val="1"/>
+              </a:ext>
+            </a:extLst>
+          </p:cNvPr>
+          <p:cNvSpPr/>
+          <p:nvPr/>
+        </p:nvSpPr>
+        <p:spPr>
+          <a:xfrm>
+            <a:off x="6299887" y="1693917"/>
+            <a:ext cx="1984175" cy="114824"/>
+          </a:xfrm>
+          <a:prstGeom prst="rect">
+            <a:avLst/>
+          </a:prstGeom>
+          <a:solidFill>
+            <a:schemeClr val="accent3"/>
+          </a:solidFill>
+          <a:ln>
+            <a:noFill/>
+          </a:ln>
+        </p:spPr>
+        <p:style>
+          <a:lnRef idx="2">
+            <a:schemeClr val="accent1">
+              <a:shade val="50000"/>
+            </a:schemeClr>
+          </a:lnRef>
+          <a:fillRef idx="1">
+            <a:schemeClr val="accent1"/>
+          </a:fillRef>
+          <a:effectRef idx="0">
+            <a:schemeClr val="accent1"/>
+          </a:effectRef>
+          <a:fontRef idx="minor">
+            <a:schemeClr val="lt1"/>
+          </a:fontRef>
+        </p:style>
+        <p:txBody>
+          <a:bodyPr rtlCol="0" anchor="ctr"/>
+          <a:lstStyle/>
+          <a:p>
+            <a:pPr algn="l" rtl="0"/>
+            <a:endParaRPr lang="pl-PL" dirty="0"/>
+          </a:p>
+        </p:txBody>
+      </p:sp>
+      <p:sp>
+        <p:nvSpPr>
+          <p:cNvPr id="6" name="Tekst — symbol zastępczy 5">
+            <a:extLst>
+              <a:ext uri="{FF2B5EF4-FFF2-40B4-BE49-F238E27FC236}">
+                <a16:creationId xmlns:a16="http://schemas.microsoft.com/office/drawing/2014/main" id="{1E264CFE-FB63-6B65-30BF-61F9C2D097FA}"/>
+              </a:ext>
+            </a:extLst>
+          </p:cNvPr>
+          <p:cNvSpPr>
+            <a:spLocks noGrp="1"/>
+          </p:cNvSpPr>
+          <p:nvPr>
+            <p:ph type="body" sz="quarter" idx="13"/>
+          </p:nvPr>
+        </p:nvSpPr>
+        <p:spPr>
+          <a:xfrm>
+            <a:off x="6300000" y="2037059"/>
+            <a:ext cx="5472000" cy="358775"/>
+          </a:xfrm>
+        </p:spPr>
+        <p:txBody>
+          <a:bodyPr rtlCol="0"/>
+          <a:lstStyle/>
+          <a:p>
+            <a:r>
+              <a:rPr lang="pl-PL" dirty="0"/>
+              <a:t>Wyniki na zbiorze walidacyjnym</a:t>
+            </a:r>
+          </a:p>
+        </p:txBody>
+      </p:sp>
+      <p:sp>
+        <p:nvSpPr>
+          <p:cNvPr id="8" name="Numer slajdu — symbol zastępczy 7">
+            <a:extLst>
+              <a:ext uri="{FF2B5EF4-FFF2-40B4-BE49-F238E27FC236}">
+                <a16:creationId xmlns:a16="http://schemas.microsoft.com/office/drawing/2014/main" id="{E62507D4-A9A6-1010-35C5-B445A8860BF6}"/>
+              </a:ext>
+            </a:extLst>
+          </p:cNvPr>
+          <p:cNvSpPr>
+            <a:spLocks noGrp="1"/>
+          </p:cNvSpPr>
+          <p:nvPr>
+            <p:ph type="sldNum" sz="quarter" idx="33"/>
+          </p:nvPr>
+        </p:nvSpPr>
+        <p:spPr>
+          <a:xfrm>
+            <a:off x="11760000" y="6371351"/>
+            <a:ext cx="432000" cy="432000"/>
+          </a:xfrm>
+        </p:spPr>
+        <p:txBody>
+          <a:bodyPr rtlCol="0"/>
+          <a:lstStyle/>
+          <a:p>
+            <a:pPr rtl="0"/>
+            <a:fld id="{19B51A1E-902D-48AF-9020-955120F399B6}" type="slidenum">
+              <a:rPr lang="pl-PL" smtClean="0"/>
+              <a:pPr rtl="0"/>
+              <a:t>7</a:t>
+            </a:fld>
+            <a:endParaRPr lang="pl-PL" dirty="0"/>
+          </a:p>
+        </p:txBody>
+      </p:sp>
+      <p:pic>
+        <p:nvPicPr>
+          <p:cNvPr id="9" name="Obraz 8">
+            <a:extLst>
+              <a:ext uri="{FF2B5EF4-FFF2-40B4-BE49-F238E27FC236}">
+                <a16:creationId xmlns:a16="http://schemas.microsoft.com/office/drawing/2014/main" id="{0F2A7387-616A-5CA7-99A2-A3DFB1294E6F}"/>
+              </a:ext>
+            </a:extLst>
+          </p:cNvPr>
+          <p:cNvPicPr>
+            <a:picLocks noChangeAspect="1"/>
+          </p:cNvPicPr>
+          <p:nvPr/>
+        </p:nvPicPr>
+        <p:blipFill>
+          <a:blip r:embed="rId3"/>
+          <a:stretch>
+            <a:fillRect/>
+          </a:stretch>
+        </p:blipFill>
+        <p:spPr>
+          <a:xfrm>
+            <a:off x="420000" y="2541059"/>
+            <a:ext cx="4830275" cy="3440167"/>
+          </a:xfrm>
+          <a:prstGeom prst="rect">
+            <a:avLst/>
+          </a:prstGeom>
+        </p:spPr>
+      </p:pic>
+      <p:pic>
+        <p:nvPicPr>
+          <p:cNvPr id="18" name="Obraz 17">
+            <a:extLst>
+              <a:ext uri="{FF2B5EF4-FFF2-40B4-BE49-F238E27FC236}">
+                <a16:creationId xmlns:a16="http://schemas.microsoft.com/office/drawing/2014/main" id="{2E621D97-01E2-D3CF-1F2E-8DEB86F17B36}"/>
+              </a:ext>
+            </a:extLst>
+          </p:cNvPr>
+          <p:cNvPicPr>
+            <a:picLocks noChangeAspect="1"/>
+          </p:cNvPicPr>
+          <p:nvPr/>
+        </p:nvPicPr>
+        <p:blipFill>
+          <a:blip r:embed="rId4"/>
+          <a:stretch>
+            <a:fillRect/>
+          </a:stretch>
+        </p:blipFill>
+        <p:spPr>
+          <a:xfrm>
+            <a:off x="6322738" y="2541059"/>
+            <a:ext cx="4726063" cy="3365946"/>
+          </a:xfrm>
+          <a:prstGeom prst="rect">
+            <a:avLst/>
+          </a:prstGeom>
+        </p:spPr>
+      </p:pic>
+    </p:spTree>
+    <p:extLst>
+      <p:ext uri="{BB962C8B-B14F-4D97-AF65-F5344CB8AC3E}">
+        <p14:creationId xmlns:p14="http://schemas.microsoft.com/office/powerpoint/2010/main" val="3207873451"/>
+      </p:ext>
+    </p:extLst>
+  </p:cSld>
+  <p:clrMapOvr>
+    <a:masterClrMapping/>
+  </p:clrMapOvr>
+</p:sld>
+</file>
+
+<file path=ppt/slides/slide8.xml><?xml version="1.0" encoding="utf-8"?>
+<p:sld xmlns:a="http://schemas.openxmlformats.org/drawingml/2006/main" xmlns:r="http://schemas.openxmlformats.org/officeDocument/2006/relationships" xmlns:p="http://schemas.openxmlformats.org/presentationml/2006/main">
+  <p:cSld>
+    <p:spTree>
+      <p:nvGrpSpPr>
+        <p:cNvPr id="1" name="">
+          <a:extLst>
+            <a:ext uri="{FF2B5EF4-FFF2-40B4-BE49-F238E27FC236}">
+              <a16:creationId xmlns:a16="http://schemas.microsoft.com/office/drawing/2014/main" id="{8C561970-819E-08F2-F201-619F003574F5}"/>
+            </a:ext>
+          </a:extLst>
+        </p:cNvPr>
+        <p:cNvGrpSpPr/>
+        <p:nvPr/>
+      </p:nvGrpSpPr>
+      <p:grpSpPr>
+        <a:xfrm>
+          <a:off x="0" y="0"/>
+          <a:ext cx="0" cy="0"/>
+          <a:chOff x="0" y="0"/>
+          <a:chExt cx="0" cy="0"/>
+        </a:xfrm>
+      </p:grpSpPr>
+      <p:sp>
+        <p:nvSpPr>
+          <p:cNvPr id="2" name="Tytuł 1">
+            <a:extLst>
+              <a:ext uri="{FF2B5EF4-FFF2-40B4-BE49-F238E27FC236}">
+                <a16:creationId xmlns:a16="http://schemas.microsoft.com/office/drawing/2014/main" id="{D225413B-225F-1515-3E08-81B3895040A9}"/>
+              </a:ext>
+            </a:extLst>
+          </p:cNvPr>
+          <p:cNvSpPr>
+            <a:spLocks noGrp="1"/>
+          </p:cNvSpPr>
+          <p:nvPr>
+            <p:ph type="title"/>
+          </p:nvPr>
+        </p:nvSpPr>
+        <p:spPr/>
+        <p:txBody>
+          <a:bodyPr rtlCol="0"/>
+          <a:lstStyle/>
+          <a:p>
+            <a:pPr rtl="0"/>
+            <a:r>
+              <a:rPr lang="pl-PL" dirty="0"/>
+              <a:t>Najważniejsze cechy klastrów</a:t>
+            </a:r>
+          </a:p>
+        </p:txBody>
+      </p:sp>
+      <p:sp>
+        <p:nvSpPr>
+          <p:cNvPr id="8" name="Numer slajdu — symbol zastępczy 7">
+            <a:extLst>
+              <a:ext uri="{FF2B5EF4-FFF2-40B4-BE49-F238E27FC236}">
+                <a16:creationId xmlns:a16="http://schemas.microsoft.com/office/drawing/2014/main" id="{376E8DCA-F48A-7FFF-6F59-F14F6EC1467C}"/>
+              </a:ext>
+            </a:extLst>
+          </p:cNvPr>
+          <p:cNvSpPr>
+            <a:spLocks noGrp="1"/>
+          </p:cNvSpPr>
+          <p:nvPr>
+            <p:ph type="sldNum" sz="quarter" idx="33"/>
+          </p:nvPr>
+        </p:nvSpPr>
+        <p:spPr>
+          <a:xfrm>
+            <a:off x="11760000" y="6371351"/>
+            <a:ext cx="432000" cy="432000"/>
+          </a:xfrm>
+        </p:spPr>
+        <p:txBody>
+          <a:bodyPr rtlCol="0"/>
+          <a:lstStyle/>
+          <a:p>
+            <a:pPr rtl="0"/>
+            <a:fld id="{19B51A1E-902D-48AF-9020-955120F399B6}" type="slidenum">
+              <a:rPr lang="pl-PL" smtClean="0"/>
+              <a:pPr rtl="0"/>
+              <a:t>8</a:t>
+            </a:fld>
+            <a:endParaRPr lang="pl-PL" dirty="0"/>
+          </a:p>
+        </p:txBody>
+      </p:sp>
+      <p:pic>
+        <p:nvPicPr>
+          <p:cNvPr id="23" name="Obraz 22">
+            <a:extLst>
+              <a:ext uri="{FF2B5EF4-FFF2-40B4-BE49-F238E27FC236}">
+                <a16:creationId xmlns:a16="http://schemas.microsoft.com/office/drawing/2014/main" id="{FE827C7E-9D48-43D1-1CCE-A6BA068FD008}"/>
+              </a:ext>
+            </a:extLst>
+          </p:cNvPr>
+          <p:cNvPicPr>
+            <a:picLocks noChangeAspect="1"/>
+          </p:cNvPicPr>
+          <p:nvPr/>
+        </p:nvPicPr>
+        <p:blipFill>
+          <a:blip r:embed="rId3"/>
+          <a:stretch>
+            <a:fillRect/>
+          </a:stretch>
+        </p:blipFill>
+        <p:spPr>
+          <a:xfrm>
+            <a:off x="98246" y="1145765"/>
+            <a:ext cx="5924070" cy="2283235"/>
+          </a:xfrm>
+          <a:prstGeom prst="rect">
+            <a:avLst/>
+          </a:prstGeom>
+        </p:spPr>
+      </p:pic>
+      <p:pic>
+        <p:nvPicPr>
+          <p:cNvPr id="4" name="Obraz 3">
+            <a:extLst>
+              <a:ext uri="{FF2B5EF4-FFF2-40B4-BE49-F238E27FC236}">
+                <a16:creationId xmlns:a16="http://schemas.microsoft.com/office/drawing/2014/main" id="{5244D18D-454D-2FC8-76F8-D206431F6632}"/>
+              </a:ext>
+            </a:extLst>
+          </p:cNvPr>
+          <p:cNvPicPr>
+            <a:picLocks noChangeAspect="1"/>
+          </p:cNvPicPr>
+          <p:nvPr/>
+        </p:nvPicPr>
+        <p:blipFill>
+          <a:blip r:embed="rId4"/>
+          <a:stretch>
+            <a:fillRect/>
+          </a:stretch>
+        </p:blipFill>
+        <p:spPr>
+          <a:xfrm>
+            <a:off x="6257026" y="2473676"/>
+            <a:ext cx="5836728" cy="2287998"/>
+          </a:xfrm>
+          <a:prstGeom prst="rect">
+            <a:avLst/>
+          </a:prstGeom>
+        </p:spPr>
+      </p:pic>
+      <p:pic>
+        <p:nvPicPr>
+          <p:cNvPr id="6" name="Obraz 5">
+            <a:extLst>
+              <a:ext uri="{FF2B5EF4-FFF2-40B4-BE49-F238E27FC236}">
+                <a16:creationId xmlns:a16="http://schemas.microsoft.com/office/drawing/2014/main" id="{4D1D8282-E44E-8C81-F8E6-646E6633F0C7}"/>
+              </a:ext>
+            </a:extLst>
+          </p:cNvPr>
+          <p:cNvPicPr>
+            <a:picLocks noChangeAspect="1"/>
+          </p:cNvPicPr>
+          <p:nvPr/>
+        </p:nvPicPr>
+        <p:blipFill>
+          <a:blip r:embed="rId5"/>
+          <a:stretch>
+            <a:fillRect/>
+          </a:stretch>
+        </p:blipFill>
+        <p:spPr>
+          <a:xfrm>
+            <a:off x="98246" y="3984081"/>
+            <a:ext cx="5924070" cy="2267808"/>
+          </a:xfrm>
+          <a:prstGeom prst="rect">
+            <a:avLst/>
+          </a:prstGeom>
+        </p:spPr>
+      </p:pic>
+    </p:spTree>
+    <p:extLst>
+      <p:ext uri="{BB962C8B-B14F-4D97-AF65-F5344CB8AC3E}">
+        <p14:creationId xmlns:p14="http://schemas.microsoft.com/office/powerpoint/2010/main" val="3473937371"/>
+      </p:ext>
+    </p:extLst>
+  </p:cSld>
+  <p:clrMapOvr>
+    <a:masterClrMapping/>
+  </p:clrMapOvr>
+</p:sld>
+</file>
+
+<file path=ppt/slides/slide9.xml><?xml version="1.0" encoding="utf-8"?>
+<p:sld xmlns:a="http://schemas.openxmlformats.org/drawingml/2006/main" xmlns:r="http://schemas.openxmlformats.org/officeDocument/2006/relationships" xmlns:p="http://schemas.openxmlformats.org/presentationml/2006/main">
+  <p:cSld>
+    <p:spTree>
+      <p:nvGrpSpPr>
+        <p:cNvPr id="1" name="">
+          <a:extLst>
+            <a:ext uri="{FF2B5EF4-FFF2-40B4-BE49-F238E27FC236}">
+              <a16:creationId xmlns:a16="http://schemas.microsoft.com/office/drawing/2014/main" id="{A784E359-D813-3745-605F-63454E48F937}"/>
+            </a:ext>
+          </a:extLst>
+        </p:cNvPr>
+        <p:cNvGrpSpPr/>
+        <p:nvPr/>
+      </p:nvGrpSpPr>
+      <p:grpSpPr>
+        <a:xfrm>
+          <a:off x="0" y="0"/>
+          <a:ext cx="0" cy="0"/>
+          <a:chOff x="0" y="0"/>
+          <a:chExt cx="0" cy="0"/>
+        </a:xfrm>
+      </p:grpSpPr>
+      <p:sp>
+        <p:nvSpPr>
+          <p:cNvPr id="2" name="Tytuł 1">
+            <a:extLst>
+              <a:ext uri="{FF2B5EF4-FFF2-40B4-BE49-F238E27FC236}">
+                <a16:creationId xmlns:a16="http://schemas.microsoft.com/office/drawing/2014/main" id="{A4D31930-3E9D-86DA-E688-AF93B6718DBD}"/>
+              </a:ext>
+            </a:extLst>
+          </p:cNvPr>
+          <p:cNvSpPr>
+            <a:spLocks noGrp="1"/>
+          </p:cNvSpPr>
+          <p:nvPr>
+            <p:ph type="title"/>
+          </p:nvPr>
+        </p:nvSpPr>
+        <p:spPr/>
+        <p:txBody>
+          <a:bodyPr rtlCol="0"/>
+          <a:lstStyle/>
+          <a:p>
+            <a:pPr rtl="0"/>
+            <a:r>
+              <a:rPr lang="pl-PL" dirty="0"/>
+              <a:t>Najważniejsze cechy klastrów</a:t>
+            </a:r>
+          </a:p>
+        </p:txBody>
+      </p:sp>
+      <p:sp>
+        <p:nvSpPr>
+          <p:cNvPr id="8" name="Numer slajdu — symbol zastępczy 7">
+            <a:extLst>
+              <a:ext uri="{FF2B5EF4-FFF2-40B4-BE49-F238E27FC236}">
+                <a16:creationId xmlns:a16="http://schemas.microsoft.com/office/drawing/2014/main" id="{C093B19C-6E2B-C5E1-4B08-9195E6F58736}"/>
+              </a:ext>
+            </a:extLst>
+          </p:cNvPr>
+          <p:cNvSpPr>
+            <a:spLocks noGrp="1"/>
+          </p:cNvSpPr>
+          <p:nvPr>
+            <p:ph type="sldNum" sz="quarter" idx="33"/>
+          </p:nvPr>
+        </p:nvSpPr>
+        <p:spPr>
+          <a:xfrm>
+            <a:off x="11760000" y="6371351"/>
+            <a:ext cx="432000" cy="432000"/>
+          </a:xfrm>
+        </p:spPr>
+        <p:txBody>
+          <a:bodyPr rtlCol="0"/>
+          <a:lstStyle/>
+          <a:p>
+            <a:pPr rtl="0"/>
+            <a:fld id="{19B51A1E-902D-48AF-9020-955120F399B6}" type="slidenum">
+              <a:rPr lang="pl-PL" smtClean="0"/>
+              <a:pPr rtl="0"/>
+              <a:t>9</a:t>
+            </a:fld>
+            <a:endParaRPr lang="pl-PL" dirty="0"/>
+          </a:p>
+        </p:txBody>
+      </p:sp>
+      <p:pic>
+        <p:nvPicPr>
+          <p:cNvPr id="9" name="Obraz 8">
+            <a:extLst>
+              <a:ext uri="{FF2B5EF4-FFF2-40B4-BE49-F238E27FC236}">
+                <a16:creationId xmlns:a16="http://schemas.microsoft.com/office/drawing/2014/main" id="{61704ED2-F9EC-6DA2-DD1D-698D0B990EC9}"/>
+              </a:ext>
+            </a:extLst>
+          </p:cNvPr>
+          <p:cNvPicPr>
+            <a:picLocks noChangeAspect="1"/>
+          </p:cNvPicPr>
+          <p:nvPr/>
+        </p:nvPicPr>
+        <p:blipFill>
+          <a:blip r:embed="rId3"/>
+          <a:stretch>
+            <a:fillRect/>
+          </a:stretch>
+        </p:blipFill>
+        <p:spPr>
+          <a:xfrm>
+            <a:off x="3089869" y="3754363"/>
+            <a:ext cx="6012261" cy="2413524"/>
+          </a:xfrm>
+          <a:prstGeom prst="rect">
+            <a:avLst/>
+          </a:prstGeom>
+        </p:spPr>
+      </p:pic>
+      <p:pic>
+        <p:nvPicPr>
+          <p:cNvPr id="11" name="Obraz 10">
+            <a:extLst>
+              <a:ext uri="{FF2B5EF4-FFF2-40B4-BE49-F238E27FC236}">
+                <a16:creationId xmlns:a16="http://schemas.microsoft.com/office/drawing/2014/main" id="{9CA551A0-5C93-9062-7900-E6E578605E6F}"/>
+              </a:ext>
+            </a:extLst>
+          </p:cNvPr>
+          <p:cNvPicPr>
+            <a:picLocks noChangeAspect="1"/>
+          </p:cNvPicPr>
+          <p:nvPr/>
+        </p:nvPicPr>
+        <p:blipFill>
+          <a:blip r:embed="rId4"/>
+          <a:stretch>
+            <a:fillRect/>
+          </a:stretch>
+        </p:blipFill>
+        <p:spPr>
+          <a:xfrm>
+            <a:off x="5798373" y="1063130"/>
+            <a:ext cx="6287448" cy="2275264"/>
+          </a:xfrm>
+          <a:prstGeom prst="rect">
+            <a:avLst/>
+          </a:prstGeom>
+        </p:spPr>
+      </p:pic>
+      <p:pic>
+        <p:nvPicPr>
+          <p:cNvPr id="13" name="Obraz 12">
+            <a:extLst>
+              <a:ext uri="{FF2B5EF4-FFF2-40B4-BE49-F238E27FC236}">
+                <a16:creationId xmlns:a16="http://schemas.microsoft.com/office/drawing/2014/main" id="{E5B4ABFA-7B12-CE0B-5B6F-86250FF30B77}"/>
+              </a:ext>
+            </a:extLst>
+          </p:cNvPr>
+          <p:cNvPicPr>
+            <a:picLocks noChangeAspect="1"/>
+          </p:cNvPicPr>
+          <p:nvPr/>
+        </p:nvPicPr>
+        <p:blipFill>
+          <a:blip r:embed="rId5"/>
+          <a:stretch>
+            <a:fillRect/>
+          </a:stretch>
+        </p:blipFill>
+        <p:spPr>
+          <a:xfrm>
+            <a:off x="106179" y="1102870"/>
+            <a:ext cx="5568848" cy="2235523"/>
+          </a:xfrm>
+          <a:prstGeom prst="rect">
+            <a:avLst/>
+          </a:prstGeom>
+        </p:spPr>
+      </p:pic>
+    </p:spTree>
+    <p:extLst>
+      <p:ext uri="{BB962C8B-B14F-4D97-AF65-F5344CB8AC3E}">
+        <p14:creationId xmlns:p14="http://schemas.microsoft.com/office/powerpoint/2010/main" val="2527696421"/>
       </p:ext>
     </p:extLst>
   </p:cSld>
@@ -12684,15 +13177,6 @@
 </file>
 
 <file path=customXml/item1.xml><?xml version="1.0" encoding="utf-8"?>
-<p:properties xmlns:p="http://schemas.microsoft.com/office/2006/metadata/properties" xmlns:xsi="http://www.w3.org/2001/XMLSchema-instance" xmlns:pc="http://schemas.microsoft.com/office/infopath/2007/PartnerControls">
-  <documentManagement>
-    <_ip_UnifiedCompliancePolicyUIAction xmlns="http://schemas.microsoft.com/sharepoint/v3" xsi:nil="true"/>
-    <_ip_UnifiedCompliancePolicyProperties xmlns="http://schemas.microsoft.com/sharepoint/v3" xsi:nil="true"/>
-  </documentManagement>
-</p:properties>
-</file>
-
-<file path=customXml/item2.xml><?xml version="1.0" encoding="utf-8"?>
 <ct:contentTypeSchema xmlns:ct="http://schemas.microsoft.com/office/2006/metadata/contentType" xmlns:ma="http://schemas.microsoft.com/office/2006/metadata/properties/metaAttributes" ct:_="" ma:_="" ma:contentTypeName="Document" ma:contentTypeID="0x010100DEEA25CC0A0AC24199CDC46C25B8B0BC" ma:contentTypeVersion="9" ma:contentTypeDescription="Create a new document." ma:contentTypeScope="" ma:versionID="76e25e1730b4532ab1d5e5b131a96a5a">
   <xsd:schema xmlns:xsd="http://www.w3.org/2001/XMLSchema" xmlns:xs="http://www.w3.org/2001/XMLSchema" xmlns:p="http://schemas.microsoft.com/office/2006/metadata/properties" xmlns:ns1="http://schemas.microsoft.com/sharepoint/v3" xmlns:ns2="6dc4bcd6-49db-4c07-9060-8acfc67cef9f" xmlns:ns3="fb0879af-3eba-417a-a55a-ffe6dcd6ca77" targetNamespace="http://schemas.microsoft.com/office/2006/metadata/properties" ma:root="true" ma:fieldsID="ad1e9281a84c4949647088091c718de3" ns1:_="" ns2:_="" ns3:_="">
     <xsd:import namespace="http://schemas.microsoft.com/sharepoint/v3"/>
@@ -12894,25 +13378,16 @@
 </ct:contentTypeSchema>
 </file>
 
-<file path=customXml/itemProps1.xml><?xml version="1.0" encoding="utf-8"?>
-<ds:datastoreItem xmlns:ds="http://schemas.openxmlformats.org/officeDocument/2006/customXml" ds:itemID="{EB2218FC-8412-44B9-9E82-D51F1F531141}">
-  <ds:schemaRefs>
-    <ds:schemaRef ds:uri="http://purl.org/dc/elements/1.1/"/>
-    <ds:schemaRef ds:uri="http://schemas.microsoft.com/sharepoint/v3"/>
-    <ds:schemaRef ds:uri="http://schemas.microsoft.com/office/2006/documentManagement/types"/>
-    <ds:schemaRef ds:uri="fb0879af-3eba-417a-a55a-ffe6dcd6ca77"/>
-    <ds:schemaRef ds:uri="http://schemas.microsoft.com/office/2006/metadata/properties"/>
-    <ds:schemaRef ds:uri="http://schemas.microsoft.com/office/infopath/2007/PartnerControls"/>
-    <ds:schemaRef ds:uri="6dc4bcd6-49db-4c07-9060-8acfc67cef9f"/>
-    <ds:schemaRef ds:uri="http://www.w3.org/XML/1998/namespace"/>
-    <ds:schemaRef ds:uri="http://schemas.openxmlformats.org/package/2006/metadata/core-properties"/>
-    <ds:schemaRef ds:uri="http://purl.org/dc/dcmitype/"/>
-    <ds:schemaRef ds:uri="http://purl.org/dc/terms/"/>
-  </ds:schemaRefs>
-</ds:datastoreItem>
+<file path=customXml/item2.xml><?xml version="1.0" encoding="utf-8"?>
+<p:properties xmlns:p="http://schemas.microsoft.com/office/2006/metadata/properties" xmlns:xsi="http://www.w3.org/2001/XMLSchema-instance" xmlns:pc="http://schemas.microsoft.com/office/infopath/2007/PartnerControls">
+  <documentManagement>
+    <_ip_UnifiedCompliancePolicyUIAction xmlns="http://schemas.microsoft.com/sharepoint/v3" xsi:nil="true"/>
+    <_ip_UnifiedCompliancePolicyProperties xmlns="http://schemas.microsoft.com/sharepoint/v3" xsi:nil="true"/>
+  </documentManagement>
+</p:properties>
 </file>
 
-<file path=customXml/itemProps2.xml><?xml version="1.0" encoding="utf-8"?>
+<file path=customXml/itemProps1.xml><?xml version="1.0" encoding="utf-8"?>
 <ds:datastoreItem xmlns:ds="http://schemas.openxmlformats.org/officeDocument/2006/customXml" ds:itemID="{B64A4C9D-F801-4923-BC6D-E0006F512331}">
   <ds:schemaRefs>
     <ds:schemaRef ds:uri="http://schemas.microsoft.com/office/2006/metadata/contentType"/>
@@ -12930,4 +13405,22 @@
     <ds:schemaRef ds:uri="http://schemas.microsoft.com/internal/obd"/>
   </ds:schemaRefs>
 </ds:datastoreItem>
+</file>
+
+<file path=customXml/itemProps2.xml><?xml version="1.0" encoding="utf-8"?>
+<ds:datastoreItem xmlns:ds="http://schemas.openxmlformats.org/officeDocument/2006/customXml" ds:itemID="{EB2218FC-8412-44B9-9E82-D51F1F531141}">
+  <ds:schemaRefs>
+    <ds:schemaRef ds:uri="http://purl.org/dc/elements/1.1/"/>
+    <ds:schemaRef ds:uri="http://schemas.microsoft.com/sharepoint/v3"/>
+    <ds:schemaRef ds:uri="http://schemas.microsoft.com/office/2006/documentManagement/types"/>
+    <ds:schemaRef ds:uri="fb0879af-3eba-417a-a55a-ffe6dcd6ca77"/>
+    <ds:schemaRef ds:uri="http://schemas.microsoft.com/office/2006/metadata/properties"/>
+    <ds:schemaRef ds:uri="http://schemas.microsoft.com/office/infopath/2007/PartnerControls"/>
+    <ds:schemaRef ds:uri="6dc4bcd6-49db-4c07-9060-8acfc67cef9f"/>
+    <ds:schemaRef ds:uri="http://www.w3.org/XML/1998/namespace"/>
+    <ds:schemaRef ds:uri="http://schemas.openxmlformats.org/package/2006/metadata/core-properties"/>
+    <ds:schemaRef ds:uri="http://purl.org/dc/dcmitype/"/>
+    <ds:schemaRef ds:uri="http://purl.org/dc/terms/"/>
+  </ds:schemaRefs>
+</ds:datastoreItem>
 </file>